--- a/output/wordlabs-cred-3day.pptx
+++ b/output/wordlabs-cred-3day.pptx
@@ -5622,7 +5622,7 @@
                 <a:ea typeface="Trebuchet MS" pitchFamily="34" charset="-122"/>
                 <a:cs typeface="Trebuchet MS" pitchFamily="34" charset="-120"/>
               </a:rPr>
-              <a:t>0</a:t>
+              <a:t>1</a:t>
             </a:r>
             <a:pPr algn="ctr" indent="0" marL="0">
               <a:buNone/>
@@ -6040,7 +6040,7 @@
                 <a:ea typeface="Calibri" pitchFamily="34" charset="-122"/>
                 <a:cs typeface="Calibri" pitchFamily="34" charset="-120"/>
               </a:rPr>
-              <a:t>The </a:t>
+              <a:t>The reporter said the new evidence was </a:t>
             </a:r>
             <a:pPr algn="l" indent="0" marL="0">
               <a:buNone/>
@@ -6071,7 +6071,7 @@
                 <a:ea typeface="Calibri" pitchFamily="34" charset="-122"/>
                 <a:cs typeface="Calibri" pitchFamily="34" charset="-120"/>
               </a:rPr>
-              <a:t> witness gave </a:t>
+              <a:t>, which helped to </a:t>
             </a:r>
             <a:pPr algn="l" indent="0" marL="0">
               <a:buNone/>
@@ -6088,7 +6088,7 @@
                 <a:ea typeface="Calibri" pitchFamily="34" charset="-122"/>
                 <a:cs typeface="Calibri" pitchFamily="34" charset="-120"/>
               </a:rPr>
-              <a:t>incredible</a:t>
+              <a:t>discredit</a:t>
             </a:r>
             <a:pPr algn="l" indent="0" marL="0">
               <a:buNone/>
@@ -6102,7 +6102,7 @@
                 <a:ea typeface="Calibri" pitchFamily="34" charset="-122"/>
                 <a:cs typeface="Calibri" pitchFamily="34" charset="-120"/>
               </a:rPr>
-              <a:t> details about what she had seen at the harbour.</a:t>
+              <a:t> the false story.</a:t>
             </a:r>
             <a:endParaRPr lang="en-US" sz="1800" dirty="0"/>
           </a:p>
@@ -6385,7 +6385,7 @@
                 <a:ea typeface="Trebuchet MS" pitchFamily="34" charset="-122"/>
                 <a:cs typeface="Trebuchet MS" pitchFamily="34" charset="-120"/>
               </a:rPr>
-              <a:t>incredible</a:t>
+              <a:t>discredit</a:t>
             </a:r>
             <a:endParaRPr lang="en-US" sz="1400" dirty="0"/>
           </a:p>
@@ -10629,11 +10629,11 @@
         <p:spPr>
           <a:xfrm>
             <a:off x="1874520" y="4096512"/>
-            <a:ext cx="6903720" cy="658368"/>
+            <a:ext cx="6903720" cy="804672"/>
           </a:xfrm>
           <a:prstGeom prst="rect">
             <a:avLst>
-              <a:gd name="adj" fmla="val 8333"/>
+              <a:gd name="adj" fmla="val 6818"/>
             </a:avLst>
           </a:prstGeom>
           <a:solidFill>
@@ -10655,12 +10655,12 @@
         </p:nvSpPr>
         <p:spPr>
           <a:xfrm>
-            <a:off x="2254649" y="4169664"/>
-            <a:ext cx="685800" cy="475488"/>
+            <a:off x="2124837" y="4169664"/>
+            <a:ext cx="685800" cy="384048"/>
           </a:xfrm>
           <a:prstGeom prst="rect">
             <a:avLst>
-              <a:gd name="adj" fmla="val 7692"/>
+              <a:gd name="adj" fmla="val 9524"/>
             </a:avLst>
           </a:prstGeom>
           <a:solidFill>
@@ -10682,8 +10682,8 @@
         </p:nvSpPr>
         <p:spPr>
           <a:xfrm>
-            <a:off x="2254649" y="4169664"/>
-            <a:ext cx="685800" cy="475488"/>
+            <a:off x="2124837" y="4169664"/>
+            <a:ext cx="685800" cy="384048"/>
           </a:xfrm>
           <a:prstGeom prst="rect">
             <a:avLst/>
@@ -10707,7 +10707,7 @@
                 <a:ea typeface="Trebuchet MS" pitchFamily="34" charset="-122"/>
                 <a:cs typeface="Trebuchet MS" pitchFamily="34" charset="-120"/>
               </a:rPr>
-              <a:t>cr</a:t>
+              <a:t>c</a:t>
             </a:r>
             <a:endParaRPr lang="en-US" sz="900" dirty="0"/>
           </a:p>
@@ -10715,18 +10715,57 @@
       </p:sp>
       <p:sp>
         <p:nvSpPr>
-          <p:cNvPr id="38" name="Shape 36"/>
-          <p:cNvSpPr/>
-          <p:nvPr/>
-        </p:nvSpPr>
-        <p:spPr>
-          <a:xfrm>
-            <a:off x="3293146" y="4169664"/>
-            <a:ext cx="685800" cy="475488"/>
+          <p:cNvPr id="38" name="Text 36"/>
+          <p:cNvSpPr/>
+          <p:nvPr/>
+        </p:nvSpPr>
+        <p:spPr>
+          <a:xfrm>
+            <a:off x="2124837" y="4572000"/>
+            <a:ext cx="685800" cy="219456"/>
+          </a:xfrm>
+          <a:prstGeom prst="rect">
+            <a:avLst/>
+          </a:prstGeom>
+          <a:noFill/>
+          <a:ln/>
+        </p:spPr>
+        <p:txBody>
+          <a:bodyPr wrap="square" lIns="0" tIns="0" rIns="0" bIns="0" rtlCol="0" anchor="t"/>
+          <a:lstStyle/>
+          <a:p>
+            <a:pPr algn="ctr" indent="0" marL="0">
+              <a:buNone/>
+            </a:pPr>
+            <a:r>
+              <a:rPr lang="en-US" sz="750" i="1" dirty="0">
+                <a:solidFill>
+                  <a:srgbClr val="94A3B8"/>
+                </a:solidFill>
+                <a:latin typeface="Calibri" pitchFamily="34" charset="0"/>
+                <a:ea typeface="Calibri" pitchFamily="34" charset="-122"/>
+                <a:cs typeface="Calibri" pitchFamily="34" charset="-120"/>
+              </a:rPr>
+              <a:t>/k/</a:t>
+            </a:r>
+            <a:endParaRPr lang="en-US" sz="750" dirty="0"/>
+          </a:p>
+        </p:txBody>
+      </p:sp>
+      <p:sp>
+        <p:nvSpPr>
+          <p:cNvPr id="39" name="Shape 37"/>
+          <p:cNvSpPr/>
+          <p:nvPr/>
+        </p:nvSpPr>
+        <p:spPr>
+          <a:xfrm>
+            <a:off x="3033522" y="4169664"/>
+            <a:ext cx="685800" cy="384048"/>
           </a:xfrm>
           <a:prstGeom prst="rect">
             <a:avLst>
-              <a:gd name="adj" fmla="val 7692"/>
+              <a:gd name="adj" fmla="val 9524"/>
             </a:avLst>
           </a:prstGeom>
           <a:solidFill>
@@ -10742,14 +10781,14 @@
       </p:sp>
       <p:sp>
         <p:nvSpPr>
-          <p:cNvPr id="39" name="Text 37"/>
-          <p:cNvSpPr/>
-          <p:nvPr/>
-        </p:nvSpPr>
-        <p:spPr>
-          <a:xfrm>
-            <a:off x="3293146" y="4169664"/>
-            <a:ext cx="685800" cy="475488"/>
+          <p:cNvPr id="40" name="Text 38"/>
+          <p:cNvSpPr/>
+          <p:nvPr/>
+        </p:nvSpPr>
+        <p:spPr>
+          <a:xfrm>
+            <a:off x="3033522" y="4169664"/>
+            <a:ext cx="685800" cy="384048"/>
           </a:xfrm>
           <a:prstGeom prst="rect">
             <a:avLst/>
@@ -10773,7 +10812,7 @@
                 <a:ea typeface="Trebuchet MS" pitchFamily="34" charset="-122"/>
                 <a:cs typeface="Trebuchet MS" pitchFamily="34" charset="-120"/>
               </a:rPr>
-              <a:t>e</a:t>
+              <a:t>r</a:t>
             </a:r>
             <a:endParaRPr lang="en-US" sz="900" dirty="0"/>
           </a:p>
@@ -10781,18 +10820,18 @@
       </p:sp>
       <p:sp>
         <p:nvSpPr>
-          <p:cNvPr id="40" name="Shape 38"/>
-          <p:cNvSpPr/>
-          <p:nvPr/>
-        </p:nvSpPr>
-        <p:spPr>
-          <a:xfrm>
-            <a:off x="4331643" y="4169664"/>
-            <a:ext cx="685800" cy="475488"/>
+          <p:cNvPr id="41" name="Shape 39"/>
+          <p:cNvSpPr/>
+          <p:nvPr/>
+        </p:nvSpPr>
+        <p:spPr>
+          <a:xfrm>
+            <a:off x="3942207" y="4169664"/>
+            <a:ext cx="685800" cy="384048"/>
           </a:xfrm>
           <a:prstGeom prst="rect">
             <a:avLst>
-              <a:gd name="adj" fmla="val 7692"/>
+              <a:gd name="adj" fmla="val 9524"/>
             </a:avLst>
           </a:prstGeom>
           <a:solidFill>
@@ -10808,14 +10847,14 @@
       </p:sp>
       <p:sp>
         <p:nvSpPr>
-          <p:cNvPr id="41" name="Text 39"/>
-          <p:cNvSpPr/>
-          <p:nvPr/>
-        </p:nvSpPr>
-        <p:spPr>
-          <a:xfrm>
-            <a:off x="4331643" y="4169664"/>
-            <a:ext cx="685800" cy="475488"/>
+          <p:cNvPr id="42" name="Text 40"/>
+          <p:cNvSpPr/>
+          <p:nvPr/>
+        </p:nvSpPr>
+        <p:spPr>
+          <a:xfrm>
+            <a:off x="3942207" y="4169664"/>
+            <a:ext cx="685800" cy="384048"/>
           </a:xfrm>
           <a:prstGeom prst="rect">
             <a:avLst/>
@@ -10839,7 +10878,7 @@
                 <a:ea typeface="Trebuchet MS" pitchFamily="34" charset="-122"/>
                 <a:cs typeface="Trebuchet MS" pitchFamily="34" charset="-120"/>
               </a:rPr>
-              <a:t>d</a:t>
+              <a:t>e</a:t>
             </a:r>
             <a:endParaRPr lang="en-US" sz="900" dirty="0"/>
           </a:p>
@@ -10847,18 +10886,18 @@
       </p:sp>
       <p:sp>
         <p:nvSpPr>
-          <p:cNvPr id="42" name="Shape 40"/>
-          <p:cNvSpPr/>
-          <p:nvPr/>
-        </p:nvSpPr>
-        <p:spPr>
-          <a:xfrm>
-            <a:off x="5370141" y="4169664"/>
-            <a:ext cx="685800" cy="475488"/>
+          <p:cNvPr id="43" name="Shape 41"/>
+          <p:cNvSpPr/>
+          <p:nvPr/>
+        </p:nvSpPr>
+        <p:spPr>
+          <a:xfrm>
+            <a:off x="4850892" y="4169664"/>
+            <a:ext cx="685800" cy="384048"/>
           </a:xfrm>
           <a:prstGeom prst="rect">
             <a:avLst>
-              <a:gd name="adj" fmla="val 7692"/>
+              <a:gd name="adj" fmla="val 9524"/>
             </a:avLst>
           </a:prstGeom>
           <a:solidFill>
@@ -10874,14 +10913,14 @@
       </p:sp>
       <p:sp>
         <p:nvSpPr>
-          <p:cNvPr id="43" name="Text 41"/>
-          <p:cNvSpPr/>
-          <p:nvPr/>
-        </p:nvSpPr>
-        <p:spPr>
-          <a:xfrm>
-            <a:off x="5370141" y="4169664"/>
-            <a:ext cx="685800" cy="475488"/>
+          <p:cNvPr id="44" name="Text 42"/>
+          <p:cNvSpPr/>
+          <p:nvPr/>
+        </p:nvSpPr>
+        <p:spPr>
+          <a:xfrm>
+            <a:off x="4850892" y="4169664"/>
+            <a:ext cx="685800" cy="384048"/>
           </a:xfrm>
           <a:prstGeom prst="rect">
             <a:avLst/>
@@ -10905,7 +10944,7 @@
                 <a:ea typeface="Trebuchet MS" pitchFamily="34" charset="-122"/>
                 <a:cs typeface="Trebuchet MS" pitchFamily="34" charset="-120"/>
               </a:rPr>
-              <a:t>i</a:t>
+              <a:t>d</a:t>
             </a:r>
             <a:endParaRPr lang="en-US" sz="900" dirty="0"/>
           </a:p>
@@ -10913,18 +10952,18 @@
       </p:sp>
       <p:sp>
         <p:nvSpPr>
-          <p:cNvPr id="44" name="Shape 42"/>
-          <p:cNvSpPr/>
-          <p:nvPr/>
-        </p:nvSpPr>
-        <p:spPr>
-          <a:xfrm>
-            <a:off x="6408638" y="4169664"/>
-            <a:ext cx="685800" cy="475488"/>
+          <p:cNvPr id="45" name="Shape 43"/>
+          <p:cNvSpPr/>
+          <p:nvPr/>
+        </p:nvSpPr>
+        <p:spPr>
+          <a:xfrm>
+            <a:off x="5759577" y="4169664"/>
+            <a:ext cx="685800" cy="384048"/>
           </a:xfrm>
           <a:prstGeom prst="rect">
             <a:avLst>
-              <a:gd name="adj" fmla="val 7692"/>
+              <a:gd name="adj" fmla="val 9524"/>
             </a:avLst>
           </a:prstGeom>
           <a:solidFill>
@@ -10940,14 +10979,14 @@
       </p:sp>
       <p:sp>
         <p:nvSpPr>
-          <p:cNvPr id="45" name="Text 43"/>
-          <p:cNvSpPr/>
-          <p:nvPr/>
-        </p:nvSpPr>
-        <p:spPr>
-          <a:xfrm>
-            <a:off x="6408638" y="4169664"/>
-            <a:ext cx="685800" cy="475488"/>
+          <p:cNvPr id="46" name="Text 44"/>
+          <p:cNvSpPr/>
+          <p:nvPr/>
+        </p:nvSpPr>
+        <p:spPr>
+          <a:xfrm>
+            <a:off x="5759577" y="4169664"/>
+            <a:ext cx="685800" cy="384048"/>
           </a:xfrm>
           <a:prstGeom prst="rect">
             <a:avLst/>
@@ -10971,6 +11010,72 @@
                 <a:ea typeface="Trebuchet MS" pitchFamily="34" charset="-122"/>
                 <a:cs typeface="Trebuchet MS" pitchFamily="34" charset="-120"/>
               </a:rPr>
+              <a:t>i</a:t>
+            </a:r>
+            <a:endParaRPr lang="en-US" sz="900" dirty="0"/>
+          </a:p>
+        </p:txBody>
+      </p:sp>
+      <p:sp>
+        <p:nvSpPr>
+          <p:cNvPr id="47" name="Shape 45"/>
+          <p:cNvSpPr/>
+          <p:nvPr/>
+        </p:nvSpPr>
+        <p:spPr>
+          <a:xfrm>
+            <a:off x="6668262" y="4169664"/>
+            <a:ext cx="685800" cy="384048"/>
+          </a:xfrm>
+          <a:prstGeom prst="rect">
+            <a:avLst>
+              <a:gd name="adj" fmla="val 9524"/>
+            </a:avLst>
+          </a:prstGeom>
+          <a:solidFill>
+            <a:srgbClr val="FFFFFF"/>
+          </a:solidFill>
+          <a:ln w="12700">
+            <a:solidFill>
+              <a:srgbClr val="DB2777"/>
+            </a:solidFill>
+            <a:prstDash val="solid"/>
+          </a:ln>
+        </p:spPr>
+      </p:sp>
+      <p:sp>
+        <p:nvSpPr>
+          <p:cNvPr id="48" name="Text 46"/>
+          <p:cNvSpPr/>
+          <p:nvPr/>
+        </p:nvSpPr>
+        <p:spPr>
+          <a:xfrm>
+            <a:off x="6668262" y="4169664"/>
+            <a:ext cx="685800" cy="384048"/>
+          </a:xfrm>
+          <a:prstGeom prst="rect">
+            <a:avLst/>
+          </a:prstGeom>
+          <a:noFill/>
+          <a:ln/>
+        </p:spPr>
+        <p:txBody>
+          <a:bodyPr wrap="square" lIns="0" tIns="0" rIns="0" bIns="0" rtlCol="0" anchor="ctr"/>
+          <a:lstStyle/>
+          <a:p>
+            <a:pPr algn="ctr" indent="0" marL="0">
+              <a:buNone/>
+            </a:pPr>
+            <a:r>
+              <a:rPr lang="en-US" sz="900" b="1" dirty="0">
+                <a:solidFill>
+                  <a:srgbClr val="9D174D"/>
+                </a:solidFill>
+                <a:latin typeface="Trebuchet MS" pitchFamily="34" charset="0"/>
+                <a:ea typeface="Trebuchet MS" pitchFamily="34" charset="-122"/>
+                <a:cs typeface="Trebuchet MS" pitchFamily="34" charset="-120"/>
+              </a:rPr>
               <a:t>b</a:t>
             </a:r>
             <a:endParaRPr lang="en-US" sz="900" dirty="0"/>
@@ -10979,18 +11084,18 @@
       </p:sp>
       <p:sp>
         <p:nvSpPr>
-          <p:cNvPr id="46" name="Shape 44"/>
-          <p:cNvSpPr/>
-          <p:nvPr/>
-        </p:nvSpPr>
-        <p:spPr>
-          <a:xfrm>
-            <a:off x="7447135" y="4169664"/>
-            <a:ext cx="685800" cy="475488"/>
+          <p:cNvPr id="49" name="Shape 47"/>
+          <p:cNvSpPr/>
+          <p:nvPr/>
+        </p:nvSpPr>
+        <p:spPr>
+          <a:xfrm>
+            <a:off x="7576947" y="4169664"/>
+            <a:ext cx="685800" cy="384048"/>
           </a:xfrm>
           <a:prstGeom prst="rect">
             <a:avLst>
-              <a:gd name="adj" fmla="val 7692"/>
+              <a:gd name="adj" fmla="val 9524"/>
             </a:avLst>
           </a:prstGeom>
           <a:solidFill>
@@ -11006,14 +11111,14 @@
       </p:sp>
       <p:sp>
         <p:nvSpPr>
-          <p:cNvPr id="47" name="Text 45"/>
-          <p:cNvSpPr/>
-          <p:nvPr/>
-        </p:nvSpPr>
-        <p:spPr>
-          <a:xfrm>
-            <a:off x="7447135" y="4169664"/>
-            <a:ext cx="685800" cy="475488"/>
+          <p:cNvPr id="50" name="Text 48"/>
+          <p:cNvSpPr/>
+          <p:nvPr/>
+        </p:nvSpPr>
+        <p:spPr>
+          <a:xfrm>
+            <a:off x="7576947" y="4169664"/>
+            <a:ext cx="685800" cy="384048"/>
           </a:xfrm>
           <a:prstGeom prst="rect">
             <a:avLst/>
@@ -11468,7 +11573,7 @@
                 <a:ea typeface="Trebuchet MS" pitchFamily="34" charset="-122"/>
                 <a:cs typeface="Trebuchet MS" pitchFamily="34" charset="-120"/>
               </a:rPr>
-              <a:t>incredible</a:t>
+              <a:t>discredit</a:t>
             </a:r>
             <a:endParaRPr lang="en-US" sz="2800" dirty="0"/>
           </a:p>
@@ -12295,7 +12400,7 @@
                 <a:ea typeface="Trebuchet MS" pitchFamily="34" charset="-122"/>
                 <a:cs typeface="Trebuchet MS" pitchFamily="34" charset="-120"/>
               </a:rPr>
-              <a:t>incredible</a:t>
+              <a:t>discredit</a:t>
             </a:r>
             <a:endParaRPr lang="en-US" sz="2800" dirty="0"/>
           </a:p>
@@ -12434,7 +12539,7 @@
                 <a:ea typeface="Trebuchet MS" pitchFamily="34" charset="-122"/>
                 <a:cs typeface="Trebuchet MS" pitchFamily="34" charset="-120"/>
               </a:rPr>
-              <a:t>in</a:t>
+              <a:t>dis</a:t>
             </a:r>
             <a:endParaRPr lang="en-US" sz="1300" dirty="0"/>
           </a:p>
@@ -12473,7 +12578,7 @@
                 <a:ea typeface="Calibri" pitchFamily="34" charset="-122"/>
                 <a:cs typeface="Calibri" pitchFamily="34" charset="-120"/>
               </a:rPr>
-              <a:t>not</a:t>
+              <a:t>not, reverse, remove</a:t>
             </a:r>
             <a:endParaRPr lang="en-US" sz="850" dirty="0"/>
           </a:p>
@@ -12658,7 +12763,7 @@
                 <a:ea typeface="Trebuchet MS" pitchFamily="34" charset="-122"/>
                 <a:cs typeface="Trebuchet MS" pitchFamily="34" charset="-120"/>
               </a:rPr>
-              <a:t>ible</a:t>
+              <a:t>it</a:t>
             </a:r>
             <a:endParaRPr lang="en-US" sz="1300" dirty="0"/>
           </a:p>
@@ -12697,7 +12802,7 @@
                 <a:ea typeface="Calibri" pitchFamily="34" charset="-122"/>
                 <a:cs typeface="Calibri" pitchFamily="34" charset="-120"/>
               </a:rPr>
-              <a:t>able to be</a:t>
+              <a:t>result or act of</a:t>
             </a:r>
             <a:endParaRPr lang="en-US" sz="850" dirty="0"/>
           </a:p>
@@ -13392,7 +13497,7 @@
                 <a:ea typeface="Trebuchet MS" pitchFamily="34" charset="-122"/>
                 <a:cs typeface="Trebuchet MS" pitchFamily="34" charset="-120"/>
               </a:rPr>
-              <a:t>incredible</a:t>
+              <a:t>discredit</a:t>
             </a:r>
             <a:endParaRPr lang="en-US" sz="2800" dirty="0"/>
           </a:p>
@@ -13531,7 +13636,7 @@
                 <a:ea typeface="Trebuchet MS" pitchFamily="34" charset="-122"/>
                 <a:cs typeface="Trebuchet MS" pitchFamily="34" charset="-120"/>
               </a:rPr>
-              <a:t>in</a:t>
+              <a:t>dis</a:t>
             </a:r>
             <a:endParaRPr lang="en-US" sz="1300" dirty="0"/>
           </a:p>
@@ -13570,7 +13675,7 @@
                 <a:ea typeface="Calibri" pitchFamily="34" charset="-122"/>
                 <a:cs typeface="Calibri" pitchFamily="34" charset="-120"/>
               </a:rPr>
-              <a:t>not</a:t>
+              <a:t>not, reverse, remove</a:t>
             </a:r>
             <a:endParaRPr lang="en-US" sz="850" dirty="0"/>
           </a:p>
@@ -13755,7 +13860,7 @@
                 <a:ea typeface="Trebuchet MS" pitchFamily="34" charset="-122"/>
                 <a:cs typeface="Trebuchet MS" pitchFamily="34" charset="-120"/>
               </a:rPr>
-              <a:t>ible</a:t>
+              <a:t>it</a:t>
             </a:r>
             <a:endParaRPr lang="en-US" sz="1300" dirty="0"/>
           </a:p>
@@ -13794,7 +13899,7 @@
                 <a:ea typeface="Calibri" pitchFamily="34" charset="-122"/>
                 <a:cs typeface="Calibri" pitchFamily="34" charset="-120"/>
               </a:rPr>
-              <a:t>able to be</a:t>
+              <a:t>result or act of</a:t>
             </a:r>
             <a:endParaRPr lang="en-US" sz="850" dirty="0"/>
           </a:p>
@@ -13901,8 +14006,8 @@
         </p:nvSpPr>
         <p:spPr>
           <a:xfrm>
-            <a:off x="1975104" y="3364992"/>
-            <a:ext cx="1554480" cy="475488"/>
+            <a:off x="2313432" y="3364992"/>
+            <a:ext cx="1645920" cy="475488"/>
           </a:xfrm>
           <a:prstGeom prst="rect">
             <a:avLst>
@@ -13928,8 +14033,8 @@
         </p:nvSpPr>
         <p:spPr>
           <a:xfrm>
-            <a:off x="1975104" y="3364992"/>
-            <a:ext cx="1554480" cy="475488"/>
+            <a:off x="2313432" y="3364992"/>
+            <a:ext cx="1645920" cy="475488"/>
           </a:xfrm>
           <a:prstGeom prst="rect">
             <a:avLst/>
@@ -13953,7 +14058,7 @@
                 <a:ea typeface="Trebuchet MS" pitchFamily="34" charset="-122"/>
                 <a:cs typeface="Trebuchet MS" pitchFamily="34" charset="-120"/>
               </a:rPr>
-              <a:t>in</a:t>
+              <a:t>dis</a:t>
             </a:r>
             <a:endParaRPr lang="en-US" sz="1400" dirty="0"/>
           </a:p>
@@ -13967,8 +14072,8 @@
         </p:nvSpPr>
         <p:spPr>
           <a:xfrm>
-            <a:off x="3529584" y="3364992"/>
-            <a:ext cx="73152" cy="475488"/>
+            <a:off x="3959352" y="3364992"/>
+            <a:ext cx="411480" cy="475488"/>
           </a:xfrm>
           <a:prstGeom prst="rect">
             <a:avLst/>
@@ -14006,8 +14111,8 @@
         </p:nvSpPr>
         <p:spPr>
           <a:xfrm>
-            <a:off x="3602736" y="3364992"/>
-            <a:ext cx="1554480" cy="475488"/>
+            <a:off x="4370832" y="3364992"/>
+            <a:ext cx="1645920" cy="475488"/>
           </a:xfrm>
           <a:prstGeom prst="rect">
             <a:avLst>
@@ -14033,8 +14138,8 @@
         </p:nvSpPr>
         <p:spPr>
           <a:xfrm>
-            <a:off x="3602736" y="3364992"/>
-            <a:ext cx="1554480" cy="475488"/>
+            <a:off x="4370832" y="3364992"/>
+            <a:ext cx="1645920" cy="475488"/>
           </a:xfrm>
           <a:prstGeom prst="rect">
             <a:avLst/>
@@ -14072,8 +14177,8 @@
         </p:nvSpPr>
         <p:spPr>
           <a:xfrm>
-            <a:off x="5157216" y="3364992"/>
-            <a:ext cx="73152" cy="475488"/>
+            <a:off x="6016752" y="3364992"/>
+            <a:ext cx="411480" cy="475488"/>
           </a:xfrm>
           <a:prstGeom prst="rect">
             <a:avLst/>
@@ -14111,8 +14216,8 @@
         </p:nvSpPr>
         <p:spPr>
           <a:xfrm>
-            <a:off x="5230368" y="3364992"/>
-            <a:ext cx="1554480" cy="475488"/>
+            <a:off x="6428232" y="3364992"/>
+            <a:ext cx="1645920" cy="475488"/>
           </a:xfrm>
           <a:prstGeom prst="rect">
             <a:avLst>
@@ -14138,8 +14243,8 @@
         </p:nvSpPr>
         <p:spPr>
           <a:xfrm>
-            <a:off x="5230368" y="3364992"/>
-            <a:ext cx="1554480" cy="475488"/>
+            <a:off x="6428232" y="3364992"/>
+            <a:ext cx="1645920" cy="475488"/>
           </a:xfrm>
           <a:prstGeom prst="rect">
             <a:avLst/>
@@ -14163,7 +14268,7 @@
                 <a:ea typeface="Trebuchet MS" pitchFamily="34" charset="-122"/>
                 <a:cs typeface="Trebuchet MS" pitchFamily="34" charset="-120"/>
               </a:rPr>
-              <a:t>i</a:t>
+              <a:t>it</a:t>
             </a:r>
             <a:endParaRPr lang="en-US" sz="1400" dirty="0"/>
           </a:p>
@@ -14171,119 +14276,80 @@
       </p:sp>
       <p:sp>
         <p:nvSpPr>
-          <p:cNvPr id="36" name="Text 34"/>
-          <p:cNvSpPr/>
-          <p:nvPr/>
-        </p:nvSpPr>
-        <p:spPr>
-          <a:xfrm>
-            <a:off x="6784848" y="3364992"/>
-            <a:ext cx="73152" cy="475488"/>
-          </a:xfrm>
-          <a:prstGeom prst="rect">
-            <a:avLst/>
-          </a:prstGeom>
-          <a:noFill/>
-          <a:ln/>
-        </p:spPr>
-        <p:txBody>
-          <a:bodyPr wrap="square" lIns="0" tIns="0" rIns="0" bIns="0" rtlCol="0" anchor="ctr"/>
-          <a:lstStyle/>
-          <a:p>
-            <a:pPr algn="ctr" indent="0" marL="0">
-              <a:buNone/>
-            </a:pPr>
-            <a:r>
-              <a:rPr lang="en-US" sz="1600" b="1" dirty="0">
-                <a:solidFill>
-                  <a:srgbClr val="0D9488"/>
+          <p:cNvPr id="36" name="Shape 34"/>
+          <p:cNvSpPr/>
+          <p:nvPr/>
+        </p:nvSpPr>
+        <p:spPr>
+          <a:xfrm>
+            <a:off x="365760" y="4096512"/>
+            <a:ext cx="1371600" cy="804672"/>
+          </a:xfrm>
+          <a:prstGeom prst="rect">
+            <a:avLst>
+              <a:gd name="adj" fmla="val 6818"/>
+            </a:avLst>
+          </a:prstGeom>
+          <a:solidFill>
+            <a:srgbClr val="E2E8F0"/>
+          </a:solidFill>
+          <a:ln w="12700">
+            <a:solidFill>
+              <a:srgbClr val="E2E8F0"/>
+            </a:solidFill>
+            <a:prstDash val="solid"/>
+          </a:ln>
+        </p:spPr>
+      </p:sp>
+      <p:sp>
+        <p:nvSpPr>
+          <p:cNvPr id="37" name="Text 35"/>
+          <p:cNvSpPr/>
+          <p:nvPr/>
+        </p:nvSpPr>
+        <p:spPr>
+          <a:xfrm>
+            <a:off x="365760" y="4096512"/>
+            <a:ext cx="1371600" cy="804672"/>
+          </a:xfrm>
+          <a:prstGeom prst="rect">
+            <a:avLst/>
+          </a:prstGeom>
+          <a:noFill/>
+          <a:ln/>
+        </p:spPr>
+        <p:txBody>
+          <a:bodyPr wrap="square" lIns="0" tIns="0" rIns="0" bIns="0" rtlCol="0" anchor="ctr"/>
+          <a:lstStyle/>
+          <a:p>
+            <a:pPr algn="ctr" indent="0" marL="0">
+              <a:buNone/>
+            </a:pPr>
+            <a:r>
+              <a:rPr lang="en-US" sz="1100" b="1" dirty="0">
+                <a:solidFill>
+                  <a:srgbClr val="475569"/>
                 </a:solidFill>
                 <a:latin typeface="Trebuchet MS" pitchFamily="34" charset="0"/>
                 <a:ea typeface="Trebuchet MS" pitchFamily="34" charset="-122"/>
                 <a:cs typeface="Trebuchet MS" pitchFamily="34" charset="-120"/>
               </a:rPr>
-              <a:t>·</a:t>
-            </a:r>
-            <a:endParaRPr lang="en-US" sz="1600" dirty="0"/>
-          </a:p>
-        </p:txBody>
-      </p:sp>
-      <p:sp>
-        <p:nvSpPr>
-          <p:cNvPr id="37" name="Shape 35"/>
-          <p:cNvSpPr/>
-          <p:nvPr/>
-        </p:nvSpPr>
-        <p:spPr>
-          <a:xfrm>
-            <a:off x="6858000" y="3364992"/>
-            <a:ext cx="1554480" cy="475488"/>
-          </a:xfrm>
-          <a:prstGeom prst="rect">
-            <a:avLst>
-              <a:gd name="adj" fmla="val 9615"/>
-            </a:avLst>
-          </a:prstGeom>
-          <a:solidFill>
-            <a:srgbClr val="FFFFFF"/>
-          </a:solidFill>
-          <a:ln w="12700">
-            <a:solidFill>
-              <a:srgbClr val="0D9488"/>
-            </a:solidFill>
-            <a:prstDash val="solid"/>
-          </a:ln>
-        </p:spPr>
-      </p:sp>
-      <p:sp>
-        <p:nvSpPr>
-          <p:cNvPr id="38" name="Text 36"/>
-          <p:cNvSpPr/>
-          <p:nvPr/>
-        </p:nvSpPr>
-        <p:spPr>
-          <a:xfrm>
-            <a:off x="6858000" y="3364992"/>
-            <a:ext cx="1554480" cy="475488"/>
-          </a:xfrm>
-          <a:prstGeom prst="rect">
-            <a:avLst/>
-          </a:prstGeom>
-          <a:noFill/>
-          <a:ln/>
-        </p:spPr>
-        <p:txBody>
-          <a:bodyPr wrap="square" lIns="0" tIns="0" rIns="0" bIns="0" rtlCol="0" anchor="ctr"/>
-          <a:lstStyle/>
-          <a:p>
-            <a:pPr algn="ctr" indent="0" marL="0">
-              <a:buNone/>
-            </a:pPr>
-            <a:r>
-              <a:rPr lang="en-US" sz="1400" b="1" dirty="0">
-                <a:solidFill>
-                  <a:srgbClr val="0D9488"/>
-                </a:solidFill>
-                <a:latin typeface="Trebuchet MS" pitchFamily="34" charset="0"/>
-                <a:ea typeface="Trebuchet MS" pitchFamily="34" charset="-122"/>
-                <a:cs typeface="Trebuchet MS" pitchFamily="34" charset="-120"/>
-              </a:rPr>
-              <a:t>ble</a:t>
-            </a:r>
-            <a:endParaRPr lang="en-US" sz="1400" dirty="0"/>
-          </a:p>
-        </p:txBody>
-      </p:sp>
-      <p:sp>
-        <p:nvSpPr>
-          <p:cNvPr id="39" name="Shape 37"/>
-          <p:cNvSpPr/>
-          <p:nvPr/>
-        </p:nvSpPr>
-        <p:spPr>
-          <a:xfrm>
-            <a:off x="365760" y="4096512"/>
-            <a:ext cx="1371600" cy="804672"/>
+              <a:t>Phonemes</a:t>
+            </a:r>
+            <a:endParaRPr lang="en-US" sz="1100" dirty="0"/>
+          </a:p>
+        </p:txBody>
+      </p:sp>
+      <p:sp>
+        <p:nvSpPr>
+          <p:cNvPr id="38" name="Shape 36"/>
+          <p:cNvSpPr/>
+          <p:nvPr/>
+        </p:nvSpPr>
+        <p:spPr>
+          <a:xfrm>
+            <a:off x="1874520" y="4096512"/>
+            <a:ext cx="6903720" cy="804672"/>
           </a:xfrm>
           <a:prstGeom prst="rect">
             <a:avLst>
@@ -14291,85 +14357,19 @@
             </a:avLst>
           </a:prstGeom>
           <a:solidFill>
-            <a:srgbClr val="E2E8F0"/>
+            <a:srgbClr val="F8FAFC"/>
           </a:solidFill>
           <a:ln w="12700">
             <a:solidFill>
               <a:srgbClr val="E2E8F0"/>
             </a:solidFill>
-            <a:prstDash val="solid"/>
-          </a:ln>
-        </p:spPr>
-      </p:sp>
-      <p:sp>
-        <p:nvSpPr>
-          <p:cNvPr id="40" name="Text 38"/>
-          <p:cNvSpPr/>
-          <p:nvPr/>
-        </p:nvSpPr>
-        <p:spPr>
-          <a:xfrm>
-            <a:off x="365760" y="4096512"/>
-            <a:ext cx="1371600" cy="804672"/>
-          </a:xfrm>
-          <a:prstGeom prst="rect">
-            <a:avLst/>
-          </a:prstGeom>
-          <a:noFill/>
-          <a:ln/>
-        </p:spPr>
-        <p:txBody>
-          <a:bodyPr wrap="square" lIns="0" tIns="0" rIns="0" bIns="0" rtlCol="0" anchor="ctr"/>
-          <a:lstStyle/>
-          <a:p>
-            <a:pPr algn="ctr" indent="0" marL="0">
-              <a:buNone/>
-            </a:pPr>
-            <a:r>
-              <a:rPr lang="en-US" sz="1100" b="1" dirty="0">
-                <a:solidFill>
-                  <a:srgbClr val="475569"/>
-                </a:solidFill>
-                <a:latin typeface="Trebuchet MS" pitchFamily="34" charset="0"/>
-                <a:ea typeface="Trebuchet MS" pitchFamily="34" charset="-122"/>
-                <a:cs typeface="Trebuchet MS" pitchFamily="34" charset="-120"/>
-              </a:rPr>
-              <a:t>Phonemes</a:t>
-            </a:r>
-            <a:endParaRPr lang="en-US" sz="1100" dirty="0"/>
-          </a:p>
-        </p:txBody>
-      </p:sp>
-      <p:sp>
-        <p:nvSpPr>
-          <p:cNvPr id="41" name="Shape 39"/>
-          <p:cNvSpPr/>
-          <p:nvPr/>
-        </p:nvSpPr>
-        <p:spPr>
-          <a:xfrm>
-            <a:off x="1874520" y="4096512"/>
-            <a:ext cx="6903720" cy="804672"/>
-          </a:xfrm>
-          <a:prstGeom prst="rect">
-            <a:avLst>
-              <a:gd name="adj" fmla="val 6818"/>
-            </a:avLst>
-          </a:prstGeom>
-          <a:solidFill>
-            <a:srgbClr val="F8FAFC"/>
-          </a:solidFill>
-          <a:ln w="12700">
-            <a:solidFill>
-              <a:srgbClr val="E2E8F0"/>
-            </a:solidFill>
             <a:prstDash val="dash"/>
           </a:ln>
         </p:spPr>
       </p:sp>
       <p:sp>
         <p:nvSpPr>
-          <p:cNvPr id="42" name="Text 40"/>
+          <p:cNvPr id="39" name="Text 37"/>
           <p:cNvSpPr/>
           <p:nvPr/>
         </p:nvSpPr>
@@ -15096,7 +15096,7 @@
                 <a:ea typeface="Trebuchet MS" pitchFamily="34" charset="-122"/>
                 <a:cs typeface="Trebuchet MS" pitchFamily="34" charset="-120"/>
               </a:rPr>
-              <a:t>incredible</a:t>
+              <a:t>discredit</a:t>
             </a:r>
             <a:endParaRPr lang="en-US" sz="2800" dirty="0"/>
           </a:p>
@@ -15235,7 +15235,7 @@
                 <a:ea typeface="Trebuchet MS" pitchFamily="34" charset="-122"/>
                 <a:cs typeface="Trebuchet MS" pitchFamily="34" charset="-120"/>
               </a:rPr>
-              <a:t>in</a:t>
+              <a:t>dis</a:t>
             </a:r>
             <a:endParaRPr lang="en-US" sz="1300" dirty="0"/>
           </a:p>
@@ -15274,7 +15274,7 @@
                 <a:ea typeface="Calibri" pitchFamily="34" charset="-122"/>
                 <a:cs typeface="Calibri" pitchFamily="34" charset="-120"/>
               </a:rPr>
-              <a:t>not</a:t>
+              <a:t>not, reverse, remove</a:t>
             </a:r>
             <a:endParaRPr lang="en-US" sz="850" dirty="0"/>
           </a:p>
@@ -15459,7 +15459,7 @@
                 <a:ea typeface="Trebuchet MS" pitchFamily="34" charset="-122"/>
                 <a:cs typeface="Trebuchet MS" pitchFamily="34" charset="-120"/>
               </a:rPr>
-              <a:t>ible</a:t>
+              <a:t>it</a:t>
             </a:r>
             <a:endParaRPr lang="en-US" sz="1300" dirty="0"/>
           </a:p>
@@ -15498,7 +15498,7 @@
                 <a:ea typeface="Calibri" pitchFamily="34" charset="-122"/>
                 <a:cs typeface="Calibri" pitchFamily="34" charset="-120"/>
               </a:rPr>
-              <a:t>able to be</a:t>
+              <a:t>result or act of</a:t>
             </a:r>
             <a:endParaRPr lang="en-US" sz="850" dirty="0"/>
           </a:p>
@@ -15605,8 +15605,8 @@
         </p:nvSpPr>
         <p:spPr>
           <a:xfrm>
-            <a:off x="1975104" y="3364992"/>
-            <a:ext cx="1554480" cy="475488"/>
+            <a:off x="2313432" y="3364992"/>
+            <a:ext cx="1645920" cy="475488"/>
           </a:xfrm>
           <a:prstGeom prst="rect">
             <a:avLst>
@@ -15632,8 +15632,8 @@
         </p:nvSpPr>
         <p:spPr>
           <a:xfrm>
-            <a:off x="1975104" y="3364992"/>
-            <a:ext cx="1554480" cy="475488"/>
+            <a:off x="2313432" y="3364992"/>
+            <a:ext cx="1645920" cy="475488"/>
           </a:xfrm>
           <a:prstGeom prst="rect">
             <a:avLst/>
@@ -15657,7 +15657,7 @@
                 <a:ea typeface="Trebuchet MS" pitchFamily="34" charset="-122"/>
                 <a:cs typeface="Trebuchet MS" pitchFamily="34" charset="-120"/>
               </a:rPr>
-              <a:t>in</a:t>
+              <a:t>dis</a:t>
             </a:r>
             <a:endParaRPr lang="en-US" sz="1400" dirty="0"/>
           </a:p>
@@ -15671,8 +15671,8 @@
         </p:nvSpPr>
         <p:spPr>
           <a:xfrm>
-            <a:off x="3529584" y="3364992"/>
-            <a:ext cx="73152" cy="475488"/>
+            <a:off x="3959352" y="3364992"/>
+            <a:ext cx="411480" cy="475488"/>
           </a:xfrm>
           <a:prstGeom prst="rect">
             <a:avLst/>
@@ -15710,8 +15710,8 @@
         </p:nvSpPr>
         <p:spPr>
           <a:xfrm>
-            <a:off x="3602736" y="3364992"/>
-            <a:ext cx="1554480" cy="475488"/>
+            <a:off x="4370832" y="3364992"/>
+            <a:ext cx="1645920" cy="475488"/>
           </a:xfrm>
           <a:prstGeom prst="rect">
             <a:avLst>
@@ -15737,8 +15737,8 @@
         </p:nvSpPr>
         <p:spPr>
           <a:xfrm>
-            <a:off x="3602736" y="3364992"/>
-            <a:ext cx="1554480" cy="475488"/>
+            <a:off x="4370832" y="3364992"/>
+            <a:ext cx="1645920" cy="475488"/>
           </a:xfrm>
           <a:prstGeom prst="rect">
             <a:avLst/>
@@ -15776,8 +15776,8 @@
         </p:nvSpPr>
         <p:spPr>
           <a:xfrm>
-            <a:off x="5157216" y="3364992"/>
-            <a:ext cx="73152" cy="475488"/>
+            <a:off x="6016752" y="3364992"/>
+            <a:ext cx="411480" cy="475488"/>
           </a:xfrm>
           <a:prstGeom prst="rect">
             <a:avLst/>
@@ -15815,8 +15815,8 @@
         </p:nvSpPr>
         <p:spPr>
           <a:xfrm>
-            <a:off x="5230368" y="3364992"/>
-            <a:ext cx="1554480" cy="475488"/>
+            <a:off x="6428232" y="3364992"/>
+            <a:ext cx="1645920" cy="475488"/>
           </a:xfrm>
           <a:prstGeom prst="rect">
             <a:avLst>
@@ -15842,8 +15842,8 @@
         </p:nvSpPr>
         <p:spPr>
           <a:xfrm>
-            <a:off x="5230368" y="3364992"/>
-            <a:ext cx="1554480" cy="475488"/>
+            <a:off x="6428232" y="3364992"/>
+            <a:ext cx="1645920" cy="475488"/>
           </a:xfrm>
           <a:prstGeom prst="rect">
             <a:avLst/>
@@ -15867,7 +15867,7 @@
                 <a:ea typeface="Trebuchet MS" pitchFamily="34" charset="-122"/>
                 <a:cs typeface="Trebuchet MS" pitchFamily="34" charset="-120"/>
               </a:rPr>
-              <a:t>i</a:t>
+              <a:t>it</a:t>
             </a:r>
             <a:endParaRPr lang="en-US" sz="1400" dirty="0"/>
           </a:p>
@@ -15875,193 +15875,247 @@
       </p:sp>
       <p:sp>
         <p:nvSpPr>
-          <p:cNvPr id="36" name="Text 34"/>
-          <p:cNvSpPr/>
-          <p:nvPr/>
-        </p:nvSpPr>
-        <p:spPr>
-          <a:xfrm>
-            <a:off x="6784848" y="3364992"/>
-            <a:ext cx="73152" cy="475488"/>
-          </a:xfrm>
-          <a:prstGeom prst="rect">
-            <a:avLst/>
-          </a:prstGeom>
-          <a:noFill/>
-          <a:ln/>
-        </p:spPr>
-        <p:txBody>
-          <a:bodyPr wrap="square" lIns="0" tIns="0" rIns="0" bIns="0" rtlCol="0" anchor="ctr"/>
-          <a:lstStyle/>
-          <a:p>
-            <a:pPr algn="ctr" indent="0" marL="0">
-              <a:buNone/>
-            </a:pPr>
-            <a:r>
-              <a:rPr lang="en-US" sz="1600" b="1" dirty="0">
-                <a:solidFill>
-                  <a:srgbClr val="0D9488"/>
+          <p:cNvPr id="36" name="Shape 34"/>
+          <p:cNvSpPr/>
+          <p:nvPr/>
+        </p:nvSpPr>
+        <p:spPr>
+          <a:xfrm>
+            <a:off x="365760" y="4096512"/>
+            <a:ext cx="1371600" cy="804672"/>
+          </a:xfrm>
+          <a:prstGeom prst="rect">
+            <a:avLst>
+              <a:gd name="adj" fmla="val 6818"/>
+            </a:avLst>
+          </a:prstGeom>
+          <a:solidFill>
+            <a:srgbClr val="E2E8F0"/>
+          </a:solidFill>
+          <a:ln w="12700">
+            <a:solidFill>
+              <a:srgbClr val="E2E8F0"/>
+            </a:solidFill>
+            <a:prstDash val="solid"/>
+          </a:ln>
+        </p:spPr>
+      </p:sp>
+      <p:sp>
+        <p:nvSpPr>
+          <p:cNvPr id="37" name="Text 35"/>
+          <p:cNvSpPr/>
+          <p:nvPr/>
+        </p:nvSpPr>
+        <p:spPr>
+          <a:xfrm>
+            <a:off x="365760" y="4096512"/>
+            <a:ext cx="1371600" cy="804672"/>
+          </a:xfrm>
+          <a:prstGeom prst="rect">
+            <a:avLst/>
+          </a:prstGeom>
+          <a:noFill/>
+          <a:ln/>
+        </p:spPr>
+        <p:txBody>
+          <a:bodyPr wrap="square" lIns="0" tIns="0" rIns="0" bIns="0" rtlCol="0" anchor="ctr"/>
+          <a:lstStyle/>
+          <a:p>
+            <a:pPr algn="ctr" indent="0" marL="0">
+              <a:buNone/>
+            </a:pPr>
+            <a:r>
+              <a:rPr lang="en-US" sz="1100" b="1" dirty="0">
+                <a:solidFill>
+                  <a:srgbClr val="475569"/>
                 </a:solidFill>
                 <a:latin typeface="Trebuchet MS" pitchFamily="34" charset="0"/>
                 <a:ea typeface="Trebuchet MS" pitchFamily="34" charset="-122"/>
                 <a:cs typeface="Trebuchet MS" pitchFamily="34" charset="-120"/>
               </a:rPr>
-              <a:t>·</a:t>
-            </a:r>
-            <a:endParaRPr lang="en-US" sz="1600" dirty="0"/>
-          </a:p>
-        </p:txBody>
-      </p:sp>
-      <p:sp>
-        <p:nvSpPr>
-          <p:cNvPr id="37" name="Shape 35"/>
-          <p:cNvSpPr/>
-          <p:nvPr/>
-        </p:nvSpPr>
-        <p:spPr>
-          <a:xfrm>
-            <a:off x="6858000" y="3364992"/>
-            <a:ext cx="1554480" cy="475488"/>
+              <a:t>Phonemes</a:t>
+            </a:r>
+            <a:endParaRPr lang="en-US" sz="1100" dirty="0"/>
+          </a:p>
+        </p:txBody>
+      </p:sp>
+      <p:sp>
+        <p:nvSpPr>
+          <p:cNvPr id="38" name="Shape 36"/>
+          <p:cNvSpPr/>
+          <p:nvPr/>
+        </p:nvSpPr>
+        <p:spPr>
+          <a:xfrm>
+            <a:off x="1874520" y="4096512"/>
+            <a:ext cx="6903720" cy="804672"/>
           </a:xfrm>
           <a:prstGeom prst="rect">
             <a:avLst>
-              <a:gd name="adj" fmla="val 9615"/>
+              <a:gd name="adj" fmla="val 6818"/>
             </a:avLst>
           </a:prstGeom>
           <a:solidFill>
+            <a:srgbClr val="FCE7F3"/>
+          </a:solidFill>
+          <a:ln w="12700">
+            <a:solidFill>
+              <a:srgbClr val="DB2777"/>
+            </a:solidFill>
+            <a:prstDash val="solid"/>
+          </a:ln>
+        </p:spPr>
+      </p:sp>
+      <p:sp>
+        <p:nvSpPr>
+          <p:cNvPr id="39" name="Shape 37"/>
+          <p:cNvSpPr/>
+          <p:nvPr/>
+        </p:nvSpPr>
+        <p:spPr>
+          <a:xfrm>
+            <a:off x="1951330" y="4169664"/>
+            <a:ext cx="676656" cy="384048"/>
+          </a:xfrm>
+          <a:prstGeom prst="rect">
+            <a:avLst>
+              <a:gd name="adj" fmla="val 9524"/>
+            </a:avLst>
+          </a:prstGeom>
+          <a:solidFill>
             <a:srgbClr val="FFFFFF"/>
           </a:solidFill>
           <a:ln w="12700">
             <a:solidFill>
-              <a:srgbClr val="0D9488"/>
-            </a:solidFill>
-            <a:prstDash val="solid"/>
-          </a:ln>
-        </p:spPr>
-      </p:sp>
-      <p:sp>
-        <p:nvSpPr>
-          <p:cNvPr id="38" name="Text 36"/>
-          <p:cNvSpPr/>
-          <p:nvPr/>
-        </p:nvSpPr>
-        <p:spPr>
-          <a:xfrm>
-            <a:off x="6858000" y="3364992"/>
-            <a:ext cx="1554480" cy="475488"/>
-          </a:xfrm>
-          <a:prstGeom prst="rect">
-            <a:avLst/>
-          </a:prstGeom>
-          <a:noFill/>
-          <a:ln/>
-        </p:spPr>
-        <p:txBody>
-          <a:bodyPr wrap="square" lIns="0" tIns="0" rIns="0" bIns="0" rtlCol="0" anchor="ctr"/>
-          <a:lstStyle/>
-          <a:p>
-            <a:pPr algn="ctr" indent="0" marL="0">
-              <a:buNone/>
-            </a:pPr>
-            <a:r>
-              <a:rPr lang="en-US" sz="1400" b="1" dirty="0">
-                <a:solidFill>
-                  <a:srgbClr val="0D9488"/>
+              <a:srgbClr val="DB2777"/>
+            </a:solidFill>
+            <a:prstDash val="solid"/>
+          </a:ln>
+        </p:spPr>
+      </p:sp>
+      <p:sp>
+        <p:nvSpPr>
+          <p:cNvPr id="40" name="Text 38"/>
+          <p:cNvSpPr/>
+          <p:nvPr/>
+        </p:nvSpPr>
+        <p:spPr>
+          <a:xfrm>
+            <a:off x="1951330" y="4169664"/>
+            <a:ext cx="676656" cy="384048"/>
+          </a:xfrm>
+          <a:prstGeom prst="rect">
+            <a:avLst/>
+          </a:prstGeom>
+          <a:noFill/>
+          <a:ln/>
+        </p:spPr>
+        <p:txBody>
+          <a:bodyPr wrap="square" lIns="0" tIns="0" rIns="0" bIns="0" rtlCol="0" anchor="ctr"/>
+          <a:lstStyle/>
+          <a:p>
+            <a:pPr algn="ctr" indent="0" marL="0">
+              <a:buNone/>
+            </a:pPr>
+            <a:r>
+              <a:rPr lang="en-US" sz="900" b="1" dirty="0">
+                <a:solidFill>
+                  <a:srgbClr val="9D174D"/>
                 </a:solidFill>
                 <a:latin typeface="Trebuchet MS" pitchFamily="34" charset="0"/>
                 <a:ea typeface="Trebuchet MS" pitchFamily="34" charset="-122"/>
                 <a:cs typeface="Trebuchet MS" pitchFamily="34" charset="-120"/>
               </a:rPr>
-              <a:t>ble</a:t>
-            </a:r>
-            <a:endParaRPr lang="en-US" sz="1400" dirty="0"/>
-          </a:p>
-        </p:txBody>
-      </p:sp>
-      <p:sp>
-        <p:nvSpPr>
-          <p:cNvPr id="39" name="Shape 37"/>
-          <p:cNvSpPr/>
-          <p:nvPr/>
-        </p:nvSpPr>
-        <p:spPr>
-          <a:xfrm>
-            <a:off x="365760" y="4096512"/>
-            <a:ext cx="1371600" cy="804672"/>
+              <a:t>d</a:t>
+            </a:r>
+            <a:endParaRPr lang="en-US" sz="900" dirty="0"/>
+          </a:p>
+        </p:txBody>
+      </p:sp>
+      <p:sp>
+        <p:nvSpPr>
+          <p:cNvPr id="41" name="Shape 39"/>
+          <p:cNvSpPr/>
+          <p:nvPr/>
+        </p:nvSpPr>
+        <p:spPr>
+          <a:xfrm>
+            <a:off x="2677363" y="4169664"/>
+            <a:ext cx="676656" cy="384048"/>
           </a:xfrm>
           <a:prstGeom prst="rect">
             <a:avLst>
-              <a:gd name="adj" fmla="val 6818"/>
+              <a:gd name="adj" fmla="val 9524"/>
             </a:avLst>
           </a:prstGeom>
           <a:solidFill>
-            <a:srgbClr val="E2E8F0"/>
-          </a:solidFill>
-          <a:ln w="12700">
-            <a:solidFill>
-              <a:srgbClr val="E2E8F0"/>
-            </a:solidFill>
-            <a:prstDash val="solid"/>
-          </a:ln>
-        </p:spPr>
-      </p:sp>
-      <p:sp>
-        <p:nvSpPr>
-          <p:cNvPr id="40" name="Text 38"/>
-          <p:cNvSpPr/>
-          <p:nvPr/>
-        </p:nvSpPr>
-        <p:spPr>
-          <a:xfrm>
-            <a:off x="365760" y="4096512"/>
-            <a:ext cx="1371600" cy="804672"/>
-          </a:xfrm>
-          <a:prstGeom prst="rect">
-            <a:avLst/>
-          </a:prstGeom>
-          <a:noFill/>
-          <a:ln/>
-        </p:spPr>
-        <p:txBody>
-          <a:bodyPr wrap="square" lIns="0" tIns="0" rIns="0" bIns="0" rtlCol="0" anchor="ctr"/>
-          <a:lstStyle/>
-          <a:p>
-            <a:pPr algn="ctr" indent="0" marL="0">
-              <a:buNone/>
-            </a:pPr>
-            <a:r>
-              <a:rPr lang="en-US" sz="1100" b="1" dirty="0">
-                <a:solidFill>
-                  <a:srgbClr val="475569"/>
+            <a:srgbClr val="FFFFFF"/>
+          </a:solidFill>
+          <a:ln w="12700">
+            <a:solidFill>
+              <a:srgbClr val="DB2777"/>
+            </a:solidFill>
+            <a:prstDash val="solid"/>
+          </a:ln>
+        </p:spPr>
+      </p:sp>
+      <p:sp>
+        <p:nvSpPr>
+          <p:cNvPr id="42" name="Text 40"/>
+          <p:cNvSpPr/>
+          <p:nvPr/>
+        </p:nvSpPr>
+        <p:spPr>
+          <a:xfrm>
+            <a:off x="2677363" y="4169664"/>
+            <a:ext cx="676656" cy="384048"/>
+          </a:xfrm>
+          <a:prstGeom prst="rect">
+            <a:avLst/>
+          </a:prstGeom>
+          <a:noFill/>
+          <a:ln/>
+        </p:spPr>
+        <p:txBody>
+          <a:bodyPr wrap="square" lIns="0" tIns="0" rIns="0" bIns="0" rtlCol="0" anchor="ctr"/>
+          <a:lstStyle/>
+          <a:p>
+            <a:pPr algn="ctr" indent="0" marL="0">
+              <a:buNone/>
+            </a:pPr>
+            <a:r>
+              <a:rPr lang="en-US" sz="900" b="1" dirty="0">
+                <a:solidFill>
+                  <a:srgbClr val="9D174D"/>
                 </a:solidFill>
                 <a:latin typeface="Trebuchet MS" pitchFamily="34" charset="0"/>
                 <a:ea typeface="Trebuchet MS" pitchFamily="34" charset="-122"/>
                 <a:cs typeface="Trebuchet MS" pitchFamily="34" charset="-120"/>
               </a:rPr>
-              <a:t>Phonemes</a:t>
-            </a:r>
-            <a:endParaRPr lang="en-US" sz="1100" dirty="0"/>
-          </a:p>
-        </p:txBody>
-      </p:sp>
-      <p:sp>
-        <p:nvSpPr>
-          <p:cNvPr id="41" name="Shape 39"/>
-          <p:cNvSpPr/>
-          <p:nvPr/>
-        </p:nvSpPr>
-        <p:spPr>
-          <a:xfrm>
-            <a:off x="1874520" y="4096512"/>
-            <a:ext cx="6903720" cy="658368"/>
+              <a:t>i</a:t>
+            </a:r>
+            <a:endParaRPr lang="en-US" sz="900" dirty="0"/>
+          </a:p>
+        </p:txBody>
+      </p:sp>
+      <p:sp>
+        <p:nvSpPr>
+          <p:cNvPr id="43" name="Shape 41"/>
+          <p:cNvSpPr/>
+          <p:nvPr/>
+        </p:nvSpPr>
+        <p:spPr>
+          <a:xfrm>
+            <a:off x="3403397" y="4169664"/>
+            <a:ext cx="676656" cy="384048"/>
           </a:xfrm>
           <a:prstGeom prst="rect">
             <a:avLst>
-              <a:gd name="adj" fmla="val 8333"/>
+              <a:gd name="adj" fmla="val 9524"/>
             </a:avLst>
           </a:prstGeom>
           <a:solidFill>
-            <a:srgbClr val="FCE7F3"/>
+            <a:srgbClr val="FFFFFF"/>
           </a:solidFill>
           <a:ln w="12700">
             <a:solidFill>
@@ -16073,41 +16127,14 @@
       </p:sp>
       <p:sp>
         <p:nvSpPr>
-          <p:cNvPr id="42" name="Shape 40"/>
-          <p:cNvSpPr/>
-          <p:nvPr/>
-        </p:nvSpPr>
-        <p:spPr>
-          <a:xfrm>
-            <a:off x="2023872" y="4169664"/>
-            <a:ext cx="685800" cy="475488"/>
-          </a:xfrm>
-          <a:prstGeom prst="rect">
-            <a:avLst>
-              <a:gd name="adj" fmla="val 7692"/>
-            </a:avLst>
-          </a:prstGeom>
-          <a:solidFill>
-            <a:srgbClr val="FFFFFF"/>
-          </a:solidFill>
-          <a:ln w="12700">
-            <a:solidFill>
-              <a:srgbClr val="DB2777"/>
-            </a:solidFill>
-            <a:prstDash val="solid"/>
-          </a:ln>
-        </p:spPr>
-      </p:sp>
-      <p:sp>
-        <p:nvSpPr>
-          <p:cNvPr id="43" name="Text 41"/>
-          <p:cNvSpPr/>
-          <p:nvPr/>
-        </p:nvSpPr>
-        <p:spPr>
-          <a:xfrm>
-            <a:off x="2023872" y="4169664"/>
-            <a:ext cx="685800" cy="475488"/>
+          <p:cNvPr id="44" name="Text 42"/>
+          <p:cNvSpPr/>
+          <p:nvPr/>
+        </p:nvSpPr>
+        <p:spPr>
+          <a:xfrm>
+            <a:off x="3403397" y="4169664"/>
+            <a:ext cx="676656" cy="384048"/>
           </a:xfrm>
           <a:prstGeom prst="rect">
             <a:avLst/>
@@ -16131,7 +16158,7 @@
                 <a:ea typeface="Trebuchet MS" pitchFamily="34" charset="-122"/>
                 <a:cs typeface="Trebuchet MS" pitchFamily="34" charset="-120"/>
               </a:rPr>
-              <a:t>i</a:t>
+              <a:t>s</a:t>
             </a:r>
             <a:endParaRPr lang="en-US" sz="900" dirty="0"/>
           </a:p>
@@ -16139,18 +16166,18 @@
       </p:sp>
       <p:sp>
         <p:nvSpPr>
-          <p:cNvPr id="44" name="Shape 42"/>
-          <p:cNvSpPr/>
-          <p:nvPr/>
-        </p:nvSpPr>
-        <p:spPr>
-          <a:xfrm>
-            <a:off x="2831592" y="4169664"/>
-            <a:ext cx="685800" cy="475488"/>
+          <p:cNvPr id="45" name="Shape 43"/>
+          <p:cNvSpPr/>
+          <p:nvPr/>
+        </p:nvSpPr>
+        <p:spPr>
+          <a:xfrm>
+            <a:off x="4129430" y="4169664"/>
+            <a:ext cx="676656" cy="384048"/>
           </a:xfrm>
           <a:prstGeom prst="rect">
             <a:avLst>
-              <a:gd name="adj" fmla="val 7692"/>
+              <a:gd name="adj" fmla="val 9524"/>
             </a:avLst>
           </a:prstGeom>
           <a:solidFill>
@@ -16166,14 +16193,14 @@
       </p:sp>
       <p:sp>
         <p:nvSpPr>
-          <p:cNvPr id="45" name="Text 43"/>
-          <p:cNvSpPr/>
-          <p:nvPr/>
-        </p:nvSpPr>
-        <p:spPr>
-          <a:xfrm>
-            <a:off x="2831592" y="4169664"/>
-            <a:ext cx="685800" cy="475488"/>
+          <p:cNvPr id="46" name="Text 44"/>
+          <p:cNvSpPr/>
+          <p:nvPr/>
+        </p:nvSpPr>
+        <p:spPr>
+          <a:xfrm>
+            <a:off x="4129430" y="4169664"/>
+            <a:ext cx="676656" cy="384048"/>
           </a:xfrm>
           <a:prstGeom prst="rect">
             <a:avLst/>
@@ -16197,7 +16224,7 @@
                 <a:ea typeface="Trebuchet MS" pitchFamily="34" charset="-122"/>
                 <a:cs typeface="Trebuchet MS" pitchFamily="34" charset="-120"/>
               </a:rPr>
-              <a:t>n</a:t>
+              <a:t>c</a:t>
             </a:r>
             <a:endParaRPr lang="en-US" sz="900" dirty="0"/>
           </a:p>
@@ -16205,18 +16232,57 @@
       </p:sp>
       <p:sp>
         <p:nvSpPr>
-          <p:cNvPr id="46" name="Shape 44"/>
-          <p:cNvSpPr/>
-          <p:nvPr/>
-        </p:nvSpPr>
-        <p:spPr>
-          <a:xfrm>
-            <a:off x="3639312" y="4169664"/>
-            <a:ext cx="685800" cy="475488"/>
+          <p:cNvPr id="47" name="Text 45"/>
+          <p:cNvSpPr/>
+          <p:nvPr/>
+        </p:nvSpPr>
+        <p:spPr>
+          <a:xfrm>
+            <a:off x="4129430" y="4572000"/>
+            <a:ext cx="676656" cy="219456"/>
+          </a:xfrm>
+          <a:prstGeom prst="rect">
+            <a:avLst/>
+          </a:prstGeom>
+          <a:noFill/>
+          <a:ln/>
+        </p:spPr>
+        <p:txBody>
+          <a:bodyPr wrap="square" lIns="0" tIns="0" rIns="0" bIns="0" rtlCol="0" anchor="t"/>
+          <a:lstStyle/>
+          <a:p>
+            <a:pPr algn="ctr" indent="0" marL="0">
+              <a:buNone/>
+            </a:pPr>
+            <a:r>
+              <a:rPr lang="en-US" sz="750" i="1" dirty="0">
+                <a:solidFill>
+                  <a:srgbClr val="94A3B8"/>
+                </a:solidFill>
+                <a:latin typeface="Calibri" pitchFamily="34" charset="0"/>
+                <a:ea typeface="Calibri" pitchFamily="34" charset="-122"/>
+                <a:cs typeface="Calibri" pitchFamily="34" charset="-120"/>
+              </a:rPr>
+              <a:t>/k/</a:t>
+            </a:r>
+            <a:endParaRPr lang="en-US" sz="750" dirty="0"/>
+          </a:p>
+        </p:txBody>
+      </p:sp>
+      <p:sp>
+        <p:nvSpPr>
+          <p:cNvPr id="48" name="Shape 46"/>
+          <p:cNvSpPr/>
+          <p:nvPr/>
+        </p:nvSpPr>
+        <p:spPr>
+          <a:xfrm>
+            <a:off x="4855464" y="4169664"/>
+            <a:ext cx="676656" cy="384048"/>
           </a:xfrm>
           <a:prstGeom prst="rect">
             <a:avLst>
-              <a:gd name="adj" fmla="val 7692"/>
+              <a:gd name="adj" fmla="val 9524"/>
             </a:avLst>
           </a:prstGeom>
           <a:solidFill>
@@ -16232,14 +16298,14 @@
       </p:sp>
       <p:sp>
         <p:nvSpPr>
-          <p:cNvPr id="47" name="Text 45"/>
-          <p:cNvSpPr/>
-          <p:nvPr/>
-        </p:nvSpPr>
-        <p:spPr>
-          <a:xfrm>
-            <a:off x="3639312" y="4169664"/>
-            <a:ext cx="685800" cy="475488"/>
+          <p:cNvPr id="49" name="Text 47"/>
+          <p:cNvSpPr/>
+          <p:nvPr/>
+        </p:nvSpPr>
+        <p:spPr>
+          <a:xfrm>
+            <a:off x="4855464" y="4169664"/>
+            <a:ext cx="676656" cy="384048"/>
           </a:xfrm>
           <a:prstGeom prst="rect">
             <a:avLst/>
@@ -16263,7 +16329,7 @@
                 <a:ea typeface="Trebuchet MS" pitchFamily="34" charset="-122"/>
                 <a:cs typeface="Trebuchet MS" pitchFamily="34" charset="-120"/>
               </a:rPr>
-              <a:t>cr</a:t>
+              <a:t>r</a:t>
             </a:r>
             <a:endParaRPr lang="en-US" sz="900" dirty="0"/>
           </a:p>
@@ -16271,18 +16337,18 @@
       </p:sp>
       <p:sp>
         <p:nvSpPr>
-          <p:cNvPr id="48" name="Shape 46"/>
-          <p:cNvSpPr/>
-          <p:nvPr/>
-        </p:nvSpPr>
-        <p:spPr>
-          <a:xfrm>
-            <a:off x="4447032" y="4169664"/>
-            <a:ext cx="685800" cy="475488"/>
+          <p:cNvPr id="50" name="Shape 48"/>
+          <p:cNvSpPr/>
+          <p:nvPr/>
+        </p:nvSpPr>
+        <p:spPr>
+          <a:xfrm>
+            <a:off x="5581498" y="4169664"/>
+            <a:ext cx="676656" cy="384048"/>
           </a:xfrm>
           <a:prstGeom prst="rect">
             <a:avLst>
-              <a:gd name="adj" fmla="val 7692"/>
+              <a:gd name="adj" fmla="val 9524"/>
             </a:avLst>
           </a:prstGeom>
           <a:solidFill>
@@ -16298,14 +16364,14 @@
       </p:sp>
       <p:sp>
         <p:nvSpPr>
-          <p:cNvPr id="49" name="Text 47"/>
-          <p:cNvSpPr/>
-          <p:nvPr/>
-        </p:nvSpPr>
-        <p:spPr>
-          <a:xfrm>
-            <a:off x="4447032" y="4169664"/>
-            <a:ext cx="685800" cy="475488"/>
+          <p:cNvPr id="51" name="Text 49"/>
+          <p:cNvSpPr/>
+          <p:nvPr/>
+        </p:nvSpPr>
+        <p:spPr>
+          <a:xfrm>
+            <a:off x="5581498" y="4169664"/>
+            <a:ext cx="676656" cy="384048"/>
           </a:xfrm>
           <a:prstGeom prst="rect">
             <a:avLst/>
@@ -16337,18 +16403,18 @@
       </p:sp>
       <p:sp>
         <p:nvSpPr>
-          <p:cNvPr id="50" name="Shape 48"/>
-          <p:cNvSpPr/>
-          <p:nvPr/>
-        </p:nvSpPr>
-        <p:spPr>
-          <a:xfrm>
-            <a:off x="5254752" y="4169664"/>
-            <a:ext cx="685800" cy="475488"/>
+          <p:cNvPr id="52" name="Shape 50"/>
+          <p:cNvSpPr/>
+          <p:nvPr/>
+        </p:nvSpPr>
+        <p:spPr>
+          <a:xfrm>
+            <a:off x="6307531" y="4169664"/>
+            <a:ext cx="676656" cy="384048"/>
           </a:xfrm>
           <a:prstGeom prst="rect">
             <a:avLst>
-              <a:gd name="adj" fmla="val 7692"/>
+              <a:gd name="adj" fmla="val 9524"/>
             </a:avLst>
           </a:prstGeom>
           <a:solidFill>
@@ -16364,14 +16430,14 @@
       </p:sp>
       <p:sp>
         <p:nvSpPr>
-          <p:cNvPr id="51" name="Text 49"/>
-          <p:cNvSpPr/>
-          <p:nvPr/>
-        </p:nvSpPr>
-        <p:spPr>
-          <a:xfrm>
-            <a:off x="5254752" y="4169664"/>
-            <a:ext cx="685800" cy="475488"/>
+          <p:cNvPr id="53" name="Text 51"/>
+          <p:cNvSpPr/>
+          <p:nvPr/>
+        </p:nvSpPr>
+        <p:spPr>
+          <a:xfrm>
+            <a:off x="6307531" y="4169664"/>
+            <a:ext cx="676656" cy="384048"/>
           </a:xfrm>
           <a:prstGeom prst="rect">
             <a:avLst/>
@@ -16403,18 +16469,18 @@
       </p:sp>
       <p:sp>
         <p:nvSpPr>
-          <p:cNvPr id="52" name="Shape 50"/>
-          <p:cNvSpPr/>
-          <p:nvPr/>
-        </p:nvSpPr>
-        <p:spPr>
-          <a:xfrm>
-            <a:off x="6062472" y="4169664"/>
-            <a:ext cx="685800" cy="475488"/>
+          <p:cNvPr id="54" name="Shape 52"/>
+          <p:cNvSpPr/>
+          <p:nvPr/>
+        </p:nvSpPr>
+        <p:spPr>
+          <a:xfrm>
+            <a:off x="7033565" y="4169664"/>
+            <a:ext cx="676656" cy="384048"/>
           </a:xfrm>
           <a:prstGeom prst="rect">
             <a:avLst>
-              <a:gd name="adj" fmla="val 7692"/>
+              <a:gd name="adj" fmla="val 9524"/>
             </a:avLst>
           </a:prstGeom>
           <a:solidFill>
@@ -16430,14 +16496,14 @@
       </p:sp>
       <p:sp>
         <p:nvSpPr>
-          <p:cNvPr id="53" name="Text 51"/>
-          <p:cNvSpPr/>
-          <p:nvPr/>
-        </p:nvSpPr>
-        <p:spPr>
-          <a:xfrm>
-            <a:off x="6062472" y="4169664"/>
-            <a:ext cx="685800" cy="475488"/>
+          <p:cNvPr id="55" name="Text 53"/>
+          <p:cNvSpPr/>
+          <p:nvPr/>
+        </p:nvSpPr>
+        <p:spPr>
+          <a:xfrm>
+            <a:off x="7033565" y="4169664"/>
+            <a:ext cx="676656" cy="384048"/>
           </a:xfrm>
           <a:prstGeom prst="rect">
             <a:avLst/>
@@ -16469,18 +16535,18 @@
       </p:sp>
       <p:sp>
         <p:nvSpPr>
-          <p:cNvPr id="54" name="Shape 52"/>
-          <p:cNvSpPr/>
-          <p:nvPr/>
-        </p:nvSpPr>
-        <p:spPr>
-          <a:xfrm>
-            <a:off x="6870192" y="4169664"/>
-            <a:ext cx="685800" cy="475488"/>
+          <p:cNvPr id="56" name="Shape 54"/>
+          <p:cNvSpPr/>
+          <p:nvPr/>
+        </p:nvSpPr>
+        <p:spPr>
+          <a:xfrm>
+            <a:off x="7759598" y="4169664"/>
+            <a:ext cx="676656" cy="384048"/>
           </a:xfrm>
           <a:prstGeom prst="rect">
             <a:avLst>
-              <a:gd name="adj" fmla="val 7692"/>
+              <a:gd name="adj" fmla="val 9524"/>
             </a:avLst>
           </a:prstGeom>
           <a:solidFill>
@@ -16496,14 +16562,14 @@
       </p:sp>
       <p:sp>
         <p:nvSpPr>
-          <p:cNvPr id="55" name="Text 53"/>
-          <p:cNvSpPr/>
-          <p:nvPr/>
-        </p:nvSpPr>
-        <p:spPr>
-          <a:xfrm>
-            <a:off x="6870192" y="4169664"/>
-            <a:ext cx="685800" cy="475488"/>
+          <p:cNvPr id="57" name="Text 55"/>
+          <p:cNvSpPr/>
+          <p:nvPr/>
+        </p:nvSpPr>
+        <p:spPr>
+          <a:xfrm>
+            <a:off x="7759598" y="4169664"/>
+            <a:ext cx="676656" cy="384048"/>
           </a:xfrm>
           <a:prstGeom prst="rect">
             <a:avLst/>
@@ -16527,73 +16593,7 @@
                 <a:ea typeface="Trebuchet MS" pitchFamily="34" charset="-122"/>
                 <a:cs typeface="Trebuchet MS" pitchFamily="34" charset="-120"/>
               </a:rPr>
-              <a:t>b</a:t>
-            </a:r>
-            <a:endParaRPr lang="en-US" sz="900" dirty="0"/>
-          </a:p>
-        </p:txBody>
-      </p:sp>
-      <p:sp>
-        <p:nvSpPr>
-          <p:cNvPr id="56" name="Shape 54"/>
-          <p:cNvSpPr/>
-          <p:nvPr/>
-        </p:nvSpPr>
-        <p:spPr>
-          <a:xfrm>
-            <a:off x="7677912" y="4169664"/>
-            <a:ext cx="685800" cy="475488"/>
-          </a:xfrm>
-          <a:prstGeom prst="rect">
-            <a:avLst>
-              <a:gd name="adj" fmla="val 7692"/>
-            </a:avLst>
-          </a:prstGeom>
-          <a:solidFill>
-            <a:srgbClr val="FFFFFF"/>
-          </a:solidFill>
-          <a:ln w="12700">
-            <a:solidFill>
-              <a:srgbClr val="DB2777"/>
-            </a:solidFill>
-            <a:prstDash val="solid"/>
-          </a:ln>
-        </p:spPr>
-      </p:sp>
-      <p:sp>
-        <p:nvSpPr>
-          <p:cNvPr id="57" name="Text 55"/>
-          <p:cNvSpPr/>
-          <p:nvPr/>
-        </p:nvSpPr>
-        <p:spPr>
-          <a:xfrm>
-            <a:off x="7677912" y="4169664"/>
-            <a:ext cx="685800" cy="475488"/>
-          </a:xfrm>
-          <a:prstGeom prst="rect">
-            <a:avLst/>
-          </a:prstGeom>
-          <a:noFill/>
-          <a:ln/>
-        </p:spPr>
-        <p:txBody>
-          <a:bodyPr wrap="square" lIns="0" tIns="0" rIns="0" bIns="0" rtlCol="0" anchor="ctr"/>
-          <a:lstStyle/>
-          <a:p>
-            <a:pPr algn="ctr" indent="0" marL="0">
-              <a:buNone/>
-            </a:pPr>
-            <a:r>
-              <a:rPr lang="en-US" sz="900" b="1" dirty="0">
-                <a:solidFill>
-                  <a:srgbClr val="9D174D"/>
-                </a:solidFill>
-                <a:latin typeface="Trebuchet MS" pitchFamily="34" charset="0"/>
-                <a:ea typeface="Trebuchet MS" pitchFamily="34" charset="-122"/>
-                <a:cs typeface="Trebuchet MS" pitchFamily="34" charset="-120"/>
-              </a:rPr>
-              <a:t>le</a:t>
+              <a:t>t</a:t>
             </a:r>
             <a:endParaRPr lang="en-US" sz="900" dirty="0"/>
           </a:p>
@@ -17501,7 +17501,7 @@
                 <a:ea typeface="Trebuchet MS" pitchFamily="34" charset="-122"/>
                 <a:cs typeface="Trebuchet MS" pitchFamily="34" charset="-120"/>
               </a:rPr>
-              <a:t>2</a:t>
+              <a:t>1</a:t>
             </a:r>
             <a:pPr algn="ctr" indent="0" marL="0">
               <a:buNone/>
@@ -17515,7 +17515,7 @@
                 <a:ea typeface="Trebuchet MS" pitchFamily="34" charset="-122"/>
                 <a:cs typeface="Trebuchet MS" pitchFamily="34" charset="-120"/>
               </a:rPr>
-              <a:t>  punctuation marks</a:t>
+              <a:t>  punctuation mark</a:t>
             </a:r>
             <a:endParaRPr lang="en-US" sz="2800" dirty="0"/>
           </a:p>
@@ -17919,7 +17919,7 @@
                 <a:ea typeface="Calibri" pitchFamily="34" charset="-122"/>
                 <a:cs typeface="Calibri" pitchFamily="34" charset="-120"/>
               </a:rPr>
-              <a:t>Although the </a:t>
+              <a:t>Her </a:t>
             </a:r>
             <a:pPr algn="l" indent="0" marL="0">
               <a:buNone/>
@@ -17936,7 +17936,7 @@
                 <a:ea typeface="Calibri" pitchFamily="34" charset="-122"/>
                 <a:cs typeface="Calibri" pitchFamily="34" charset="-120"/>
               </a:rPr>
-              <a:t>incredulous</a:t>
+              <a:t>credentials</a:t>
             </a:r>
             <a:pPr algn="l" indent="0" marL="0">
               <a:buNone/>
@@ -17950,7 +17950,7 @@
                 <a:ea typeface="Calibri" pitchFamily="34" charset="-122"/>
                 <a:cs typeface="Calibri" pitchFamily="34" charset="-120"/>
               </a:rPr>
-              <a:t> reporter had tried to </a:t>
+              <a:t> were </a:t>
             </a:r>
             <a:pPr algn="l" indent="0" marL="0">
               <a:buNone/>
@@ -17967,7 +17967,7 @@
                 <a:ea typeface="Calibri" pitchFamily="34" charset="-122"/>
                 <a:cs typeface="Calibri" pitchFamily="34" charset="-120"/>
               </a:rPr>
-              <a:t>discredit</a:t>
+              <a:t>incredible</a:t>
             </a:r>
             <a:pPr algn="l" indent="0" marL="0">
               <a:buNone/>
@@ -17981,7 +17981,7 @@
                 <a:ea typeface="Calibri" pitchFamily="34" charset="-122"/>
                 <a:cs typeface="Calibri" pitchFamily="34" charset="-120"/>
               </a:rPr>
-              <a:t> her, the scientist's </a:t>
+              <a:t>, but some people still questioned whether she deserved the </a:t>
             </a:r>
             <a:pPr algn="l" indent="0" marL="0">
               <a:buNone/>
@@ -17998,7 +17998,7 @@
                 <a:ea typeface="Calibri" pitchFamily="34" charset="-122"/>
                 <a:cs typeface="Calibri" pitchFamily="34" charset="-120"/>
               </a:rPr>
-              <a:t>credentials</a:t>
+              <a:t>credit</a:t>
             </a:r>
             <a:pPr algn="l" indent="0" marL="0">
               <a:buNone/>
@@ -18012,7 +18012,7 @@
                 <a:ea typeface="Calibri" pitchFamily="34" charset="-122"/>
                 <a:cs typeface="Calibri" pitchFamily="34" charset="-120"/>
               </a:rPr>
-              <a:t> were beyond question.</a:t>
+              <a:t>.</a:t>
             </a:r>
             <a:endParaRPr lang="en-US" sz="1800" dirty="0"/>
           </a:p>
@@ -18167,7 +18167,7 @@
                 <a:ea typeface="Trebuchet MS" pitchFamily="34" charset="-122"/>
                 <a:cs typeface="Trebuchet MS" pitchFamily="34" charset="-120"/>
               </a:rPr>
-              <a:t>incredulous</a:t>
+              <a:t>credentials</a:t>
             </a:r>
             <a:endParaRPr lang="en-US" sz="1400" dirty="0"/>
           </a:p>
@@ -18295,7 +18295,7 @@
                 <a:ea typeface="Trebuchet MS" pitchFamily="34" charset="-122"/>
                 <a:cs typeface="Trebuchet MS" pitchFamily="34" charset="-120"/>
               </a:rPr>
-              <a:t>discredit</a:t>
+              <a:t>incredible</a:t>
             </a:r>
             <a:endParaRPr lang="en-US" sz="1400" dirty="0"/>
           </a:p>
@@ -18423,7 +18423,7 @@
                 <a:ea typeface="Trebuchet MS" pitchFamily="34" charset="-122"/>
                 <a:cs typeface="Trebuchet MS" pitchFamily="34" charset="-120"/>
               </a:rPr>
-              <a:t>credentials</a:t>
+              <a:t>credit</a:t>
             </a:r>
             <a:endParaRPr lang="en-US" sz="1400" dirty="0"/>
           </a:p>
@@ -18893,7 +18893,7 @@
                 <a:ea typeface="Trebuchet MS" pitchFamily="34" charset="-122"/>
                 <a:cs typeface="Trebuchet MS" pitchFamily="34" charset="-120"/>
               </a:rPr>
-              <a:t>incredulous</a:t>
+              <a:t>credentials</a:t>
             </a:r>
             <a:endParaRPr lang="en-US" sz="2800" dirty="0"/>
           </a:p>
@@ -19720,7 +19720,7 @@
                 <a:ea typeface="Trebuchet MS" pitchFamily="34" charset="-122"/>
                 <a:cs typeface="Trebuchet MS" pitchFamily="34" charset="-120"/>
               </a:rPr>
-              <a:t>incredulous</a:t>
+              <a:t>credentials</a:t>
             </a:r>
             <a:endParaRPr lang="en-US" sz="2800" dirty="0"/>
           </a:p>
@@ -19800,8 +19800,8 @@
         </p:nvSpPr>
         <p:spPr>
           <a:xfrm>
-            <a:off x="2221992" y="2258568"/>
-            <a:ext cx="1828800" cy="292608"/>
+            <a:off x="1989734" y="2258568"/>
+            <a:ext cx="1581912" cy="292608"/>
           </a:xfrm>
           <a:prstGeom prst="rect">
             <a:avLst>
@@ -19809,11 +19809,11 @@
             </a:avLst>
           </a:prstGeom>
           <a:solidFill>
-            <a:srgbClr val="DDD6FE"/>
+            <a:srgbClr val="CCFBF1"/>
           </a:solidFill>
           <a:ln w="19050">
             <a:solidFill>
-              <a:srgbClr val="7C3AED"/>
+              <a:srgbClr val="0D9488"/>
             </a:solidFill>
             <a:prstDash val="solid"/>
           </a:ln>
@@ -19834,8 +19834,8 @@
         </p:nvSpPr>
         <p:spPr>
           <a:xfrm>
-            <a:off x="2221992" y="2258568"/>
-            <a:ext cx="1828800" cy="292608"/>
+            <a:off x="1989734" y="2258568"/>
+            <a:ext cx="1581912" cy="292608"/>
           </a:xfrm>
           <a:prstGeom prst="rect">
             <a:avLst/>
@@ -19853,13 +19853,13 @@
             <a:r>
               <a:rPr lang="en-US" sz="1300" b="1" dirty="0">
                 <a:solidFill>
-                  <a:srgbClr val="4C1D95"/>
+                  <a:srgbClr val="0F766E"/>
                 </a:solidFill>
                 <a:latin typeface="Trebuchet MS" pitchFamily="34" charset="0"/>
                 <a:ea typeface="Trebuchet MS" pitchFamily="34" charset="-122"/>
                 <a:cs typeface="Trebuchet MS" pitchFamily="34" charset="-120"/>
               </a:rPr>
-              <a:t>in</a:t>
+              <a:t>cred</a:t>
             </a:r>
             <a:endParaRPr lang="en-US" sz="1300" dirty="0"/>
           </a:p>
@@ -19873,8 +19873,8 @@
         </p:nvSpPr>
         <p:spPr>
           <a:xfrm>
-            <a:off x="2221992" y="2569464"/>
-            <a:ext cx="1828800" cy="201168"/>
+            <a:off x="1989734" y="2569464"/>
+            <a:ext cx="1581912" cy="201168"/>
           </a:xfrm>
           <a:prstGeom prst="rect">
             <a:avLst/>
@@ -19898,7 +19898,7 @@
                 <a:ea typeface="Calibri" pitchFamily="34" charset="-122"/>
                 <a:cs typeface="Calibri" pitchFamily="34" charset="-120"/>
               </a:rPr>
-              <a:t>not</a:t>
+              <a:t>believe, trust</a:t>
             </a:r>
             <a:endParaRPr lang="en-US" sz="850" dirty="0"/>
           </a:p>
@@ -19912,8 +19912,8 @@
         </p:nvSpPr>
         <p:spPr>
           <a:xfrm>
-            <a:off x="4370832" y="2258568"/>
-            <a:ext cx="1828800" cy="292608"/>
+            <a:off x="3659429" y="2258568"/>
+            <a:ext cx="1581912" cy="292608"/>
           </a:xfrm>
           <a:prstGeom prst="rect">
             <a:avLst>
@@ -19921,11 +19921,11 @@
             </a:avLst>
           </a:prstGeom>
           <a:solidFill>
-            <a:srgbClr val="CCFBF1"/>
+            <a:srgbClr val="FCE7F3"/>
           </a:solidFill>
           <a:ln w="19050">
             <a:solidFill>
-              <a:srgbClr val="0D9488"/>
+              <a:srgbClr val="DB2777"/>
             </a:solidFill>
             <a:prstDash val="solid"/>
           </a:ln>
@@ -19946,8 +19946,8 @@
         </p:nvSpPr>
         <p:spPr>
           <a:xfrm>
-            <a:off x="4370832" y="2258568"/>
-            <a:ext cx="1828800" cy="292608"/>
+            <a:off x="3659429" y="2258568"/>
+            <a:ext cx="1581912" cy="292608"/>
           </a:xfrm>
           <a:prstGeom prst="rect">
             <a:avLst/>
@@ -19965,13 +19965,13 @@
             <a:r>
               <a:rPr lang="en-US" sz="1300" b="1" dirty="0">
                 <a:solidFill>
-                  <a:srgbClr val="0F766E"/>
+                  <a:srgbClr val="9D174D"/>
                 </a:solidFill>
                 <a:latin typeface="Trebuchet MS" pitchFamily="34" charset="0"/>
                 <a:ea typeface="Trebuchet MS" pitchFamily="34" charset="-122"/>
                 <a:cs typeface="Trebuchet MS" pitchFamily="34" charset="-120"/>
               </a:rPr>
-              <a:t>cred</a:t>
+              <a:t>ent</a:t>
             </a:r>
             <a:endParaRPr lang="en-US" sz="1300" dirty="0"/>
           </a:p>
@@ -19985,8 +19985,8 @@
         </p:nvSpPr>
         <p:spPr>
           <a:xfrm>
-            <a:off x="4370832" y="2569464"/>
-            <a:ext cx="1828800" cy="201168"/>
+            <a:off x="3659429" y="2569464"/>
+            <a:ext cx="1581912" cy="201168"/>
           </a:xfrm>
           <a:prstGeom prst="rect">
             <a:avLst/>
@@ -20010,7 +20010,7 @@
                 <a:ea typeface="Calibri" pitchFamily="34" charset="-122"/>
                 <a:cs typeface="Calibri" pitchFamily="34" charset="-120"/>
               </a:rPr>
-              <a:t>believe, trust</a:t>
+              <a:t>relating to</a:t>
             </a:r>
             <a:endParaRPr lang="en-US" sz="850" dirty="0"/>
           </a:p>
@@ -20024,8 +20024,8 @@
         </p:nvSpPr>
         <p:spPr>
           <a:xfrm>
-            <a:off x="6519672" y="2258568"/>
-            <a:ext cx="1828800" cy="292608"/>
+            <a:off x="5329123" y="2258568"/>
+            <a:ext cx="1581912" cy="292608"/>
           </a:xfrm>
           <a:prstGeom prst="rect">
             <a:avLst>
@@ -20058,8 +20058,8 @@
         </p:nvSpPr>
         <p:spPr>
           <a:xfrm>
-            <a:off x="6519672" y="2258568"/>
-            <a:ext cx="1828800" cy="292608"/>
+            <a:off x="5329123" y="2258568"/>
+            <a:ext cx="1581912" cy="292608"/>
           </a:xfrm>
           <a:prstGeom prst="rect">
             <a:avLst/>
@@ -20083,7 +20083,7 @@
                 <a:ea typeface="Trebuchet MS" pitchFamily="34" charset="-122"/>
                 <a:cs typeface="Trebuchet MS" pitchFamily="34" charset="-120"/>
               </a:rPr>
-              <a:t>ulous</a:t>
+              <a:t>ial</a:t>
             </a:r>
             <a:endParaRPr lang="en-US" sz="1300" dirty="0"/>
           </a:p>
@@ -20097,8 +20097,8 @@
         </p:nvSpPr>
         <p:spPr>
           <a:xfrm>
-            <a:off x="6519672" y="2569464"/>
-            <a:ext cx="1828800" cy="201168"/>
+            <a:off x="5329123" y="2569464"/>
+            <a:ext cx="1581912" cy="201168"/>
           </a:xfrm>
           <a:prstGeom prst="rect">
             <a:avLst/>
@@ -20122,7 +20122,7 @@
                 <a:ea typeface="Calibri" pitchFamily="34" charset="-122"/>
                 <a:cs typeface="Calibri" pitchFamily="34" charset="-120"/>
               </a:rPr>
-              <a:t>having the quality of</a:t>
+              <a:t>of or relating to</a:t>
             </a:r>
             <a:endParaRPr lang="en-US" sz="850" dirty="0"/>
           </a:p>
@@ -20131,6 +20131,118 @@
       <p:sp>
         <p:nvSpPr>
           <p:cNvPr id="25" name="Shape 23"/>
+          <p:cNvSpPr/>
+          <p:nvPr/>
+        </p:nvSpPr>
+        <p:spPr>
+          <a:xfrm>
+            <a:off x="6998818" y="2258568"/>
+            <a:ext cx="1581912" cy="292608"/>
+          </a:xfrm>
+          <a:prstGeom prst="rect">
+            <a:avLst>
+              <a:gd name="adj" fmla="val 25000"/>
+            </a:avLst>
+          </a:prstGeom>
+          <a:solidFill>
+            <a:srgbClr val="FCE7F3"/>
+          </a:solidFill>
+          <a:ln w="19050">
+            <a:solidFill>
+              <a:srgbClr val="DB2777"/>
+            </a:solidFill>
+            <a:prstDash val="solid"/>
+          </a:ln>
+          <a:effectLst>
+            <a:outerShdw sx="100000" sy="100000" kx="0" ky="0" algn="bl" rotWithShape="0" blurRad="101600" dist="38100" dir="8100000">
+              <a:srgbClr val="000000">
+                <a:alpha val="12000"/>
+              </a:srgbClr>
+            </a:outerShdw>
+          </a:effectLst>
+        </p:spPr>
+      </p:sp>
+      <p:sp>
+        <p:nvSpPr>
+          <p:cNvPr id="26" name="Text 24"/>
+          <p:cNvSpPr/>
+          <p:nvPr/>
+        </p:nvSpPr>
+        <p:spPr>
+          <a:xfrm>
+            <a:off x="6998818" y="2258568"/>
+            <a:ext cx="1581912" cy="292608"/>
+          </a:xfrm>
+          <a:prstGeom prst="rect">
+            <a:avLst/>
+          </a:prstGeom>
+          <a:noFill/>
+          <a:ln/>
+        </p:spPr>
+        <p:txBody>
+          <a:bodyPr wrap="square" lIns="0" tIns="0" rIns="0" bIns="0" rtlCol="0" anchor="ctr"/>
+          <a:lstStyle/>
+          <a:p>
+            <a:pPr algn="ctr" indent="0" marL="0">
+              <a:buNone/>
+            </a:pPr>
+            <a:r>
+              <a:rPr lang="en-US" sz="1300" b="1" dirty="0">
+                <a:solidFill>
+                  <a:srgbClr val="9D174D"/>
+                </a:solidFill>
+                <a:latin typeface="Trebuchet MS" pitchFamily="34" charset="0"/>
+                <a:ea typeface="Trebuchet MS" pitchFamily="34" charset="-122"/>
+                <a:cs typeface="Trebuchet MS" pitchFamily="34" charset="-120"/>
+              </a:rPr>
+              <a:t>s</a:t>
+            </a:r>
+            <a:endParaRPr lang="en-US" sz="1300" dirty="0"/>
+          </a:p>
+        </p:txBody>
+      </p:sp>
+      <p:sp>
+        <p:nvSpPr>
+          <p:cNvPr id="27" name="Text 25"/>
+          <p:cNvSpPr/>
+          <p:nvPr/>
+        </p:nvSpPr>
+        <p:spPr>
+          <a:xfrm>
+            <a:off x="6998818" y="2569464"/>
+            <a:ext cx="1581912" cy="201168"/>
+          </a:xfrm>
+          <a:prstGeom prst="rect">
+            <a:avLst/>
+          </a:prstGeom>
+          <a:noFill/>
+          <a:ln/>
+        </p:spPr>
+        <p:txBody>
+          <a:bodyPr wrap="square" lIns="0" tIns="0" rIns="0" bIns="0" rtlCol="0" anchor="t"/>
+          <a:lstStyle/>
+          <a:p>
+            <a:pPr algn="ctr" indent="0" marL="0">
+              <a:buNone/>
+            </a:pPr>
+            <a:r>
+              <a:rPr lang="en-US" sz="850" dirty="0">
+                <a:solidFill>
+                  <a:srgbClr val="475569"/>
+                </a:solidFill>
+                <a:latin typeface="Calibri" pitchFamily="34" charset="0"/>
+                <a:ea typeface="Calibri" pitchFamily="34" charset="-122"/>
+                <a:cs typeface="Calibri" pitchFamily="34" charset="-120"/>
+              </a:rPr>
+              <a:t>more than one</a:t>
+            </a:r>
+            <a:endParaRPr lang="en-US" sz="850" dirty="0"/>
+          </a:p>
+        </p:txBody>
+      </p:sp>
+      <p:sp>
+        <p:nvSpPr>
+          <p:cNvPr id="28" name="Shape 26"/>
           <p:cNvSpPr/>
           <p:nvPr/>
         </p:nvSpPr>
@@ -20157,7 +20269,7 @@
       </p:sp>
       <p:sp>
         <p:nvSpPr>
-          <p:cNvPr id="26" name="Text 24"/>
+          <p:cNvPr id="29" name="Text 27"/>
           <p:cNvSpPr/>
           <p:nvPr/>
         </p:nvSpPr>
@@ -20196,7 +20308,7 @@
       </p:sp>
       <p:sp>
         <p:nvSpPr>
-          <p:cNvPr id="27" name="Shape 25"/>
+          <p:cNvPr id="30" name="Shape 28"/>
           <p:cNvSpPr/>
           <p:nvPr/>
         </p:nvSpPr>
@@ -20223,7 +20335,7 @@
       </p:sp>
       <p:sp>
         <p:nvSpPr>
-          <p:cNvPr id="28" name="Text 26"/>
+          <p:cNvPr id="31" name="Text 29"/>
           <p:cNvSpPr/>
           <p:nvPr/>
         </p:nvSpPr>
@@ -20262,7 +20374,7 @@
       </p:sp>
       <p:sp>
         <p:nvSpPr>
-          <p:cNvPr id="29" name="Shape 27"/>
+          <p:cNvPr id="32" name="Shape 30"/>
           <p:cNvSpPr/>
           <p:nvPr/>
         </p:nvSpPr>
@@ -20289,7 +20401,7 @@
       </p:sp>
       <p:sp>
         <p:nvSpPr>
-          <p:cNvPr id="30" name="Text 28"/>
+          <p:cNvPr id="33" name="Text 31"/>
           <p:cNvSpPr/>
           <p:nvPr/>
         </p:nvSpPr>
@@ -20328,7 +20440,7 @@
       </p:sp>
       <p:sp>
         <p:nvSpPr>
-          <p:cNvPr id="31" name="Shape 29"/>
+          <p:cNvPr id="34" name="Shape 32"/>
           <p:cNvSpPr/>
           <p:nvPr/>
         </p:nvSpPr>
@@ -20355,7 +20467,7 @@
       </p:sp>
       <p:sp>
         <p:nvSpPr>
-          <p:cNvPr id="32" name="Text 30"/>
+          <p:cNvPr id="35" name="Text 33"/>
           <p:cNvSpPr/>
           <p:nvPr/>
         </p:nvSpPr>
@@ -20817,7 +20929,7 @@
                 <a:ea typeface="Trebuchet MS" pitchFamily="34" charset="-122"/>
                 <a:cs typeface="Trebuchet MS" pitchFamily="34" charset="-120"/>
               </a:rPr>
-              <a:t>incredulous</a:t>
+              <a:t>credentials</a:t>
             </a:r>
             <a:endParaRPr lang="en-US" sz="2800" dirty="0"/>
           </a:p>
@@ -20897,8 +21009,8 @@
         </p:nvSpPr>
         <p:spPr>
           <a:xfrm>
-            <a:off x="2221992" y="2258568"/>
-            <a:ext cx="1828800" cy="292608"/>
+            <a:off x="1989734" y="2258568"/>
+            <a:ext cx="1581912" cy="292608"/>
           </a:xfrm>
           <a:prstGeom prst="rect">
             <a:avLst>
@@ -20906,11 +21018,11 @@
             </a:avLst>
           </a:prstGeom>
           <a:solidFill>
-            <a:srgbClr val="DDD6FE"/>
+            <a:srgbClr val="CCFBF1"/>
           </a:solidFill>
           <a:ln w="19050">
             <a:solidFill>
-              <a:srgbClr val="7C3AED"/>
+              <a:srgbClr val="0D9488"/>
             </a:solidFill>
             <a:prstDash val="solid"/>
           </a:ln>
@@ -20931,8 +21043,8 @@
         </p:nvSpPr>
         <p:spPr>
           <a:xfrm>
-            <a:off x="2221992" y="2258568"/>
-            <a:ext cx="1828800" cy="292608"/>
+            <a:off x="1989734" y="2258568"/>
+            <a:ext cx="1581912" cy="292608"/>
           </a:xfrm>
           <a:prstGeom prst="rect">
             <a:avLst/>
@@ -20950,13 +21062,13 @@
             <a:r>
               <a:rPr lang="en-US" sz="1300" b="1" dirty="0">
                 <a:solidFill>
-                  <a:srgbClr val="4C1D95"/>
+                  <a:srgbClr val="0F766E"/>
                 </a:solidFill>
                 <a:latin typeface="Trebuchet MS" pitchFamily="34" charset="0"/>
                 <a:ea typeface="Trebuchet MS" pitchFamily="34" charset="-122"/>
                 <a:cs typeface="Trebuchet MS" pitchFamily="34" charset="-120"/>
               </a:rPr>
-              <a:t>in</a:t>
+              <a:t>cred</a:t>
             </a:r>
             <a:endParaRPr lang="en-US" sz="1300" dirty="0"/>
           </a:p>
@@ -20970,8 +21082,8 @@
         </p:nvSpPr>
         <p:spPr>
           <a:xfrm>
-            <a:off x="2221992" y="2569464"/>
-            <a:ext cx="1828800" cy="201168"/>
+            <a:off x="1989734" y="2569464"/>
+            <a:ext cx="1581912" cy="201168"/>
           </a:xfrm>
           <a:prstGeom prst="rect">
             <a:avLst/>
@@ -20995,7 +21107,7 @@
                 <a:ea typeface="Calibri" pitchFamily="34" charset="-122"/>
                 <a:cs typeface="Calibri" pitchFamily="34" charset="-120"/>
               </a:rPr>
-              <a:t>not</a:t>
+              <a:t>believe, trust</a:t>
             </a:r>
             <a:endParaRPr lang="en-US" sz="850" dirty="0"/>
           </a:p>
@@ -21009,8 +21121,8 @@
         </p:nvSpPr>
         <p:spPr>
           <a:xfrm>
-            <a:off x="4370832" y="2258568"/>
-            <a:ext cx="1828800" cy="292608"/>
+            <a:off x="3659429" y="2258568"/>
+            <a:ext cx="1581912" cy="292608"/>
           </a:xfrm>
           <a:prstGeom prst="rect">
             <a:avLst>
@@ -21018,11 +21130,11 @@
             </a:avLst>
           </a:prstGeom>
           <a:solidFill>
-            <a:srgbClr val="CCFBF1"/>
+            <a:srgbClr val="FCE7F3"/>
           </a:solidFill>
           <a:ln w="19050">
             <a:solidFill>
-              <a:srgbClr val="0D9488"/>
+              <a:srgbClr val="DB2777"/>
             </a:solidFill>
             <a:prstDash val="solid"/>
           </a:ln>
@@ -21043,8 +21155,8 @@
         </p:nvSpPr>
         <p:spPr>
           <a:xfrm>
-            <a:off x="4370832" y="2258568"/>
-            <a:ext cx="1828800" cy="292608"/>
+            <a:off x="3659429" y="2258568"/>
+            <a:ext cx="1581912" cy="292608"/>
           </a:xfrm>
           <a:prstGeom prst="rect">
             <a:avLst/>
@@ -21062,13 +21174,13 @@
             <a:r>
               <a:rPr lang="en-US" sz="1300" b="1" dirty="0">
                 <a:solidFill>
-                  <a:srgbClr val="0F766E"/>
+                  <a:srgbClr val="9D174D"/>
                 </a:solidFill>
                 <a:latin typeface="Trebuchet MS" pitchFamily="34" charset="0"/>
                 <a:ea typeface="Trebuchet MS" pitchFamily="34" charset="-122"/>
                 <a:cs typeface="Trebuchet MS" pitchFamily="34" charset="-120"/>
               </a:rPr>
-              <a:t>cred</a:t>
+              <a:t>ent</a:t>
             </a:r>
             <a:endParaRPr lang="en-US" sz="1300" dirty="0"/>
           </a:p>
@@ -21082,8 +21194,8 @@
         </p:nvSpPr>
         <p:spPr>
           <a:xfrm>
-            <a:off x="4370832" y="2569464"/>
-            <a:ext cx="1828800" cy="201168"/>
+            <a:off x="3659429" y="2569464"/>
+            <a:ext cx="1581912" cy="201168"/>
           </a:xfrm>
           <a:prstGeom prst="rect">
             <a:avLst/>
@@ -21107,7 +21219,7 @@
                 <a:ea typeface="Calibri" pitchFamily="34" charset="-122"/>
                 <a:cs typeface="Calibri" pitchFamily="34" charset="-120"/>
               </a:rPr>
-              <a:t>believe, trust</a:t>
+              <a:t>relating to</a:t>
             </a:r>
             <a:endParaRPr lang="en-US" sz="850" dirty="0"/>
           </a:p>
@@ -21121,8 +21233,8 @@
         </p:nvSpPr>
         <p:spPr>
           <a:xfrm>
-            <a:off x="6519672" y="2258568"/>
-            <a:ext cx="1828800" cy="292608"/>
+            <a:off x="5329123" y="2258568"/>
+            <a:ext cx="1581912" cy="292608"/>
           </a:xfrm>
           <a:prstGeom prst="rect">
             <a:avLst>
@@ -21155,8 +21267,8 @@
         </p:nvSpPr>
         <p:spPr>
           <a:xfrm>
-            <a:off x="6519672" y="2258568"/>
-            <a:ext cx="1828800" cy="292608"/>
+            <a:off x="5329123" y="2258568"/>
+            <a:ext cx="1581912" cy="292608"/>
           </a:xfrm>
           <a:prstGeom prst="rect">
             <a:avLst/>
@@ -21180,7 +21292,7 @@
                 <a:ea typeface="Trebuchet MS" pitchFamily="34" charset="-122"/>
                 <a:cs typeface="Trebuchet MS" pitchFamily="34" charset="-120"/>
               </a:rPr>
-              <a:t>ulous</a:t>
+              <a:t>ial</a:t>
             </a:r>
             <a:endParaRPr lang="en-US" sz="1300" dirty="0"/>
           </a:p>
@@ -21194,8 +21306,8 @@
         </p:nvSpPr>
         <p:spPr>
           <a:xfrm>
-            <a:off x="6519672" y="2569464"/>
-            <a:ext cx="1828800" cy="201168"/>
+            <a:off x="5329123" y="2569464"/>
+            <a:ext cx="1581912" cy="201168"/>
           </a:xfrm>
           <a:prstGeom prst="rect">
             <a:avLst/>
@@ -21219,7 +21331,7 @@
                 <a:ea typeface="Calibri" pitchFamily="34" charset="-122"/>
                 <a:cs typeface="Calibri" pitchFamily="34" charset="-120"/>
               </a:rPr>
-              <a:t>having the quality of</a:t>
+              <a:t>of or relating to</a:t>
             </a:r>
             <a:endParaRPr lang="en-US" sz="850" dirty="0"/>
           </a:p>
@@ -21228,6 +21340,118 @@
       <p:sp>
         <p:nvSpPr>
           <p:cNvPr id="25" name="Shape 23"/>
+          <p:cNvSpPr/>
+          <p:nvPr/>
+        </p:nvSpPr>
+        <p:spPr>
+          <a:xfrm>
+            <a:off x="6998818" y="2258568"/>
+            <a:ext cx="1581912" cy="292608"/>
+          </a:xfrm>
+          <a:prstGeom prst="rect">
+            <a:avLst>
+              <a:gd name="adj" fmla="val 25000"/>
+            </a:avLst>
+          </a:prstGeom>
+          <a:solidFill>
+            <a:srgbClr val="FCE7F3"/>
+          </a:solidFill>
+          <a:ln w="19050">
+            <a:solidFill>
+              <a:srgbClr val="DB2777"/>
+            </a:solidFill>
+            <a:prstDash val="solid"/>
+          </a:ln>
+          <a:effectLst>
+            <a:outerShdw sx="100000" sy="100000" kx="0" ky="0" algn="bl" rotWithShape="0" blurRad="101600" dist="38100" dir="8100000">
+              <a:srgbClr val="000000">
+                <a:alpha val="12000"/>
+              </a:srgbClr>
+            </a:outerShdw>
+          </a:effectLst>
+        </p:spPr>
+      </p:sp>
+      <p:sp>
+        <p:nvSpPr>
+          <p:cNvPr id="26" name="Text 24"/>
+          <p:cNvSpPr/>
+          <p:nvPr/>
+        </p:nvSpPr>
+        <p:spPr>
+          <a:xfrm>
+            <a:off x="6998818" y="2258568"/>
+            <a:ext cx="1581912" cy="292608"/>
+          </a:xfrm>
+          <a:prstGeom prst="rect">
+            <a:avLst/>
+          </a:prstGeom>
+          <a:noFill/>
+          <a:ln/>
+        </p:spPr>
+        <p:txBody>
+          <a:bodyPr wrap="square" lIns="0" tIns="0" rIns="0" bIns="0" rtlCol="0" anchor="ctr"/>
+          <a:lstStyle/>
+          <a:p>
+            <a:pPr algn="ctr" indent="0" marL="0">
+              <a:buNone/>
+            </a:pPr>
+            <a:r>
+              <a:rPr lang="en-US" sz="1300" b="1" dirty="0">
+                <a:solidFill>
+                  <a:srgbClr val="9D174D"/>
+                </a:solidFill>
+                <a:latin typeface="Trebuchet MS" pitchFamily="34" charset="0"/>
+                <a:ea typeface="Trebuchet MS" pitchFamily="34" charset="-122"/>
+                <a:cs typeface="Trebuchet MS" pitchFamily="34" charset="-120"/>
+              </a:rPr>
+              <a:t>s</a:t>
+            </a:r>
+            <a:endParaRPr lang="en-US" sz="1300" dirty="0"/>
+          </a:p>
+        </p:txBody>
+      </p:sp>
+      <p:sp>
+        <p:nvSpPr>
+          <p:cNvPr id="27" name="Text 25"/>
+          <p:cNvSpPr/>
+          <p:nvPr/>
+        </p:nvSpPr>
+        <p:spPr>
+          <a:xfrm>
+            <a:off x="6998818" y="2569464"/>
+            <a:ext cx="1581912" cy="201168"/>
+          </a:xfrm>
+          <a:prstGeom prst="rect">
+            <a:avLst/>
+          </a:prstGeom>
+          <a:noFill/>
+          <a:ln/>
+        </p:spPr>
+        <p:txBody>
+          <a:bodyPr wrap="square" lIns="0" tIns="0" rIns="0" bIns="0" rtlCol="0" anchor="t"/>
+          <a:lstStyle/>
+          <a:p>
+            <a:pPr algn="ctr" indent="0" marL="0">
+              <a:buNone/>
+            </a:pPr>
+            <a:r>
+              <a:rPr lang="en-US" sz="850" dirty="0">
+                <a:solidFill>
+                  <a:srgbClr val="475569"/>
+                </a:solidFill>
+                <a:latin typeface="Calibri" pitchFamily="34" charset="0"/>
+                <a:ea typeface="Calibri" pitchFamily="34" charset="-122"/>
+                <a:cs typeface="Calibri" pitchFamily="34" charset="-120"/>
+              </a:rPr>
+              <a:t>more than one</a:t>
+            </a:r>
+            <a:endParaRPr lang="en-US" sz="850" dirty="0"/>
+          </a:p>
+        </p:txBody>
+      </p:sp>
+      <p:sp>
+        <p:nvSpPr>
+          <p:cNvPr id="28" name="Shape 26"/>
           <p:cNvSpPr/>
           <p:nvPr/>
         </p:nvSpPr>
@@ -21254,7 +21478,7 @@
       </p:sp>
       <p:sp>
         <p:nvSpPr>
-          <p:cNvPr id="26" name="Text 24"/>
+          <p:cNvPr id="29" name="Text 27"/>
           <p:cNvSpPr/>
           <p:nvPr/>
         </p:nvSpPr>
@@ -21293,7 +21517,7 @@
       </p:sp>
       <p:sp>
         <p:nvSpPr>
-          <p:cNvPr id="27" name="Shape 25"/>
+          <p:cNvPr id="30" name="Shape 28"/>
           <p:cNvSpPr/>
           <p:nvPr/>
         </p:nvSpPr>
@@ -21320,14 +21544,14 @@
       </p:sp>
       <p:sp>
         <p:nvSpPr>
-          <p:cNvPr id="28" name="Shape 26"/>
-          <p:cNvSpPr/>
-          <p:nvPr/>
-        </p:nvSpPr>
-        <p:spPr>
-          <a:xfrm>
-            <a:off x="1975104" y="3364992"/>
-            <a:ext cx="1554480" cy="475488"/>
+          <p:cNvPr id="31" name="Shape 29"/>
+          <p:cNvSpPr/>
+          <p:nvPr/>
+        </p:nvSpPr>
+        <p:spPr>
+          <a:xfrm>
+            <a:off x="2313432" y="3364992"/>
+            <a:ext cx="1645920" cy="475488"/>
           </a:xfrm>
           <a:prstGeom prst="rect">
             <a:avLst>
@@ -21347,14 +21571,14 @@
       </p:sp>
       <p:sp>
         <p:nvSpPr>
-          <p:cNvPr id="29" name="Text 27"/>
-          <p:cNvSpPr/>
-          <p:nvPr/>
-        </p:nvSpPr>
-        <p:spPr>
-          <a:xfrm>
-            <a:off x="1975104" y="3364992"/>
-            <a:ext cx="1554480" cy="475488"/>
+          <p:cNvPr id="32" name="Text 30"/>
+          <p:cNvSpPr/>
+          <p:nvPr/>
+        </p:nvSpPr>
+        <p:spPr>
+          <a:xfrm>
+            <a:off x="2313432" y="3364992"/>
+            <a:ext cx="1645920" cy="475488"/>
           </a:xfrm>
           <a:prstGeom prst="rect">
             <a:avLst/>
@@ -21378,7 +21602,7 @@
                 <a:ea typeface="Trebuchet MS" pitchFamily="34" charset="-122"/>
                 <a:cs typeface="Trebuchet MS" pitchFamily="34" charset="-120"/>
               </a:rPr>
-              <a:t>in</a:t>
+              <a:t>cre</a:t>
             </a:r>
             <a:endParaRPr lang="en-US" sz="1400" dirty="0"/>
           </a:p>
@@ -21386,14 +21610,14 @@
       </p:sp>
       <p:sp>
         <p:nvSpPr>
-          <p:cNvPr id="30" name="Text 28"/>
-          <p:cNvSpPr/>
-          <p:nvPr/>
-        </p:nvSpPr>
-        <p:spPr>
-          <a:xfrm>
-            <a:off x="3529584" y="3364992"/>
-            <a:ext cx="73152" cy="475488"/>
+          <p:cNvPr id="33" name="Text 31"/>
+          <p:cNvSpPr/>
+          <p:nvPr/>
+        </p:nvSpPr>
+        <p:spPr>
+          <a:xfrm>
+            <a:off x="3959352" y="3364992"/>
+            <a:ext cx="411480" cy="475488"/>
           </a:xfrm>
           <a:prstGeom prst="rect">
             <a:avLst/>
@@ -21425,14 +21649,14 @@
       </p:sp>
       <p:sp>
         <p:nvSpPr>
-          <p:cNvPr id="31" name="Shape 29"/>
-          <p:cNvSpPr/>
-          <p:nvPr/>
-        </p:nvSpPr>
-        <p:spPr>
-          <a:xfrm>
-            <a:off x="3602736" y="3364992"/>
-            <a:ext cx="1554480" cy="475488"/>
+          <p:cNvPr id="34" name="Shape 32"/>
+          <p:cNvSpPr/>
+          <p:nvPr/>
+        </p:nvSpPr>
+        <p:spPr>
+          <a:xfrm>
+            <a:off x="4370832" y="3364992"/>
+            <a:ext cx="1645920" cy="475488"/>
           </a:xfrm>
           <a:prstGeom prst="rect">
             <a:avLst>
@@ -21452,14 +21676,14 @@
       </p:sp>
       <p:sp>
         <p:nvSpPr>
-          <p:cNvPr id="32" name="Text 30"/>
-          <p:cNvSpPr/>
-          <p:nvPr/>
-        </p:nvSpPr>
-        <p:spPr>
-          <a:xfrm>
-            <a:off x="3602736" y="3364992"/>
-            <a:ext cx="1554480" cy="475488"/>
+          <p:cNvPr id="35" name="Text 33"/>
+          <p:cNvSpPr/>
+          <p:nvPr/>
+        </p:nvSpPr>
+        <p:spPr>
+          <a:xfrm>
+            <a:off x="4370832" y="3364992"/>
+            <a:ext cx="1645920" cy="475488"/>
           </a:xfrm>
           <a:prstGeom prst="rect">
             <a:avLst/>
@@ -21483,7 +21707,7 @@
                 <a:ea typeface="Trebuchet MS" pitchFamily="34" charset="-122"/>
                 <a:cs typeface="Trebuchet MS" pitchFamily="34" charset="-120"/>
               </a:rPr>
-              <a:t>cred</a:t>
+              <a:t>den</a:t>
             </a:r>
             <a:endParaRPr lang="en-US" sz="1400" dirty="0"/>
           </a:p>
@@ -21491,14 +21715,14 @@
       </p:sp>
       <p:sp>
         <p:nvSpPr>
-          <p:cNvPr id="33" name="Text 31"/>
-          <p:cNvSpPr/>
-          <p:nvPr/>
-        </p:nvSpPr>
-        <p:spPr>
-          <a:xfrm>
-            <a:off x="5157216" y="3364992"/>
-            <a:ext cx="73152" cy="475488"/>
+          <p:cNvPr id="36" name="Text 34"/>
+          <p:cNvSpPr/>
+          <p:nvPr/>
+        </p:nvSpPr>
+        <p:spPr>
+          <a:xfrm>
+            <a:off x="6016752" y="3364992"/>
+            <a:ext cx="411480" cy="475488"/>
           </a:xfrm>
           <a:prstGeom prst="rect">
             <a:avLst/>
@@ -21530,14 +21754,14 @@
       </p:sp>
       <p:sp>
         <p:nvSpPr>
-          <p:cNvPr id="34" name="Shape 32"/>
-          <p:cNvSpPr/>
-          <p:nvPr/>
-        </p:nvSpPr>
-        <p:spPr>
-          <a:xfrm>
-            <a:off x="5230368" y="3364992"/>
-            <a:ext cx="1554480" cy="475488"/>
+          <p:cNvPr id="37" name="Shape 35"/>
+          <p:cNvSpPr/>
+          <p:nvPr/>
+        </p:nvSpPr>
+        <p:spPr>
+          <a:xfrm>
+            <a:off x="6428232" y="3364992"/>
+            <a:ext cx="1645920" cy="475488"/>
           </a:xfrm>
           <a:prstGeom prst="rect">
             <a:avLst>
@@ -21557,14 +21781,14 @@
       </p:sp>
       <p:sp>
         <p:nvSpPr>
-          <p:cNvPr id="35" name="Text 33"/>
-          <p:cNvSpPr/>
-          <p:nvPr/>
-        </p:nvSpPr>
-        <p:spPr>
-          <a:xfrm>
-            <a:off x="5230368" y="3364992"/>
-            <a:ext cx="1554480" cy="475488"/>
+          <p:cNvPr id="38" name="Text 36"/>
+          <p:cNvSpPr/>
+          <p:nvPr/>
+        </p:nvSpPr>
+        <p:spPr>
+          <a:xfrm>
+            <a:off x="6428232" y="3364992"/>
+            <a:ext cx="1645920" cy="475488"/>
           </a:xfrm>
           <a:prstGeom prst="rect">
             <a:avLst/>
@@ -21588,112 +21812,7 @@
                 <a:ea typeface="Trebuchet MS" pitchFamily="34" charset="-122"/>
                 <a:cs typeface="Trebuchet MS" pitchFamily="34" charset="-120"/>
               </a:rPr>
-              <a:t>u</a:t>
-            </a:r>
-            <a:endParaRPr lang="en-US" sz="1400" dirty="0"/>
-          </a:p>
-        </p:txBody>
-      </p:sp>
-      <p:sp>
-        <p:nvSpPr>
-          <p:cNvPr id="36" name="Text 34"/>
-          <p:cNvSpPr/>
-          <p:nvPr/>
-        </p:nvSpPr>
-        <p:spPr>
-          <a:xfrm>
-            <a:off x="6784848" y="3364992"/>
-            <a:ext cx="73152" cy="475488"/>
-          </a:xfrm>
-          <a:prstGeom prst="rect">
-            <a:avLst/>
-          </a:prstGeom>
-          <a:noFill/>
-          <a:ln/>
-        </p:spPr>
-        <p:txBody>
-          <a:bodyPr wrap="square" lIns="0" tIns="0" rIns="0" bIns="0" rtlCol="0" anchor="ctr"/>
-          <a:lstStyle/>
-          <a:p>
-            <a:pPr algn="ctr" indent="0" marL="0">
-              <a:buNone/>
-            </a:pPr>
-            <a:r>
-              <a:rPr lang="en-US" sz="1600" b="1" dirty="0">
-                <a:solidFill>
-                  <a:srgbClr val="0D9488"/>
-                </a:solidFill>
-                <a:latin typeface="Trebuchet MS" pitchFamily="34" charset="0"/>
-                <a:ea typeface="Trebuchet MS" pitchFamily="34" charset="-122"/>
-                <a:cs typeface="Trebuchet MS" pitchFamily="34" charset="-120"/>
-              </a:rPr>
-              <a:t>·</a:t>
-            </a:r>
-            <a:endParaRPr lang="en-US" sz="1600" dirty="0"/>
-          </a:p>
-        </p:txBody>
-      </p:sp>
-      <p:sp>
-        <p:nvSpPr>
-          <p:cNvPr id="37" name="Shape 35"/>
-          <p:cNvSpPr/>
-          <p:nvPr/>
-        </p:nvSpPr>
-        <p:spPr>
-          <a:xfrm>
-            <a:off x="6858000" y="3364992"/>
-            <a:ext cx="1554480" cy="475488"/>
-          </a:xfrm>
-          <a:prstGeom prst="rect">
-            <a:avLst>
-              <a:gd name="adj" fmla="val 9615"/>
-            </a:avLst>
-          </a:prstGeom>
-          <a:solidFill>
-            <a:srgbClr val="FFFFFF"/>
-          </a:solidFill>
-          <a:ln w="12700">
-            <a:solidFill>
-              <a:srgbClr val="0D9488"/>
-            </a:solidFill>
-            <a:prstDash val="solid"/>
-          </a:ln>
-        </p:spPr>
-      </p:sp>
-      <p:sp>
-        <p:nvSpPr>
-          <p:cNvPr id="38" name="Text 36"/>
-          <p:cNvSpPr/>
-          <p:nvPr/>
-        </p:nvSpPr>
-        <p:spPr>
-          <a:xfrm>
-            <a:off x="6858000" y="3364992"/>
-            <a:ext cx="1554480" cy="475488"/>
-          </a:xfrm>
-          <a:prstGeom prst="rect">
-            <a:avLst/>
-          </a:prstGeom>
-          <a:noFill/>
-          <a:ln/>
-        </p:spPr>
-        <p:txBody>
-          <a:bodyPr wrap="square" lIns="0" tIns="0" rIns="0" bIns="0" rtlCol="0" anchor="ctr"/>
-          <a:lstStyle/>
-          <a:p>
-            <a:pPr algn="ctr" indent="0" marL="0">
-              <a:buNone/>
-            </a:pPr>
-            <a:r>
-              <a:rPr lang="en-US" sz="1400" b="1" dirty="0">
-                <a:solidFill>
-                  <a:srgbClr val="0D9488"/>
-                </a:solidFill>
-                <a:latin typeface="Trebuchet MS" pitchFamily="34" charset="0"/>
-                <a:ea typeface="Trebuchet MS" pitchFamily="34" charset="-122"/>
-                <a:cs typeface="Trebuchet MS" pitchFamily="34" charset="-120"/>
-              </a:rPr>
-              <a:t>lous</a:t>
+              <a:t>tials</a:t>
             </a:r>
             <a:endParaRPr lang="en-US" sz="1400" dirty="0"/>
           </a:p>
@@ -22256,7 +22375,7 @@
                 <a:ea typeface="Trebuchet MS" pitchFamily="34" charset="-122"/>
                 <a:cs typeface="Trebuchet MS" pitchFamily="34" charset="-120"/>
               </a:rPr>
-              <a:t>incredulous</a:t>
+              <a:t>credentials</a:t>
             </a:r>
             <a:endParaRPr lang="en-US" sz="2800" dirty="0"/>
           </a:p>
@@ -22336,8 +22455,8 @@
         </p:nvSpPr>
         <p:spPr>
           <a:xfrm>
-            <a:off x="2221992" y="2258568"/>
-            <a:ext cx="1828800" cy="292608"/>
+            <a:off x="1989734" y="2258568"/>
+            <a:ext cx="1581912" cy="292608"/>
           </a:xfrm>
           <a:prstGeom prst="rect">
             <a:avLst>
@@ -22345,11 +22464,11 @@
             </a:avLst>
           </a:prstGeom>
           <a:solidFill>
-            <a:srgbClr val="DDD6FE"/>
+            <a:srgbClr val="CCFBF1"/>
           </a:solidFill>
           <a:ln w="19050">
             <a:solidFill>
-              <a:srgbClr val="7C3AED"/>
+              <a:srgbClr val="0D9488"/>
             </a:solidFill>
             <a:prstDash val="solid"/>
           </a:ln>
@@ -22370,8 +22489,8 @@
         </p:nvSpPr>
         <p:spPr>
           <a:xfrm>
-            <a:off x="2221992" y="2258568"/>
-            <a:ext cx="1828800" cy="292608"/>
+            <a:off x="1989734" y="2258568"/>
+            <a:ext cx="1581912" cy="292608"/>
           </a:xfrm>
           <a:prstGeom prst="rect">
             <a:avLst/>
@@ -22389,13 +22508,13 @@
             <a:r>
               <a:rPr lang="en-US" sz="1300" b="1" dirty="0">
                 <a:solidFill>
-                  <a:srgbClr val="4C1D95"/>
+                  <a:srgbClr val="0F766E"/>
                 </a:solidFill>
                 <a:latin typeface="Trebuchet MS" pitchFamily="34" charset="0"/>
                 <a:ea typeface="Trebuchet MS" pitchFamily="34" charset="-122"/>
                 <a:cs typeface="Trebuchet MS" pitchFamily="34" charset="-120"/>
               </a:rPr>
-              <a:t>in</a:t>
+              <a:t>cred</a:t>
             </a:r>
             <a:endParaRPr lang="en-US" sz="1300" dirty="0"/>
           </a:p>
@@ -22409,8 +22528,8 @@
         </p:nvSpPr>
         <p:spPr>
           <a:xfrm>
-            <a:off x="2221992" y="2569464"/>
-            <a:ext cx="1828800" cy="201168"/>
+            <a:off x="1989734" y="2569464"/>
+            <a:ext cx="1581912" cy="201168"/>
           </a:xfrm>
           <a:prstGeom prst="rect">
             <a:avLst/>
@@ -22434,7 +22553,7 @@
                 <a:ea typeface="Calibri" pitchFamily="34" charset="-122"/>
                 <a:cs typeface="Calibri" pitchFamily="34" charset="-120"/>
               </a:rPr>
-              <a:t>not</a:t>
+              <a:t>believe, trust</a:t>
             </a:r>
             <a:endParaRPr lang="en-US" sz="850" dirty="0"/>
           </a:p>
@@ -22448,8 +22567,8 @@
         </p:nvSpPr>
         <p:spPr>
           <a:xfrm>
-            <a:off x="4370832" y="2258568"/>
-            <a:ext cx="1828800" cy="292608"/>
+            <a:off x="3659429" y="2258568"/>
+            <a:ext cx="1581912" cy="292608"/>
           </a:xfrm>
           <a:prstGeom prst="rect">
             <a:avLst>
@@ -22457,11 +22576,11 @@
             </a:avLst>
           </a:prstGeom>
           <a:solidFill>
-            <a:srgbClr val="CCFBF1"/>
+            <a:srgbClr val="FCE7F3"/>
           </a:solidFill>
           <a:ln w="19050">
             <a:solidFill>
-              <a:srgbClr val="0D9488"/>
+              <a:srgbClr val="DB2777"/>
             </a:solidFill>
             <a:prstDash val="solid"/>
           </a:ln>
@@ -22482,8 +22601,8 @@
         </p:nvSpPr>
         <p:spPr>
           <a:xfrm>
-            <a:off x="4370832" y="2258568"/>
-            <a:ext cx="1828800" cy="292608"/>
+            <a:off x="3659429" y="2258568"/>
+            <a:ext cx="1581912" cy="292608"/>
           </a:xfrm>
           <a:prstGeom prst="rect">
             <a:avLst/>
@@ -22501,13 +22620,13 @@
             <a:r>
               <a:rPr lang="en-US" sz="1300" b="1" dirty="0">
                 <a:solidFill>
-                  <a:srgbClr val="0F766E"/>
+                  <a:srgbClr val="9D174D"/>
                 </a:solidFill>
                 <a:latin typeface="Trebuchet MS" pitchFamily="34" charset="0"/>
                 <a:ea typeface="Trebuchet MS" pitchFamily="34" charset="-122"/>
                 <a:cs typeface="Trebuchet MS" pitchFamily="34" charset="-120"/>
               </a:rPr>
-              <a:t>cred</a:t>
+              <a:t>ent</a:t>
             </a:r>
             <a:endParaRPr lang="en-US" sz="1300" dirty="0"/>
           </a:p>
@@ -22521,8 +22640,8 @@
         </p:nvSpPr>
         <p:spPr>
           <a:xfrm>
-            <a:off x="4370832" y="2569464"/>
-            <a:ext cx="1828800" cy="201168"/>
+            <a:off x="3659429" y="2569464"/>
+            <a:ext cx="1581912" cy="201168"/>
           </a:xfrm>
           <a:prstGeom prst="rect">
             <a:avLst/>
@@ -22546,7 +22665,7 @@
                 <a:ea typeface="Calibri" pitchFamily="34" charset="-122"/>
                 <a:cs typeface="Calibri" pitchFamily="34" charset="-120"/>
               </a:rPr>
-              <a:t>believe, trust</a:t>
+              <a:t>relating to</a:t>
             </a:r>
             <a:endParaRPr lang="en-US" sz="850" dirty="0"/>
           </a:p>
@@ -22560,8 +22679,8 @@
         </p:nvSpPr>
         <p:spPr>
           <a:xfrm>
-            <a:off x="6519672" y="2258568"/>
-            <a:ext cx="1828800" cy="292608"/>
+            <a:off x="5329123" y="2258568"/>
+            <a:ext cx="1581912" cy="292608"/>
           </a:xfrm>
           <a:prstGeom prst="rect">
             <a:avLst>
@@ -22594,8 +22713,8 @@
         </p:nvSpPr>
         <p:spPr>
           <a:xfrm>
-            <a:off x="6519672" y="2258568"/>
-            <a:ext cx="1828800" cy="292608"/>
+            <a:off x="5329123" y="2258568"/>
+            <a:ext cx="1581912" cy="292608"/>
           </a:xfrm>
           <a:prstGeom prst="rect">
             <a:avLst/>
@@ -22619,7 +22738,7 @@
                 <a:ea typeface="Trebuchet MS" pitchFamily="34" charset="-122"/>
                 <a:cs typeface="Trebuchet MS" pitchFamily="34" charset="-120"/>
               </a:rPr>
-              <a:t>ulous</a:t>
+              <a:t>ial</a:t>
             </a:r>
             <a:endParaRPr lang="en-US" sz="1300" dirty="0"/>
           </a:p>
@@ -22633,8 +22752,8 @@
         </p:nvSpPr>
         <p:spPr>
           <a:xfrm>
-            <a:off x="6519672" y="2569464"/>
-            <a:ext cx="1828800" cy="201168"/>
+            <a:off x="5329123" y="2569464"/>
+            <a:ext cx="1581912" cy="201168"/>
           </a:xfrm>
           <a:prstGeom prst="rect">
             <a:avLst/>
@@ -22658,7 +22777,7 @@
                 <a:ea typeface="Calibri" pitchFamily="34" charset="-122"/>
                 <a:cs typeface="Calibri" pitchFamily="34" charset="-120"/>
               </a:rPr>
-              <a:t>having the quality of</a:t>
+              <a:t>of or relating to</a:t>
             </a:r>
             <a:endParaRPr lang="en-US" sz="850" dirty="0"/>
           </a:p>
@@ -22667,6 +22786,118 @@
       <p:sp>
         <p:nvSpPr>
           <p:cNvPr id="25" name="Shape 23"/>
+          <p:cNvSpPr/>
+          <p:nvPr/>
+        </p:nvSpPr>
+        <p:spPr>
+          <a:xfrm>
+            <a:off x="6998818" y="2258568"/>
+            <a:ext cx="1581912" cy="292608"/>
+          </a:xfrm>
+          <a:prstGeom prst="rect">
+            <a:avLst>
+              <a:gd name="adj" fmla="val 25000"/>
+            </a:avLst>
+          </a:prstGeom>
+          <a:solidFill>
+            <a:srgbClr val="FCE7F3"/>
+          </a:solidFill>
+          <a:ln w="19050">
+            <a:solidFill>
+              <a:srgbClr val="DB2777"/>
+            </a:solidFill>
+            <a:prstDash val="solid"/>
+          </a:ln>
+          <a:effectLst>
+            <a:outerShdw sx="100000" sy="100000" kx="0" ky="0" algn="bl" rotWithShape="0" blurRad="101600" dist="38100" dir="8100000">
+              <a:srgbClr val="000000">
+                <a:alpha val="12000"/>
+              </a:srgbClr>
+            </a:outerShdw>
+          </a:effectLst>
+        </p:spPr>
+      </p:sp>
+      <p:sp>
+        <p:nvSpPr>
+          <p:cNvPr id="26" name="Text 24"/>
+          <p:cNvSpPr/>
+          <p:nvPr/>
+        </p:nvSpPr>
+        <p:spPr>
+          <a:xfrm>
+            <a:off x="6998818" y="2258568"/>
+            <a:ext cx="1581912" cy="292608"/>
+          </a:xfrm>
+          <a:prstGeom prst="rect">
+            <a:avLst/>
+          </a:prstGeom>
+          <a:noFill/>
+          <a:ln/>
+        </p:spPr>
+        <p:txBody>
+          <a:bodyPr wrap="square" lIns="0" tIns="0" rIns="0" bIns="0" rtlCol="0" anchor="ctr"/>
+          <a:lstStyle/>
+          <a:p>
+            <a:pPr algn="ctr" indent="0" marL="0">
+              <a:buNone/>
+            </a:pPr>
+            <a:r>
+              <a:rPr lang="en-US" sz="1300" b="1" dirty="0">
+                <a:solidFill>
+                  <a:srgbClr val="9D174D"/>
+                </a:solidFill>
+                <a:latin typeface="Trebuchet MS" pitchFamily="34" charset="0"/>
+                <a:ea typeface="Trebuchet MS" pitchFamily="34" charset="-122"/>
+                <a:cs typeface="Trebuchet MS" pitchFamily="34" charset="-120"/>
+              </a:rPr>
+              <a:t>s</a:t>
+            </a:r>
+            <a:endParaRPr lang="en-US" sz="1300" dirty="0"/>
+          </a:p>
+        </p:txBody>
+      </p:sp>
+      <p:sp>
+        <p:nvSpPr>
+          <p:cNvPr id="27" name="Text 25"/>
+          <p:cNvSpPr/>
+          <p:nvPr/>
+        </p:nvSpPr>
+        <p:spPr>
+          <a:xfrm>
+            <a:off x="6998818" y="2569464"/>
+            <a:ext cx="1581912" cy="201168"/>
+          </a:xfrm>
+          <a:prstGeom prst="rect">
+            <a:avLst/>
+          </a:prstGeom>
+          <a:noFill/>
+          <a:ln/>
+        </p:spPr>
+        <p:txBody>
+          <a:bodyPr wrap="square" lIns="0" tIns="0" rIns="0" bIns="0" rtlCol="0" anchor="t"/>
+          <a:lstStyle/>
+          <a:p>
+            <a:pPr algn="ctr" indent="0" marL="0">
+              <a:buNone/>
+            </a:pPr>
+            <a:r>
+              <a:rPr lang="en-US" sz="850" dirty="0">
+                <a:solidFill>
+                  <a:srgbClr val="475569"/>
+                </a:solidFill>
+                <a:latin typeface="Calibri" pitchFamily="34" charset="0"/>
+                <a:ea typeface="Calibri" pitchFamily="34" charset="-122"/>
+                <a:cs typeface="Calibri" pitchFamily="34" charset="-120"/>
+              </a:rPr>
+              <a:t>more than one</a:t>
+            </a:r>
+            <a:endParaRPr lang="en-US" sz="850" dirty="0"/>
+          </a:p>
+        </p:txBody>
+      </p:sp>
+      <p:sp>
+        <p:nvSpPr>
+          <p:cNvPr id="28" name="Shape 26"/>
           <p:cNvSpPr/>
           <p:nvPr/>
         </p:nvSpPr>
@@ -22693,7 +22924,7 @@
       </p:sp>
       <p:sp>
         <p:nvSpPr>
-          <p:cNvPr id="26" name="Text 24"/>
+          <p:cNvPr id="29" name="Text 27"/>
           <p:cNvSpPr/>
           <p:nvPr/>
         </p:nvSpPr>
@@ -22732,7 +22963,7 @@
       </p:sp>
       <p:sp>
         <p:nvSpPr>
-          <p:cNvPr id="27" name="Shape 25"/>
+          <p:cNvPr id="30" name="Shape 28"/>
           <p:cNvSpPr/>
           <p:nvPr/>
         </p:nvSpPr>
@@ -22759,14 +22990,14 @@
       </p:sp>
       <p:sp>
         <p:nvSpPr>
-          <p:cNvPr id="28" name="Shape 26"/>
-          <p:cNvSpPr/>
-          <p:nvPr/>
-        </p:nvSpPr>
-        <p:spPr>
-          <a:xfrm>
-            <a:off x="1975104" y="3364992"/>
-            <a:ext cx="1554480" cy="475488"/>
+          <p:cNvPr id="31" name="Shape 29"/>
+          <p:cNvSpPr/>
+          <p:nvPr/>
+        </p:nvSpPr>
+        <p:spPr>
+          <a:xfrm>
+            <a:off x="2313432" y="3364992"/>
+            <a:ext cx="1645920" cy="475488"/>
           </a:xfrm>
           <a:prstGeom prst="rect">
             <a:avLst>
@@ -22786,14 +23017,14 @@
       </p:sp>
       <p:sp>
         <p:nvSpPr>
-          <p:cNvPr id="29" name="Text 27"/>
-          <p:cNvSpPr/>
-          <p:nvPr/>
-        </p:nvSpPr>
-        <p:spPr>
-          <a:xfrm>
-            <a:off x="1975104" y="3364992"/>
-            <a:ext cx="1554480" cy="475488"/>
+          <p:cNvPr id="32" name="Text 30"/>
+          <p:cNvSpPr/>
+          <p:nvPr/>
+        </p:nvSpPr>
+        <p:spPr>
+          <a:xfrm>
+            <a:off x="2313432" y="3364992"/>
+            <a:ext cx="1645920" cy="475488"/>
           </a:xfrm>
           <a:prstGeom prst="rect">
             <a:avLst/>
@@ -22817,7 +23048,7 @@
                 <a:ea typeface="Trebuchet MS" pitchFamily="34" charset="-122"/>
                 <a:cs typeface="Trebuchet MS" pitchFamily="34" charset="-120"/>
               </a:rPr>
-              <a:t>in</a:t>
+              <a:t>cre</a:t>
             </a:r>
             <a:endParaRPr lang="en-US" sz="1400" dirty="0"/>
           </a:p>
@@ -22825,14 +23056,14 @@
       </p:sp>
       <p:sp>
         <p:nvSpPr>
-          <p:cNvPr id="30" name="Text 28"/>
-          <p:cNvSpPr/>
-          <p:nvPr/>
-        </p:nvSpPr>
-        <p:spPr>
-          <a:xfrm>
-            <a:off x="3529584" y="3364992"/>
-            <a:ext cx="73152" cy="475488"/>
+          <p:cNvPr id="33" name="Text 31"/>
+          <p:cNvSpPr/>
+          <p:nvPr/>
+        </p:nvSpPr>
+        <p:spPr>
+          <a:xfrm>
+            <a:off x="3959352" y="3364992"/>
+            <a:ext cx="411480" cy="475488"/>
           </a:xfrm>
           <a:prstGeom prst="rect">
             <a:avLst/>
@@ -22864,14 +23095,14 @@
       </p:sp>
       <p:sp>
         <p:nvSpPr>
-          <p:cNvPr id="31" name="Shape 29"/>
-          <p:cNvSpPr/>
-          <p:nvPr/>
-        </p:nvSpPr>
-        <p:spPr>
-          <a:xfrm>
-            <a:off x="3602736" y="3364992"/>
-            <a:ext cx="1554480" cy="475488"/>
+          <p:cNvPr id="34" name="Shape 32"/>
+          <p:cNvSpPr/>
+          <p:nvPr/>
+        </p:nvSpPr>
+        <p:spPr>
+          <a:xfrm>
+            <a:off x="4370832" y="3364992"/>
+            <a:ext cx="1645920" cy="475488"/>
           </a:xfrm>
           <a:prstGeom prst="rect">
             <a:avLst>
@@ -22891,14 +23122,14 @@
       </p:sp>
       <p:sp>
         <p:nvSpPr>
-          <p:cNvPr id="32" name="Text 30"/>
-          <p:cNvSpPr/>
-          <p:nvPr/>
-        </p:nvSpPr>
-        <p:spPr>
-          <a:xfrm>
-            <a:off x="3602736" y="3364992"/>
-            <a:ext cx="1554480" cy="475488"/>
+          <p:cNvPr id="35" name="Text 33"/>
+          <p:cNvSpPr/>
+          <p:nvPr/>
+        </p:nvSpPr>
+        <p:spPr>
+          <a:xfrm>
+            <a:off x="4370832" y="3364992"/>
+            <a:ext cx="1645920" cy="475488"/>
           </a:xfrm>
           <a:prstGeom prst="rect">
             <a:avLst/>
@@ -22922,7 +23153,7 @@
                 <a:ea typeface="Trebuchet MS" pitchFamily="34" charset="-122"/>
                 <a:cs typeface="Trebuchet MS" pitchFamily="34" charset="-120"/>
               </a:rPr>
-              <a:t>cred</a:t>
+              <a:t>den</a:t>
             </a:r>
             <a:endParaRPr lang="en-US" sz="1400" dirty="0"/>
           </a:p>
@@ -22930,14 +23161,14 @@
       </p:sp>
       <p:sp>
         <p:nvSpPr>
-          <p:cNvPr id="33" name="Text 31"/>
-          <p:cNvSpPr/>
-          <p:nvPr/>
-        </p:nvSpPr>
-        <p:spPr>
-          <a:xfrm>
-            <a:off x="5157216" y="3364992"/>
-            <a:ext cx="73152" cy="475488"/>
+          <p:cNvPr id="36" name="Text 34"/>
+          <p:cNvSpPr/>
+          <p:nvPr/>
+        </p:nvSpPr>
+        <p:spPr>
+          <a:xfrm>
+            <a:off x="6016752" y="3364992"/>
+            <a:ext cx="411480" cy="475488"/>
           </a:xfrm>
           <a:prstGeom prst="rect">
             <a:avLst/>
@@ -22969,14 +23200,14 @@
       </p:sp>
       <p:sp>
         <p:nvSpPr>
-          <p:cNvPr id="34" name="Shape 32"/>
-          <p:cNvSpPr/>
-          <p:nvPr/>
-        </p:nvSpPr>
-        <p:spPr>
-          <a:xfrm>
-            <a:off x="5230368" y="3364992"/>
-            <a:ext cx="1554480" cy="475488"/>
+          <p:cNvPr id="37" name="Shape 35"/>
+          <p:cNvSpPr/>
+          <p:nvPr/>
+        </p:nvSpPr>
+        <p:spPr>
+          <a:xfrm>
+            <a:off x="6428232" y="3364992"/>
+            <a:ext cx="1645920" cy="475488"/>
           </a:xfrm>
           <a:prstGeom prst="rect">
             <a:avLst>
@@ -22996,14 +23227,14 @@
       </p:sp>
       <p:sp>
         <p:nvSpPr>
-          <p:cNvPr id="35" name="Text 33"/>
-          <p:cNvSpPr/>
-          <p:nvPr/>
-        </p:nvSpPr>
-        <p:spPr>
-          <a:xfrm>
-            <a:off x="5230368" y="3364992"/>
-            <a:ext cx="1554480" cy="475488"/>
+          <p:cNvPr id="38" name="Text 36"/>
+          <p:cNvSpPr/>
+          <p:nvPr/>
+        </p:nvSpPr>
+        <p:spPr>
+          <a:xfrm>
+            <a:off x="6428232" y="3364992"/>
+            <a:ext cx="1645920" cy="475488"/>
           </a:xfrm>
           <a:prstGeom prst="rect">
             <a:avLst/>
@@ -23027,7 +23258,7 @@
                 <a:ea typeface="Trebuchet MS" pitchFamily="34" charset="-122"/>
                 <a:cs typeface="Trebuchet MS" pitchFamily="34" charset="-120"/>
               </a:rPr>
-              <a:t>u</a:t>
+              <a:t>tials</a:t>
             </a:r>
             <a:endParaRPr lang="en-US" sz="1400" dirty="0"/>
           </a:p>
@@ -23035,193 +23266,286 @@
       </p:sp>
       <p:sp>
         <p:nvSpPr>
-          <p:cNvPr id="36" name="Text 34"/>
-          <p:cNvSpPr/>
-          <p:nvPr/>
-        </p:nvSpPr>
-        <p:spPr>
-          <a:xfrm>
-            <a:off x="6784848" y="3364992"/>
-            <a:ext cx="73152" cy="475488"/>
-          </a:xfrm>
-          <a:prstGeom prst="rect">
-            <a:avLst/>
-          </a:prstGeom>
-          <a:noFill/>
-          <a:ln/>
-        </p:spPr>
-        <p:txBody>
-          <a:bodyPr wrap="square" lIns="0" tIns="0" rIns="0" bIns="0" rtlCol="0" anchor="ctr"/>
-          <a:lstStyle/>
-          <a:p>
-            <a:pPr algn="ctr" indent="0" marL="0">
-              <a:buNone/>
-            </a:pPr>
-            <a:r>
-              <a:rPr lang="en-US" sz="1600" b="1" dirty="0">
-                <a:solidFill>
-                  <a:srgbClr val="0D9488"/>
+          <p:cNvPr id="39" name="Shape 37"/>
+          <p:cNvSpPr/>
+          <p:nvPr/>
+        </p:nvSpPr>
+        <p:spPr>
+          <a:xfrm>
+            <a:off x="365760" y="4096512"/>
+            <a:ext cx="1371600" cy="804672"/>
+          </a:xfrm>
+          <a:prstGeom prst="rect">
+            <a:avLst>
+              <a:gd name="adj" fmla="val 6818"/>
+            </a:avLst>
+          </a:prstGeom>
+          <a:solidFill>
+            <a:srgbClr val="E2E8F0"/>
+          </a:solidFill>
+          <a:ln w="12700">
+            <a:solidFill>
+              <a:srgbClr val="E2E8F0"/>
+            </a:solidFill>
+            <a:prstDash val="solid"/>
+          </a:ln>
+        </p:spPr>
+      </p:sp>
+      <p:sp>
+        <p:nvSpPr>
+          <p:cNvPr id="40" name="Text 38"/>
+          <p:cNvSpPr/>
+          <p:nvPr/>
+        </p:nvSpPr>
+        <p:spPr>
+          <a:xfrm>
+            <a:off x="365760" y="4096512"/>
+            <a:ext cx="1371600" cy="804672"/>
+          </a:xfrm>
+          <a:prstGeom prst="rect">
+            <a:avLst/>
+          </a:prstGeom>
+          <a:noFill/>
+          <a:ln/>
+        </p:spPr>
+        <p:txBody>
+          <a:bodyPr wrap="square" lIns="0" tIns="0" rIns="0" bIns="0" rtlCol="0" anchor="ctr"/>
+          <a:lstStyle/>
+          <a:p>
+            <a:pPr algn="ctr" indent="0" marL="0">
+              <a:buNone/>
+            </a:pPr>
+            <a:r>
+              <a:rPr lang="en-US" sz="1100" b="1" dirty="0">
+                <a:solidFill>
+                  <a:srgbClr val="475569"/>
                 </a:solidFill>
                 <a:latin typeface="Trebuchet MS" pitchFamily="34" charset="0"/>
                 <a:ea typeface="Trebuchet MS" pitchFamily="34" charset="-122"/>
                 <a:cs typeface="Trebuchet MS" pitchFamily="34" charset="-120"/>
               </a:rPr>
-              <a:t>·</a:t>
-            </a:r>
-            <a:endParaRPr lang="en-US" sz="1600" dirty="0"/>
-          </a:p>
-        </p:txBody>
-      </p:sp>
-      <p:sp>
-        <p:nvSpPr>
-          <p:cNvPr id="37" name="Shape 35"/>
-          <p:cNvSpPr/>
-          <p:nvPr/>
-        </p:nvSpPr>
-        <p:spPr>
-          <a:xfrm>
-            <a:off x="6858000" y="3364992"/>
-            <a:ext cx="1554480" cy="475488"/>
+              <a:t>Phonemes</a:t>
+            </a:r>
+            <a:endParaRPr lang="en-US" sz="1100" dirty="0"/>
+          </a:p>
+        </p:txBody>
+      </p:sp>
+      <p:sp>
+        <p:nvSpPr>
+          <p:cNvPr id="41" name="Shape 39"/>
+          <p:cNvSpPr/>
+          <p:nvPr/>
+        </p:nvSpPr>
+        <p:spPr>
+          <a:xfrm>
+            <a:off x="1874520" y="4096512"/>
+            <a:ext cx="6903720" cy="804672"/>
           </a:xfrm>
           <a:prstGeom prst="rect">
             <a:avLst>
-              <a:gd name="adj" fmla="val 9615"/>
+              <a:gd name="adj" fmla="val 6818"/>
             </a:avLst>
           </a:prstGeom>
           <a:solidFill>
+            <a:srgbClr val="FCE7F3"/>
+          </a:solidFill>
+          <a:ln w="12700">
+            <a:solidFill>
+              <a:srgbClr val="DB2777"/>
+            </a:solidFill>
+            <a:prstDash val="solid"/>
+          </a:ln>
+        </p:spPr>
+      </p:sp>
+      <p:sp>
+        <p:nvSpPr>
+          <p:cNvPr id="42" name="Shape 40"/>
+          <p:cNvSpPr/>
+          <p:nvPr/>
+        </p:nvSpPr>
+        <p:spPr>
+          <a:xfrm>
+            <a:off x="1951330" y="4169664"/>
+            <a:ext cx="676656" cy="384048"/>
+          </a:xfrm>
+          <a:prstGeom prst="rect">
+            <a:avLst>
+              <a:gd name="adj" fmla="val 9524"/>
+            </a:avLst>
+          </a:prstGeom>
+          <a:solidFill>
             <a:srgbClr val="FFFFFF"/>
           </a:solidFill>
           <a:ln w="12700">
             <a:solidFill>
-              <a:srgbClr val="0D9488"/>
-            </a:solidFill>
-            <a:prstDash val="solid"/>
-          </a:ln>
-        </p:spPr>
-      </p:sp>
-      <p:sp>
-        <p:nvSpPr>
-          <p:cNvPr id="38" name="Text 36"/>
-          <p:cNvSpPr/>
-          <p:nvPr/>
-        </p:nvSpPr>
-        <p:spPr>
-          <a:xfrm>
-            <a:off x="6858000" y="3364992"/>
-            <a:ext cx="1554480" cy="475488"/>
-          </a:xfrm>
-          <a:prstGeom prst="rect">
-            <a:avLst/>
-          </a:prstGeom>
-          <a:noFill/>
-          <a:ln/>
-        </p:spPr>
-        <p:txBody>
-          <a:bodyPr wrap="square" lIns="0" tIns="0" rIns="0" bIns="0" rtlCol="0" anchor="ctr"/>
-          <a:lstStyle/>
-          <a:p>
-            <a:pPr algn="ctr" indent="0" marL="0">
-              <a:buNone/>
-            </a:pPr>
-            <a:r>
-              <a:rPr lang="en-US" sz="1400" b="1" dirty="0">
-                <a:solidFill>
-                  <a:srgbClr val="0D9488"/>
+              <a:srgbClr val="DB2777"/>
+            </a:solidFill>
+            <a:prstDash val="solid"/>
+          </a:ln>
+        </p:spPr>
+      </p:sp>
+      <p:sp>
+        <p:nvSpPr>
+          <p:cNvPr id="43" name="Text 41"/>
+          <p:cNvSpPr/>
+          <p:nvPr/>
+        </p:nvSpPr>
+        <p:spPr>
+          <a:xfrm>
+            <a:off x="1951330" y="4169664"/>
+            <a:ext cx="676656" cy="384048"/>
+          </a:xfrm>
+          <a:prstGeom prst="rect">
+            <a:avLst/>
+          </a:prstGeom>
+          <a:noFill/>
+          <a:ln/>
+        </p:spPr>
+        <p:txBody>
+          <a:bodyPr wrap="square" lIns="0" tIns="0" rIns="0" bIns="0" rtlCol="0" anchor="ctr"/>
+          <a:lstStyle/>
+          <a:p>
+            <a:pPr algn="ctr" indent="0" marL="0">
+              <a:buNone/>
+            </a:pPr>
+            <a:r>
+              <a:rPr lang="en-US" sz="900" b="1" dirty="0">
+                <a:solidFill>
+                  <a:srgbClr val="9D174D"/>
                 </a:solidFill>
                 <a:latin typeface="Trebuchet MS" pitchFamily="34" charset="0"/>
                 <a:ea typeface="Trebuchet MS" pitchFamily="34" charset="-122"/>
                 <a:cs typeface="Trebuchet MS" pitchFamily="34" charset="-120"/>
               </a:rPr>
-              <a:t>lous</a:t>
-            </a:r>
-            <a:endParaRPr lang="en-US" sz="1400" dirty="0"/>
-          </a:p>
-        </p:txBody>
-      </p:sp>
-      <p:sp>
-        <p:nvSpPr>
-          <p:cNvPr id="39" name="Shape 37"/>
-          <p:cNvSpPr/>
-          <p:nvPr/>
-        </p:nvSpPr>
-        <p:spPr>
-          <a:xfrm>
-            <a:off x="365760" y="4096512"/>
-            <a:ext cx="1371600" cy="804672"/>
+              <a:t>c</a:t>
+            </a:r>
+            <a:endParaRPr lang="en-US" sz="900" dirty="0"/>
+          </a:p>
+        </p:txBody>
+      </p:sp>
+      <p:sp>
+        <p:nvSpPr>
+          <p:cNvPr id="44" name="Text 42"/>
+          <p:cNvSpPr/>
+          <p:nvPr/>
+        </p:nvSpPr>
+        <p:spPr>
+          <a:xfrm>
+            <a:off x="1951330" y="4572000"/>
+            <a:ext cx="676656" cy="219456"/>
+          </a:xfrm>
+          <a:prstGeom prst="rect">
+            <a:avLst/>
+          </a:prstGeom>
+          <a:noFill/>
+          <a:ln/>
+        </p:spPr>
+        <p:txBody>
+          <a:bodyPr wrap="square" lIns="0" tIns="0" rIns="0" bIns="0" rtlCol="0" anchor="t"/>
+          <a:lstStyle/>
+          <a:p>
+            <a:pPr algn="ctr" indent="0" marL="0">
+              <a:buNone/>
+            </a:pPr>
+            <a:r>
+              <a:rPr lang="en-US" sz="750" i="1" dirty="0">
+                <a:solidFill>
+                  <a:srgbClr val="94A3B8"/>
+                </a:solidFill>
+                <a:latin typeface="Calibri" pitchFamily="34" charset="0"/>
+                <a:ea typeface="Calibri" pitchFamily="34" charset="-122"/>
+                <a:cs typeface="Calibri" pitchFamily="34" charset="-120"/>
+              </a:rPr>
+              <a:t>/k/</a:t>
+            </a:r>
+            <a:endParaRPr lang="en-US" sz="750" dirty="0"/>
+          </a:p>
+        </p:txBody>
+      </p:sp>
+      <p:sp>
+        <p:nvSpPr>
+          <p:cNvPr id="45" name="Shape 43"/>
+          <p:cNvSpPr/>
+          <p:nvPr/>
+        </p:nvSpPr>
+        <p:spPr>
+          <a:xfrm>
+            <a:off x="2677363" y="4169664"/>
+            <a:ext cx="676656" cy="384048"/>
           </a:xfrm>
           <a:prstGeom prst="rect">
             <a:avLst>
-              <a:gd name="adj" fmla="val 6818"/>
+              <a:gd name="adj" fmla="val 9524"/>
             </a:avLst>
           </a:prstGeom>
           <a:solidFill>
-            <a:srgbClr val="E2E8F0"/>
-          </a:solidFill>
-          <a:ln w="12700">
-            <a:solidFill>
-              <a:srgbClr val="E2E8F0"/>
-            </a:solidFill>
-            <a:prstDash val="solid"/>
-          </a:ln>
-        </p:spPr>
-      </p:sp>
-      <p:sp>
-        <p:nvSpPr>
-          <p:cNvPr id="40" name="Text 38"/>
-          <p:cNvSpPr/>
-          <p:nvPr/>
-        </p:nvSpPr>
-        <p:spPr>
-          <a:xfrm>
-            <a:off x="365760" y="4096512"/>
-            <a:ext cx="1371600" cy="804672"/>
-          </a:xfrm>
-          <a:prstGeom prst="rect">
-            <a:avLst/>
-          </a:prstGeom>
-          <a:noFill/>
-          <a:ln/>
-        </p:spPr>
-        <p:txBody>
-          <a:bodyPr wrap="square" lIns="0" tIns="0" rIns="0" bIns="0" rtlCol="0" anchor="ctr"/>
-          <a:lstStyle/>
-          <a:p>
-            <a:pPr algn="ctr" indent="0" marL="0">
-              <a:buNone/>
-            </a:pPr>
-            <a:r>
-              <a:rPr lang="en-US" sz="1100" b="1" dirty="0">
-                <a:solidFill>
-                  <a:srgbClr val="475569"/>
+            <a:srgbClr val="FFFFFF"/>
+          </a:solidFill>
+          <a:ln w="12700">
+            <a:solidFill>
+              <a:srgbClr val="DB2777"/>
+            </a:solidFill>
+            <a:prstDash val="solid"/>
+          </a:ln>
+        </p:spPr>
+      </p:sp>
+      <p:sp>
+        <p:nvSpPr>
+          <p:cNvPr id="46" name="Text 44"/>
+          <p:cNvSpPr/>
+          <p:nvPr/>
+        </p:nvSpPr>
+        <p:spPr>
+          <a:xfrm>
+            <a:off x="2677363" y="4169664"/>
+            <a:ext cx="676656" cy="384048"/>
+          </a:xfrm>
+          <a:prstGeom prst="rect">
+            <a:avLst/>
+          </a:prstGeom>
+          <a:noFill/>
+          <a:ln/>
+        </p:spPr>
+        <p:txBody>
+          <a:bodyPr wrap="square" lIns="0" tIns="0" rIns="0" bIns="0" rtlCol="0" anchor="ctr"/>
+          <a:lstStyle/>
+          <a:p>
+            <a:pPr algn="ctr" indent="0" marL="0">
+              <a:buNone/>
+            </a:pPr>
+            <a:r>
+              <a:rPr lang="en-US" sz="900" b="1" dirty="0">
+                <a:solidFill>
+                  <a:srgbClr val="9D174D"/>
                 </a:solidFill>
                 <a:latin typeface="Trebuchet MS" pitchFamily="34" charset="0"/>
                 <a:ea typeface="Trebuchet MS" pitchFamily="34" charset="-122"/>
                 <a:cs typeface="Trebuchet MS" pitchFamily="34" charset="-120"/>
               </a:rPr>
-              <a:t>Phonemes</a:t>
-            </a:r>
-            <a:endParaRPr lang="en-US" sz="1100" dirty="0"/>
-          </a:p>
-        </p:txBody>
-      </p:sp>
-      <p:sp>
-        <p:nvSpPr>
-          <p:cNvPr id="41" name="Shape 39"/>
-          <p:cNvSpPr/>
-          <p:nvPr/>
-        </p:nvSpPr>
-        <p:spPr>
-          <a:xfrm>
-            <a:off x="1874520" y="4096512"/>
-            <a:ext cx="6903720" cy="658368"/>
+              <a:t>r</a:t>
+            </a:r>
+            <a:endParaRPr lang="en-US" sz="900" dirty="0"/>
+          </a:p>
+        </p:txBody>
+      </p:sp>
+      <p:sp>
+        <p:nvSpPr>
+          <p:cNvPr id="47" name="Shape 45"/>
+          <p:cNvSpPr/>
+          <p:nvPr/>
+        </p:nvSpPr>
+        <p:spPr>
+          <a:xfrm>
+            <a:off x="3403397" y="4169664"/>
+            <a:ext cx="676656" cy="384048"/>
           </a:xfrm>
           <a:prstGeom prst="rect">
             <a:avLst>
-              <a:gd name="adj" fmla="val 8333"/>
+              <a:gd name="adj" fmla="val 9524"/>
             </a:avLst>
           </a:prstGeom>
           <a:solidFill>
-            <a:srgbClr val="FCE7F3"/>
+            <a:srgbClr val="FFFFFF"/>
           </a:solidFill>
           <a:ln w="12700">
             <a:solidFill>
@@ -23233,41 +23557,14 @@
       </p:sp>
       <p:sp>
         <p:nvSpPr>
-          <p:cNvPr id="42" name="Shape 40"/>
-          <p:cNvSpPr/>
-          <p:nvPr/>
-        </p:nvSpPr>
-        <p:spPr>
-          <a:xfrm>
-            <a:off x="1951330" y="4169664"/>
-            <a:ext cx="676656" cy="475488"/>
-          </a:xfrm>
-          <a:prstGeom prst="rect">
-            <a:avLst>
-              <a:gd name="adj" fmla="val 7692"/>
-            </a:avLst>
-          </a:prstGeom>
-          <a:solidFill>
-            <a:srgbClr val="FFFFFF"/>
-          </a:solidFill>
-          <a:ln w="12700">
-            <a:solidFill>
-              <a:srgbClr val="DB2777"/>
-            </a:solidFill>
-            <a:prstDash val="solid"/>
-          </a:ln>
-        </p:spPr>
-      </p:sp>
-      <p:sp>
-        <p:nvSpPr>
-          <p:cNvPr id="43" name="Text 41"/>
-          <p:cNvSpPr/>
-          <p:nvPr/>
-        </p:nvSpPr>
-        <p:spPr>
-          <a:xfrm>
-            <a:off x="1951330" y="4169664"/>
-            <a:ext cx="676656" cy="475488"/>
+          <p:cNvPr id="48" name="Text 46"/>
+          <p:cNvSpPr/>
+          <p:nvPr/>
+        </p:nvSpPr>
+        <p:spPr>
+          <a:xfrm>
+            <a:off x="3403397" y="4169664"/>
+            <a:ext cx="676656" cy="384048"/>
           </a:xfrm>
           <a:prstGeom prst="rect">
             <a:avLst/>
@@ -23291,7 +23588,7 @@
                 <a:ea typeface="Trebuchet MS" pitchFamily="34" charset="-122"/>
                 <a:cs typeface="Trebuchet MS" pitchFamily="34" charset="-120"/>
               </a:rPr>
-              <a:t>i</a:t>
+              <a:t>e</a:t>
             </a:r>
             <a:endParaRPr lang="en-US" sz="900" dirty="0"/>
           </a:p>
@@ -23299,18 +23596,18 @@
       </p:sp>
       <p:sp>
         <p:nvSpPr>
-          <p:cNvPr id="44" name="Shape 42"/>
-          <p:cNvSpPr/>
-          <p:nvPr/>
-        </p:nvSpPr>
-        <p:spPr>
-          <a:xfrm>
-            <a:off x="2677363" y="4169664"/>
-            <a:ext cx="676656" cy="475488"/>
+          <p:cNvPr id="49" name="Shape 47"/>
+          <p:cNvSpPr/>
+          <p:nvPr/>
+        </p:nvSpPr>
+        <p:spPr>
+          <a:xfrm>
+            <a:off x="4129430" y="4169664"/>
+            <a:ext cx="676656" cy="384048"/>
           </a:xfrm>
           <a:prstGeom prst="rect">
             <a:avLst>
-              <a:gd name="adj" fmla="val 7692"/>
+              <a:gd name="adj" fmla="val 9524"/>
             </a:avLst>
           </a:prstGeom>
           <a:solidFill>
@@ -23326,14 +23623,14 @@
       </p:sp>
       <p:sp>
         <p:nvSpPr>
-          <p:cNvPr id="45" name="Text 43"/>
-          <p:cNvSpPr/>
-          <p:nvPr/>
-        </p:nvSpPr>
-        <p:spPr>
-          <a:xfrm>
-            <a:off x="2677363" y="4169664"/>
-            <a:ext cx="676656" cy="475488"/>
+          <p:cNvPr id="50" name="Text 48"/>
+          <p:cNvSpPr/>
+          <p:nvPr/>
+        </p:nvSpPr>
+        <p:spPr>
+          <a:xfrm>
+            <a:off x="4129430" y="4169664"/>
+            <a:ext cx="676656" cy="384048"/>
           </a:xfrm>
           <a:prstGeom prst="rect">
             <a:avLst/>
@@ -23357,7 +23654,7 @@
                 <a:ea typeface="Trebuchet MS" pitchFamily="34" charset="-122"/>
                 <a:cs typeface="Trebuchet MS" pitchFamily="34" charset="-120"/>
               </a:rPr>
-              <a:t>n</a:t>
+              <a:t>d</a:t>
             </a:r>
             <a:endParaRPr lang="en-US" sz="900" dirty="0"/>
           </a:p>
@@ -23365,18 +23662,18 @@
       </p:sp>
       <p:sp>
         <p:nvSpPr>
-          <p:cNvPr id="46" name="Shape 44"/>
-          <p:cNvSpPr/>
-          <p:nvPr/>
-        </p:nvSpPr>
-        <p:spPr>
-          <a:xfrm>
-            <a:off x="3403397" y="4169664"/>
-            <a:ext cx="676656" cy="475488"/>
+          <p:cNvPr id="51" name="Shape 49"/>
+          <p:cNvSpPr/>
+          <p:nvPr/>
+        </p:nvSpPr>
+        <p:spPr>
+          <a:xfrm>
+            <a:off x="4855464" y="4169664"/>
+            <a:ext cx="676656" cy="384048"/>
           </a:xfrm>
           <a:prstGeom prst="rect">
             <a:avLst>
-              <a:gd name="adj" fmla="val 7692"/>
+              <a:gd name="adj" fmla="val 9524"/>
             </a:avLst>
           </a:prstGeom>
           <a:solidFill>
@@ -23392,14 +23689,14 @@
       </p:sp>
       <p:sp>
         <p:nvSpPr>
-          <p:cNvPr id="47" name="Text 45"/>
-          <p:cNvSpPr/>
-          <p:nvPr/>
-        </p:nvSpPr>
-        <p:spPr>
-          <a:xfrm>
-            <a:off x="3403397" y="4169664"/>
-            <a:ext cx="676656" cy="475488"/>
+          <p:cNvPr id="52" name="Text 50"/>
+          <p:cNvSpPr/>
+          <p:nvPr/>
+        </p:nvSpPr>
+        <p:spPr>
+          <a:xfrm>
+            <a:off x="4855464" y="4169664"/>
+            <a:ext cx="676656" cy="384048"/>
           </a:xfrm>
           <a:prstGeom prst="rect">
             <a:avLst/>
@@ -23423,7 +23720,7 @@
                 <a:ea typeface="Trebuchet MS" pitchFamily="34" charset="-122"/>
                 <a:cs typeface="Trebuchet MS" pitchFamily="34" charset="-120"/>
               </a:rPr>
-              <a:t>cr</a:t>
+              <a:t>en</a:t>
             </a:r>
             <a:endParaRPr lang="en-US" sz="900" dirty="0"/>
           </a:p>
@@ -23431,18 +23728,18 @@
       </p:sp>
       <p:sp>
         <p:nvSpPr>
-          <p:cNvPr id="48" name="Shape 46"/>
-          <p:cNvSpPr/>
-          <p:nvPr/>
-        </p:nvSpPr>
-        <p:spPr>
-          <a:xfrm>
-            <a:off x="4129430" y="4169664"/>
-            <a:ext cx="676656" cy="475488"/>
+          <p:cNvPr id="53" name="Shape 51"/>
+          <p:cNvSpPr/>
+          <p:nvPr/>
+        </p:nvSpPr>
+        <p:spPr>
+          <a:xfrm>
+            <a:off x="5581498" y="4169664"/>
+            <a:ext cx="676656" cy="384048"/>
           </a:xfrm>
           <a:prstGeom prst="rect">
             <a:avLst>
-              <a:gd name="adj" fmla="val 7692"/>
+              <a:gd name="adj" fmla="val 9524"/>
             </a:avLst>
           </a:prstGeom>
           <a:solidFill>
@@ -23458,14 +23755,14 @@
       </p:sp>
       <p:sp>
         <p:nvSpPr>
-          <p:cNvPr id="49" name="Text 47"/>
-          <p:cNvSpPr/>
-          <p:nvPr/>
-        </p:nvSpPr>
-        <p:spPr>
-          <a:xfrm>
-            <a:off x="4129430" y="4169664"/>
-            <a:ext cx="676656" cy="475488"/>
+          <p:cNvPr id="54" name="Text 52"/>
+          <p:cNvSpPr/>
+          <p:nvPr/>
+        </p:nvSpPr>
+        <p:spPr>
+          <a:xfrm>
+            <a:off x="5581498" y="4169664"/>
+            <a:ext cx="676656" cy="384048"/>
           </a:xfrm>
           <a:prstGeom prst="rect">
             <a:avLst/>
@@ -23489,7 +23786,7 @@
                 <a:ea typeface="Trebuchet MS" pitchFamily="34" charset="-122"/>
                 <a:cs typeface="Trebuchet MS" pitchFamily="34" charset="-120"/>
               </a:rPr>
-              <a:t>e</a:t>
+              <a:t>t</a:t>
             </a:r>
             <a:endParaRPr lang="en-US" sz="900" dirty="0"/>
           </a:p>
@@ -23497,18 +23794,18 @@
       </p:sp>
       <p:sp>
         <p:nvSpPr>
-          <p:cNvPr id="50" name="Shape 48"/>
-          <p:cNvSpPr/>
-          <p:nvPr/>
-        </p:nvSpPr>
-        <p:spPr>
-          <a:xfrm>
-            <a:off x="4855464" y="4169664"/>
-            <a:ext cx="676656" cy="475488"/>
+          <p:cNvPr id="55" name="Shape 53"/>
+          <p:cNvSpPr/>
+          <p:nvPr/>
+        </p:nvSpPr>
+        <p:spPr>
+          <a:xfrm>
+            <a:off x="6307531" y="4169664"/>
+            <a:ext cx="676656" cy="384048"/>
           </a:xfrm>
           <a:prstGeom prst="rect">
             <a:avLst>
-              <a:gd name="adj" fmla="val 7692"/>
+              <a:gd name="adj" fmla="val 9524"/>
             </a:avLst>
           </a:prstGeom>
           <a:solidFill>
@@ -23524,14 +23821,14 @@
       </p:sp>
       <p:sp>
         <p:nvSpPr>
-          <p:cNvPr id="51" name="Text 49"/>
-          <p:cNvSpPr/>
-          <p:nvPr/>
-        </p:nvSpPr>
-        <p:spPr>
-          <a:xfrm>
-            <a:off x="4855464" y="4169664"/>
-            <a:ext cx="676656" cy="475488"/>
+          <p:cNvPr id="56" name="Text 54"/>
+          <p:cNvSpPr/>
+          <p:nvPr/>
+        </p:nvSpPr>
+        <p:spPr>
+          <a:xfrm>
+            <a:off x="6307531" y="4169664"/>
+            <a:ext cx="676656" cy="384048"/>
           </a:xfrm>
           <a:prstGeom prst="rect">
             <a:avLst/>
@@ -23555,7 +23852,7 @@
                 <a:ea typeface="Trebuchet MS" pitchFamily="34" charset="-122"/>
                 <a:cs typeface="Trebuchet MS" pitchFamily="34" charset="-120"/>
               </a:rPr>
-              <a:t>d</a:t>
+              <a:t>ia</a:t>
             </a:r>
             <a:endParaRPr lang="en-US" sz="900" dirty="0"/>
           </a:p>
@@ -23563,18 +23860,57 @@
       </p:sp>
       <p:sp>
         <p:nvSpPr>
-          <p:cNvPr id="52" name="Shape 50"/>
-          <p:cNvSpPr/>
-          <p:nvPr/>
-        </p:nvSpPr>
-        <p:spPr>
-          <a:xfrm>
-            <a:off x="5581498" y="4169664"/>
-            <a:ext cx="676656" cy="475488"/>
+          <p:cNvPr id="57" name="Text 55"/>
+          <p:cNvSpPr/>
+          <p:nvPr/>
+        </p:nvSpPr>
+        <p:spPr>
+          <a:xfrm>
+            <a:off x="6307531" y="4572000"/>
+            <a:ext cx="676656" cy="219456"/>
+          </a:xfrm>
+          <a:prstGeom prst="rect">
+            <a:avLst/>
+          </a:prstGeom>
+          <a:noFill/>
+          <a:ln/>
+        </p:spPr>
+        <p:txBody>
+          <a:bodyPr wrap="square" lIns="0" tIns="0" rIns="0" bIns="0" rtlCol="0" anchor="t"/>
+          <a:lstStyle/>
+          <a:p>
+            <a:pPr algn="ctr" indent="0" marL="0">
+              <a:buNone/>
+            </a:pPr>
+            <a:r>
+              <a:rPr lang="en-US" sz="750" i="1" dirty="0">
+                <a:solidFill>
+                  <a:srgbClr val="94A3B8"/>
+                </a:solidFill>
+                <a:latin typeface="Calibri" pitchFamily="34" charset="0"/>
+                <a:ea typeface="Calibri" pitchFamily="34" charset="-122"/>
+                <a:cs typeface="Calibri" pitchFamily="34" charset="-120"/>
+              </a:rPr>
+              <a:t>/sh/</a:t>
+            </a:r>
+            <a:endParaRPr lang="en-US" sz="750" dirty="0"/>
+          </a:p>
+        </p:txBody>
+      </p:sp>
+      <p:sp>
+        <p:nvSpPr>
+          <p:cNvPr id="58" name="Shape 56"/>
+          <p:cNvSpPr/>
+          <p:nvPr/>
+        </p:nvSpPr>
+        <p:spPr>
+          <a:xfrm>
+            <a:off x="7033565" y="4169664"/>
+            <a:ext cx="676656" cy="384048"/>
           </a:xfrm>
           <a:prstGeom prst="rect">
             <a:avLst>
-              <a:gd name="adj" fmla="val 7692"/>
+              <a:gd name="adj" fmla="val 9524"/>
             </a:avLst>
           </a:prstGeom>
           <a:solidFill>
@@ -23590,14 +23926,14 @@
       </p:sp>
       <p:sp>
         <p:nvSpPr>
-          <p:cNvPr id="53" name="Text 51"/>
-          <p:cNvSpPr/>
-          <p:nvPr/>
-        </p:nvSpPr>
-        <p:spPr>
-          <a:xfrm>
-            <a:off x="5581498" y="4169664"/>
-            <a:ext cx="676656" cy="475488"/>
+          <p:cNvPr id="59" name="Text 57"/>
+          <p:cNvSpPr/>
+          <p:nvPr/>
+        </p:nvSpPr>
+        <p:spPr>
+          <a:xfrm>
+            <a:off x="7033565" y="4169664"/>
+            <a:ext cx="676656" cy="384048"/>
           </a:xfrm>
           <a:prstGeom prst="rect">
             <a:avLst/>
@@ -23621,7 +23957,7 @@
                 <a:ea typeface="Trebuchet MS" pitchFamily="34" charset="-122"/>
                 <a:cs typeface="Trebuchet MS" pitchFamily="34" charset="-120"/>
               </a:rPr>
-              <a:t>u</a:t>
+              <a:t>l</a:t>
             </a:r>
             <a:endParaRPr lang="en-US" sz="900" dirty="0"/>
           </a:p>
@@ -23629,18 +23965,18 @@
       </p:sp>
       <p:sp>
         <p:nvSpPr>
-          <p:cNvPr id="54" name="Shape 52"/>
-          <p:cNvSpPr/>
-          <p:nvPr/>
-        </p:nvSpPr>
-        <p:spPr>
-          <a:xfrm>
-            <a:off x="6307531" y="4169664"/>
-            <a:ext cx="676656" cy="475488"/>
+          <p:cNvPr id="60" name="Shape 58"/>
+          <p:cNvSpPr/>
+          <p:nvPr/>
+        </p:nvSpPr>
+        <p:spPr>
+          <a:xfrm>
+            <a:off x="7759598" y="4169664"/>
+            <a:ext cx="676656" cy="384048"/>
           </a:xfrm>
           <a:prstGeom prst="rect">
             <a:avLst>
-              <a:gd name="adj" fmla="val 7692"/>
+              <a:gd name="adj" fmla="val 9524"/>
             </a:avLst>
           </a:prstGeom>
           <a:solidFill>
@@ -23656,146 +23992,14 @@
       </p:sp>
       <p:sp>
         <p:nvSpPr>
-          <p:cNvPr id="55" name="Text 53"/>
-          <p:cNvSpPr/>
-          <p:nvPr/>
-        </p:nvSpPr>
-        <p:spPr>
-          <a:xfrm>
-            <a:off x="6307531" y="4169664"/>
-            <a:ext cx="676656" cy="475488"/>
-          </a:xfrm>
-          <a:prstGeom prst="rect">
-            <a:avLst/>
-          </a:prstGeom>
-          <a:noFill/>
-          <a:ln/>
-        </p:spPr>
-        <p:txBody>
-          <a:bodyPr wrap="square" lIns="0" tIns="0" rIns="0" bIns="0" rtlCol="0" anchor="ctr"/>
-          <a:lstStyle/>
-          <a:p>
-            <a:pPr algn="ctr" indent="0" marL="0">
-              <a:buNone/>
-            </a:pPr>
-            <a:r>
-              <a:rPr lang="en-US" sz="900" b="1" dirty="0">
-                <a:solidFill>
-                  <a:srgbClr val="9D174D"/>
-                </a:solidFill>
-                <a:latin typeface="Trebuchet MS" pitchFamily="34" charset="0"/>
-                <a:ea typeface="Trebuchet MS" pitchFamily="34" charset="-122"/>
-                <a:cs typeface="Trebuchet MS" pitchFamily="34" charset="-120"/>
-              </a:rPr>
-              <a:t>l</a:t>
-            </a:r>
-            <a:endParaRPr lang="en-US" sz="900" dirty="0"/>
-          </a:p>
-        </p:txBody>
-      </p:sp>
-      <p:sp>
-        <p:nvSpPr>
-          <p:cNvPr id="56" name="Shape 54"/>
-          <p:cNvSpPr/>
-          <p:nvPr/>
-        </p:nvSpPr>
-        <p:spPr>
-          <a:xfrm>
-            <a:off x="7033565" y="4169664"/>
-            <a:ext cx="676656" cy="475488"/>
-          </a:xfrm>
-          <a:prstGeom prst="rect">
-            <a:avLst>
-              <a:gd name="adj" fmla="val 7692"/>
-            </a:avLst>
-          </a:prstGeom>
-          <a:solidFill>
-            <a:srgbClr val="FFFFFF"/>
-          </a:solidFill>
-          <a:ln w="12700">
-            <a:solidFill>
-              <a:srgbClr val="DB2777"/>
-            </a:solidFill>
-            <a:prstDash val="solid"/>
-          </a:ln>
-        </p:spPr>
-      </p:sp>
-      <p:sp>
-        <p:nvSpPr>
-          <p:cNvPr id="57" name="Text 55"/>
-          <p:cNvSpPr/>
-          <p:nvPr/>
-        </p:nvSpPr>
-        <p:spPr>
-          <a:xfrm>
-            <a:off x="7033565" y="4169664"/>
-            <a:ext cx="676656" cy="475488"/>
-          </a:xfrm>
-          <a:prstGeom prst="rect">
-            <a:avLst/>
-          </a:prstGeom>
-          <a:noFill/>
-          <a:ln/>
-        </p:spPr>
-        <p:txBody>
-          <a:bodyPr wrap="square" lIns="0" tIns="0" rIns="0" bIns="0" rtlCol="0" anchor="ctr"/>
-          <a:lstStyle/>
-          <a:p>
-            <a:pPr algn="ctr" indent="0" marL="0">
-              <a:buNone/>
-            </a:pPr>
-            <a:r>
-              <a:rPr lang="en-US" sz="900" b="1" dirty="0">
-                <a:solidFill>
-                  <a:srgbClr val="9D174D"/>
-                </a:solidFill>
-                <a:latin typeface="Trebuchet MS" pitchFamily="34" charset="0"/>
-                <a:ea typeface="Trebuchet MS" pitchFamily="34" charset="-122"/>
-                <a:cs typeface="Trebuchet MS" pitchFamily="34" charset="-120"/>
-              </a:rPr>
-              <a:t>ou</a:t>
-            </a:r>
-            <a:endParaRPr lang="en-US" sz="900" dirty="0"/>
-          </a:p>
-        </p:txBody>
-      </p:sp>
-      <p:sp>
-        <p:nvSpPr>
-          <p:cNvPr id="58" name="Shape 56"/>
+          <p:cNvPr id="61" name="Text 59"/>
           <p:cNvSpPr/>
           <p:nvPr/>
         </p:nvSpPr>
         <p:spPr>
           <a:xfrm>
             <a:off x="7759598" y="4169664"/>
-            <a:ext cx="676656" cy="475488"/>
-          </a:xfrm>
-          <a:prstGeom prst="rect">
-            <a:avLst>
-              <a:gd name="adj" fmla="val 7692"/>
-            </a:avLst>
-          </a:prstGeom>
-          <a:solidFill>
-            <a:srgbClr val="FFFFFF"/>
-          </a:solidFill>
-          <a:ln w="12700">
-            <a:solidFill>
-              <a:srgbClr val="DB2777"/>
-            </a:solidFill>
-            <a:prstDash val="solid"/>
-          </a:ln>
-        </p:spPr>
-      </p:sp>
-      <p:sp>
-        <p:nvSpPr>
-          <p:cNvPr id="59" name="Text 57"/>
-          <p:cNvSpPr/>
-          <p:nvPr/>
-        </p:nvSpPr>
-        <p:spPr>
-          <a:xfrm>
-            <a:off x="7759598" y="4169664"/>
-            <a:ext cx="676656" cy="475488"/>
+            <a:ext cx="676656" cy="384048"/>
           </a:xfrm>
           <a:prstGeom prst="rect">
             <a:avLst/>
@@ -24250,7 +24454,7 @@
                 <a:ea typeface="Trebuchet MS" pitchFamily="34" charset="-122"/>
                 <a:cs typeface="Trebuchet MS" pitchFamily="34" charset="-120"/>
               </a:rPr>
-              <a:t>discredit</a:t>
+              <a:t>incredible</a:t>
             </a:r>
             <a:endParaRPr lang="en-US" sz="2800" dirty="0"/>
           </a:p>
@@ -25077,7 +25281,7 @@
                 <a:ea typeface="Trebuchet MS" pitchFamily="34" charset="-122"/>
                 <a:cs typeface="Trebuchet MS" pitchFamily="34" charset="-120"/>
               </a:rPr>
-              <a:t>discredit</a:t>
+              <a:t>incredible</a:t>
             </a:r>
             <a:endParaRPr lang="en-US" sz="2800" dirty="0"/>
           </a:p>
@@ -25216,7 +25420,7 @@
                 <a:ea typeface="Trebuchet MS" pitchFamily="34" charset="-122"/>
                 <a:cs typeface="Trebuchet MS" pitchFamily="34" charset="-120"/>
               </a:rPr>
-              <a:t>dis</a:t>
+              <a:t>in</a:t>
             </a:r>
             <a:endParaRPr lang="en-US" sz="1300" dirty="0"/>
           </a:p>
@@ -25255,7 +25459,7 @@
                 <a:ea typeface="Calibri" pitchFamily="34" charset="-122"/>
                 <a:cs typeface="Calibri" pitchFamily="34" charset="-120"/>
               </a:rPr>
-              <a:t>not, opposite of</a:t>
+              <a:t>not</a:t>
             </a:r>
             <a:endParaRPr lang="en-US" sz="850" dirty="0"/>
           </a:p>
@@ -25440,7 +25644,7 @@
                 <a:ea typeface="Trebuchet MS" pitchFamily="34" charset="-122"/>
                 <a:cs typeface="Trebuchet MS" pitchFamily="34" charset="-120"/>
               </a:rPr>
-              <a:t>it</a:t>
+              <a:t>ible</a:t>
             </a:r>
             <a:endParaRPr lang="en-US" sz="1300" dirty="0"/>
           </a:p>
@@ -25479,7 +25683,7 @@
                 <a:ea typeface="Calibri" pitchFamily="34" charset="-122"/>
                 <a:cs typeface="Calibri" pitchFamily="34" charset="-120"/>
               </a:rPr>
-              <a:t>result or act of</a:t>
+              <a:t>able to be</a:t>
             </a:r>
             <a:endParaRPr lang="en-US" sz="850" dirty="0"/>
           </a:p>
@@ -26893,7 +27097,7 @@
                 <a:ea typeface="Trebuchet MS" pitchFamily="34" charset="-122"/>
                 <a:cs typeface="Trebuchet MS" pitchFamily="34" charset="-120"/>
               </a:rPr>
-              <a:t>discredit</a:t>
+              <a:t>incredible</a:t>
             </a:r>
             <a:endParaRPr lang="en-US" sz="2800" dirty="0"/>
           </a:p>
@@ -27032,7 +27236,7 @@
                 <a:ea typeface="Trebuchet MS" pitchFamily="34" charset="-122"/>
                 <a:cs typeface="Trebuchet MS" pitchFamily="34" charset="-120"/>
               </a:rPr>
-              <a:t>dis</a:t>
+              <a:t>in</a:t>
             </a:r>
             <a:endParaRPr lang="en-US" sz="1300" dirty="0"/>
           </a:p>
@@ -27071,7 +27275,7 @@
                 <a:ea typeface="Calibri" pitchFamily="34" charset="-122"/>
                 <a:cs typeface="Calibri" pitchFamily="34" charset="-120"/>
               </a:rPr>
-              <a:t>not, opposite of</a:t>
+              <a:t>not</a:t>
             </a:r>
             <a:endParaRPr lang="en-US" sz="850" dirty="0"/>
           </a:p>
@@ -27256,7 +27460,7 @@
                 <a:ea typeface="Trebuchet MS" pitchFamily="34" charset="-122"/>
                 <a:cs typeface="Trebuchet MS" pitchFamily="34" charset="-120"/>
               </a:rPr>
-              <a:t>it</a:t>
+              <a:t>ible</a:t>
             </a:r>
             <a:endParaRPr lang="en-US" sz="1300" dirty="0"/>
           </a:p>
@@ -27295,7 +27499,7 @@
                 <a:ea typeface="Calibri" pitchFamily="34" charset="-122"/>
                 <a:cs typeface="Calibri" pitchFamily="34" charset="-120"/>
               </a:rPr>
-              <a:t>result or act of</a:t>
+              <a:t>able to be</a:t>
             </a:r>
             <a:endParaRPr lang="en-US" sz="850" dirty="0"/>
           </a:p>
@@ -27402,8 +27606,8 @@
         </p:nvSpPr>
         <p:spPr>
           <a:xfrm>
-            <a:off x="2313432" y="3364992"/>
-            <a:ext cx="1645920" cy="475488"/>
+            <a:off x="1975104" y="3364992"/>
+            <a:ext cx="1554480" cy="475488"/>
           </a:xfrm>
           <a:prstGeom prst="rect">
             <a:avLst>
@@ -27429,8 +27633,8 @@
         </p:nvSpPr>
         <p:spPr>
           <a:xfrm>
-            <a:off x="2313432" y="3364992"/>
-            <a:ext cx="1645920" cy="475488"/>
+            <a:off x="1975104" y="3364992"/>
+            <a:ext cx="1554480" cy="475488"/>
           </a:xfrm>
           <a:prstGeom prst="rect">
             <a:avLst/>
@@ -27454,7 +27658,7 @@
                 <a:ea typeface="Trebuchet MS" pitchFamily="34" charset="-122"/>
                 <a:cs typeface="Trebuchet MS" pitchFamily="34" charset="-120"/>
               </a:rPr>
-              <a:t>dis</a:t>
+              <a:t>in</a:t>
             </a:r>
             <a:endParaRPr lang="en-US" sz="1400" dirty="0"/>
           </a:p>
@@ -27468,8 +27672,8 @@
         </p:nvSpPr>
         <p:spPr>
           <a:xfrm>
-            <a:off x="3959352" y="3364992"/>
-            <a:ext cx="411480" cy="475488"/>
+            <a:off x="3529584" y="3364992"/>
+            <a:ext cx="73152" cy="475488"/>
           </a:xfrm>
           <a:prstGeom prst="rect">
             <a:avLst/>
@@ -27507,8 +27711,8 @@
         </p:nvSpPr>
         <p:spPr>
           <a:xfrm>
-            <a:off x="4370832" y="3364992"/>
-            <a:ext cx="1645920" cy="475488"/>
+            <a:off x="3602736" y="3364992"/>
+            <a:ext cx="1554480" cy="475488"/>
           </a:xfrm>
           <a:prstGeom prst="rect">
             <a:avLst>
@@ -27534,8 +27738,8 @@
         </p:nvSpPr>
         <p:spPr>
           <a:xfrm>
-            <a:off x="4370832" y="3364992"/>
-            <a:ext cx="1645920" cy="475488"/>
+            <a:off x="3602736" y="3364992"/>
+            <a:ext cx="1554480" cy="475488"/>
           </a:xfrm>
           <a:prstGeom prst="rect">
             <a:avLst/>
@@ -27573,8 +27777,8 @@
         </p:nvSpPr>
         <p:spPr>
           <a:xfrm>
-            <a:off x="6016752" y="3364992"/>
-            <a:ext cx="411480" cy="475488"/>
+            <a:off x="5157216" y="3364992"/>
+            <a:ext cx="73152" cy="475488"/>
           </a:xfrm>
           <a:prstGeom prst="rect">
             <a:avLst/>
@@ -27612,8 +27816,8 @@
         </p:nvSpPr>
         <p:spPr>
           <a:xfrm>
-            <a:off x="6428232" y="3364992"/>
-            <a:ext cx="1645920" cy="475488"/>
+            <a:off x="5230368" y="3364992"/>
+            <a:ext cx="1554480" cy="475488"/>
           </a:xfrm>
           <a:prstGeom prst="rect">
             <a:avLst>
@@ -27639,8 +27843,8 @@
         </p:nvSpPr>
         <p:spPr>
           <a:xfrm>
-            <a:off x="6428232" y="3364992"/>
-            <a:ext cx="1645920" cy="475488"/>
+            <a:off x="5230368" y="3364992"/>
+            <a:ext cx="1554480" cy="475488"/>
           </a:xfrm>
           <a:prstGeom prst="rect">
             <a:avLst/>
@@ -27664,7 +27868,7 @@
                 <a:ea typeface="Trebuchet MS" pitchFamily="34" charset="-122"/>
                 <a:cs typeface="Trebuchet MS" pitchFamily="34" charset="-120"/>
               </a:rPr>
-              <a:t>it</a:t>
+              <a:t>i</a:t>
             </a:r>
             <a:endParaRPr lang="en-US" sz="1400" dirty="0"/>
           </a:p>
@@ -27672,7 +27876,112 @@
       </p:sp>
       <p:sp>
         <p:nvSpPr>
-          <p:cNvPr id="36" name="Shape 34"/>
+          <p:cNvPr id="36" name="Text 34"/>
+          <p:cNvSpPr/>
+          <p:nvPr/>
+        </p:nvSpPr>
+        <p:spPr>
+          <a:xfrm>
+            <a:off x="6784848" y="3364992"/>
+            <a:ext cx="73152" cy="475488"/>
+          </a:xfrm>
+          <a:prstGeom prst="rect">
+            <a:avLst/>
+          </a:prstGeom>
+          <a:noFill/>
+          <a:ln/>
+        </p:spPr>
+        <p:txBody>
+          <a:bodyPr wrap="square" lIns="0" tIns="0" rIns="0" bIns="0" rtlCol="0" anchor="ctr"/>
+          <a:lstStyle/>
+          <a:p>
+            <a:pPr algn="ctr" indent="0" marL="0">
+              <a:buNone/>
+            </a:pPr>
+            <a:r>
+              <a:rPr lang="en-US" sz="1600" b="1" dirty="0">
+                <a:solidFill>
+                  <a:srgbClr val="0D9488"/>
+                </a:solidFill>
+                <a:latin typeface="Trebuchet MS" pitchFamily="34" charset="0"/>
+                <a:ea typeface="Trebuchet MS" pitchFamily="34" charset="-122"/>
+                <a:cs typeface="Trebuchet MS" pitchFamily="34" charset="-120"/>
+              </a:rPr>
+              <a:t>·</a:t>
+            </a:r>
+            <a:endParaRPr lang="en-US" sz="1600" dirty="0"/>
+          </a:p>
+        </p:txBody>
+      </p:sp>
+      <p:sp>
+        <p:nvSpPr>
+          <p:cNvPr id="37" name="Shape 35"/>
+          <p:cNvSpPr/>
+          <p:nvPr/>
+        </p:nvSpPr>
+        <p:spPr>
+          <a:xfrm>
+            <a:off x="6858000" y="3364992"/>
+            <a:ext cx="1554480" cy="475488"/>
+          </a:xfrm>
+          <a:prstGeom prst="rect">
+            <a:avLst>
+              <a:gd name="adj" fmla="val 9615"/>
+            </a:avLst>
+          </a:prstGeom>
+          <a:solidFill>
+            <a:srgbClr val="FFFFFF"/>
+          </a:solidFill>
+          <a:ln w="12700">
+            <a:solidFill>
+              <a:srgbClr val="0D9488"/>
+            </a:solidFill>
+            <a:prstDash val="solid"/>
+          </a:ln>
+        </p:spPr>
+      </p:sp>
+      <p:sp>
+        <p:nvSpPr>
+          <p:cNvPr id="38" name="Text 36"/>
+          <p:cNvSpPr/>
+          <p:nvPr/>
+        </p:nvSpPr>
+        <p:spPr>
+          <a:xfrm>
+            <a:off x="6858000" y="3364992"/>
+            <a:ext cx="1554480" cy="475488"/>
+          </a:xfrm>
+          <a:prstGeom prst="rect">
+            <a:avLst/>
+          </a:prstGeom>
+          <a:noFill/>
+          <a:ln/>
+        </p:spPr>
+        <p:txBody>
+          <a:bodyPr wrap="square" lIns="0" tIns="0" rIns="0" bIns="0" rtlCol="0" anchor="ctr"/>
+          <a:lstStyle/>
+          <a:p>
+            <a:pPr algn="ctr" indent="0" marL="0">
+              <a:buNone/>
+            </a:pPr>
+            <a:r>
+              <a:rPr lang="en-US" sz="1400" b="1" dirty="0">
+                <a:solidFill>
+                  <a:srgbClr val="0D9488"/>
+                </a:solidFill>
+                <a:latin typeface="Trebuchet MS" pitchFamily="34" charset="0"/>
+                <a:ea typeface="Trebuchet MS" pitchFamily="34" charset="-122"/>
+                <a:cs typeface="Trebuchet MS" pitchFamily="34" charset="-120"/>
+              </a:rPr>
+              <a:t>ble</a:t>
+            </a:r>
+            <a:endParaRPr lang="en-US" sz="1400" dirty="0"/>
+          </a:p>
+        </p:txBody>
+      </p:sp>
+      <p:sp>
+        <p:nvSpPr>
+          <p:cNvPr id="39" name="Shape 37"/>
           <p:cNvSpPr/>
           <p:nvPr/>
         </p:nvSpPr>
@@ -27699,7 +28008,7 @@
       </p:sp>
       <p:sp>
         <p:nvSpPr>
-          <p:cNvPr id="37" name="Text 35"/>
+          <p:cNvPr id="40" name="Text 38"/>
           <p:cNvSpPr/>
           <p:nvPr/>
         </p:nvSpPr>
@@ -27738,7 +28047,7 @@
       </p:sp>
       <p:sp>
         <p:nvSpPr>
-          <p:cNvPr id="38" name="Shape 36"/>
+          <p:cNvPr id="41" name="Shape 39"/>
           <p:cNvSpPr/>
           <p:nvPr/>
         </p:nvSpPr>
@@ -27765,7 +28074,7 @@
       </p:sp>
       <p:sp>
         <p:nvSpPr>
-          <p:cNvPr id="39" name="Text 37"/>
+          <p:cNvPr id="42" name="Text 40"/>
           <p:cNvSpPr/>
           <p:nvPr/>
         </p:nvSpPr>
@@ -28227,7 +28536,7 @@
                 <a:ea typeface="Trebuchet MS" pitchFamily="34" charset="-122"/>
                 <a:cs typeface="Trebuchet MS" pitchFamily="34" charset="-120"/>
               </a:rPr>
-              <a:t>discredit</a:t>
+              <a:t>incredible</a:t>
             </a:r>
             <a:endParaRPr lang="en-US" sz="2800" dirty="0"/>
           </a:p>
@@ -28366,7 +28675,7 @@
                 <a:ea typeface="Trebuchet MS" pitchFamily="34" charset="-122"/>
                 <a:cs typeface="Trebuchet MS" pitchFamily="34" charset="-120"/>
               </a:rPr>
-              <a:t>dis</a:t>
+              <a:t>in</a:t>
             </a:r>
             <a:endParaRPr lang="en-US" sz="1300" dirty="0"/>
           </a:p>
@@ -28405,7 +28714,7 @@
                 <a:ea typeface="Calibri" pitchFamily="34" charset="-122"/>
                 <a:cs typeface="Calibri" pitchFamily="34" charset="-120"/>
               </a:rPr>
-              <a:t>not, opposite of</a:t>
+              <a:t>not</a:t>
             </a:r>
             <a:endParaRPr lang="en-US" sz="850" dirty="0"/>
           </a:p>
@@ -28590,7 +28899,7 @@
                 <a:ea typeface="Trebuchet MS" pitchFamily="34" charset="-122"/>
                 <a:cs typeface="Trebuchet MS" pitchFamily="34" charset="-120"/>
               </a:rPr>
-              <a:t>it</a:t>
+              <a:t>ible</a:t>
             </a:r>
             <a:endParaRPr lang="en-US" sz="1300" dirty="0"/>
           </a:p>
@@ -28629,7 +28938,7 @@
                 <a:ea typeface="Calibri" pitchFamily="34" charset="-122"/>
                 <a:cs typeface="Calibri" pitchFamily="34" charset="-120"/>
               </a:rPr>
-              <a:t>result or act of</a:t>
+              <a:t>able to be</a:t>
             </a:r>
             <a:endParaRPr lang="en-US" sz="850" dirty="0"/>
           </a:p>
@@ -28736,8 +29045,8 @@
         </p:nvSpPr>
         <p:spPr>
           <a:xfrm>
-            <a:off x="2313432" y="3364992"/>
-            <a:ext cx="1645920" cy="475488"/>
+            <a:off x="1975104" y="3364992"/>
+            <a:ext cx="1554480" cy="475488"/>
           </a:xfrm>
           <a:prstGeom prst="rect">
             <a:avLst>
@@ -28763,8 +29072,8 @@
         </p:nvSpPr>
         <p:spPr>
           <a:xfrm>
-            <a:off x="2313432" y="3364992"/>
-            <a:ext cx="1645920" cy="475488"/>
+            <a:off x="1975104" y="3364992"/>
+            <a:ext cx="1554480" cy="475488"/>
           </a:xfrm>
           <a:prstGeom prst="rect">
             <a:avLst/>
@@ -28788,7 +29097,7 @@
                 <a:ea typeface="Trebuchet MS" pitchFamily="34" charset="-122"/>
                 <a:cs typeface="Trebuchet MS" pitchFamily="34" charset="-120"/>
               </a:rPr>
-              <a:t>dis</a:t>
+              <a:t>in</a:t>
             </a:r>
             <a:endParaRPr lang="en-US" sz="1400" dirty="0"/>
           </a:p>
@@ -28802,8 +29111,8 @@
         </p:nvSpPr>
         <p:spPr>
           <a:xfrm>
-            <a:off x="3959352" y="3364992"/>
-            <a:ext cx="411480" cy="475488"/>
+            <a:off x="3529584" y="3364992"/>
+            <a:ext cx="73152" cy="475488"/>
           </a:xfrm>
           <a:prstGeom prst="rect">
             <a:avLst/>
@@ -28841,8 +29150,8 @@
         </p:nvSpPr>
         <p:spPr>
           <a:xfrm>
-            <a:off x="4370832" y="3364992"/>
-            <a:ext cx="1645920" cy="475488"/>
+            <a:off x="3602736" y="3364992"/>
+            <a:ext cx="1554480" cy="475488"/>
           </a:xfrm>
           <a:prstGeom prst="rect">
             <a:avLst>
@@ -28868,8 +29177,8 @@
         </p:nvSpPr>
         <p:spPr>
           <a:xfrm>
-            <a:off x="4370832" y="3364992"/>
-            <a:ext cx="1645920" cy="475488"/>
+            <a:off x="3602736" y="3364992"/>
+            <a:ext cx="1554480" cy="475488"/>
           </a:xfrm>
           <a:prstGeom prst="rect">
             <a:avLst/>
@@ -28907,8 +29216,8 @@
         </p:nvSpPr>
         <p:spPr>
           <a:xfrm>
-            <a:off x="6016752" y="3364992"/>
-            <a:ext cx="411480" cy="475488"/>
+            <a:off x="5157216" y="3364992"/>
+            <a:ext cx="73152" cy="475488"/>
           </a:xfrm>
           <a:prstGeom prst="rect">
             <a:avLst/>
@@ -28946,8 +29255,8 @@
         </p:nvSpPr>
         <p:spPr>
           <a:xfrm>
-            <a:off x="6428232" y="3364992"/>
-            <a:ext cx="1645920" cy="475488"/>
+            <a:off x="5230368" y="3364992"/>
+            <a:ext cx="1554480" cy="475488"/>
           </a:xfrm>
           <a:prstGeom prst="rect">
             <a:avLst>
@@ -28973,8 +29282,8 @@
         </p:nvSpPr>
         <p:spPr>
           <a:xfrm>
-            <a:off x="6428232" y="3364992"/>
-            <a:ext cx="1645920" cy="475488"/>
+            <a:off x="5230368" y="3364992"/>
+            <a:ext cx="1554480" cy="475488"/>
           </a:xfrm>
           <a:prstGeom prst="rect">
             <a:avLst/>
@@ -28998,7 +29307,7 @@
                 <a:ea typeface="Trebuchet MS" pitchFamily="34" charset="-122"/>
                 <a:cs typeface="Trebuchet MS" pitchFamily="34" charset="-120"/>
               </a:rPr>
-              <a:t>it</a:t>
+              <a:t>i</a:t>
             </a:r>
             <a:endParaRPr lang="en-US" sz="1400" dirty="0"/>
           </a:p>
@@ -29006,7 +29315,112 @@
       </p:sp>
       <p:sp>
         <p:nvSpPr>
-          <p:cNvPr id="36" name="Shape 34"/>
+          <p:cNvPr id="36" name="Text 34"/>
+          <p:cNvSpPr/>
+          <p:nvPr/>
+        </p:nvSpPr>
+        <p:spPr>
+          <a:xfrm>
+            <a:off x="6784848" y="3364992"/>
+            <a:ext cx="73152" cy="475488"/>
+          </a:xfrm>
+          <a:prstGeom prst="rect">
+            <a:avLst/>
+          </a:prstGeom>
+          <a:noFill/>
+          <a:ln/>
+        </p:spPr>
+        <p:txBody>
+          <a:bodyPr wrap="square" lIns="0" tIns="0" rIns="0" bIns="0" rtlCol="0" anchor="ctr"/>
+          <a:lstStyle/>
+          <a:p>
+            <a:pPr algn="ctr" indent="0" marL="0">
+              <a:buNone/>
+            </a:pPr>
+            <a:r>
+              <a:rPr lang="en-US" sz="1600" b="1" dirty="0">
+                <a:solidFill>
+                  <a:srgbClr val="0D9488"/>
+                </a:solidFill>
+                <a:latin typeface="Trebuchet MS" pitchFamily="34" charset="0"/>
+                <a:ea typeface="Trebuchet MS" pitchFamily="34" charset="-122"/>
+                <a:cs typeface="Trebuchet MS" pitchFamily="34" charset="-120"/>
+              </a:rPr>
+              <a:t>·</a:t>
+            </a:r>
+            <a:endParaRPr lang="en-US" sz="1600" dirty="0"/>
+          </a:p>
+        </p:txBody>
+      </p:sp>
+      <p:sp>
+        <p:nvSpPr>
+          <p:cNvPr id="37" name="Shape 35"/>
+          <p:cNvSpPr/>
+          <p:nvPr/>
+        </p:nvSpPr>
+        <p:spPr>
+          <a:xfrm>
+            <a:off x="6858000" y="3364992"/>
+            <a:ext cx="1554480" cy="475488"/>
+          </a:xfrm>
+          <a:prstGeom prst="rect">
+            <a:avLst>
+              <a:gd name="adj" fmla="val 9615"/>
+            </a:avLst>
+          </a:prstGeom>
+          <a:solidFill>
+            <a:srgbClr val="FFFFFF"/>
+          </a:solidFill>
+          <a:ln w="12700">
+            <a:solidFill>
+              <a:srgbClr val="0D9488"/>
+            </a:solidFill>
+            <a:prstDash val="solid"/>
+          </a:ln>
+        </p:spPr>
+      </p:sp>
+      <p:sp>
+        <p:nvSpPr>
+          <p:cNvPr id="38" name="Text 36"/>
+          <p:cNvSpPr/>
+          <p:nvPr/>
+        </p:nvSpPr>
+        <p:spPr>
+          <a:xfrm>
+            <a:off x="6858000" y="3364992"/>
+            <a:ext cx="1554480" cy="475488"/>
+          </a:xfrm>
+          <a:prstGeom prst="rect">
+            <a:avLst/>
+          </a:prstGeom>
+          <a:noFill/>
+          <a:ln/>
+        </p:spPr>
+        <p:txBody>
+          <a:bodyPr wrap="square" lIns="0" tIns="0" rIns="0" bIns="0" rtlCol="0" anchor="ctr"/>
+          <a:lstStyle/>
+          <a:p>
+            <a:pPr algn="ctr" indent="0" marL="0">
+              <a:buNone/>
+            </a:pPr>
+            <a:r>
+              <a:rPr lang="en-US" sz="1400" b="1" dirty="0">
+                <a:solidFill>
+                  <a:srgbClr val="0D9488"/>
+                </a:solidFill>
+                <a:latin typeface="Trebuchet MS" pitchFamily="34" charset="0"/>
+                <a:ea typeface="Trebuchet MS" pitchFamily="34" charset="-122"/>
+                <a:cs typeface="Trebuchet MS" pitchFamily="34" charset="-120"/>
+              </a:rPr>
+              <a:t>ble</a:t>
+            </a:r>
+            <a:endParaRPr lang="en-US" sz="1400" dirty="0"/>
+          </a:p>
+        </p:txBody>
+      </p:sp>
+      <p:sp>
+        <p:nvSpPr>
+          <p:cNvPr id="39" name="Shape 37"/>
           <p:cNvSpPr/>
           <p:nvPr/>
         </p:nvSpPr>
@@ -29033,7 +29447,7 @@
       </p:sp>
       <p:sp>
         <p:nvSpPr>
-          <p:cNvPr id="37" name="Text 35"/>
+          <p:cNvPr id="40" name="Text 38"/>
           <p:cNvSpPr/>
           <p:nvPr/>
         </p:nvSpPr>
@@ -29072,18 +29486,18 @@
       </p:sp>
       <p:sp>
         <p:nvSpPr>
-          <p:cNvPr id="38" name="Shape 36"/>
+          <p:cNvPr id="41" name="Shape 39"/>
           <p:cNvSpPr/>
           <p:nvPr/>
         </p:nvSpPr>
         <p:spPr>
           <a:xfrm>
             <a:off x="1874520" y="4096512"/>
-            <a:ext cx="6903720" cy="658368"/>
+            <a:ext cx="6903720" cy="804672"/>
           </a:xfrm>
           <a:prstGeom prst="rect">
             <a:avLst>
-              <a:gd name="adj" fmla="val 8333"/>
+              <a:gd name="adj" fmla="val 6818"/>
             </a:avLst>
           </a:prstGeom>
           <a:solidFill>
@@ -29099,18 +29513,18 @@
       </p:sp>
       <p:sp>
         <p:nvSpPr>
-          <p:cNvPr id="39" name="Shape 37"/>
-          <p:cNvSpPr/>
-          <p:nvPr/>
-        </p:nvSpPr>
-        <p:spPr>
-          <a:xfrm>
-            <a:off x="2023872" y="4169664"/>
-            <a:ext cx="685800" cy="475488"/>
+          <p:cNvPr id="42" name="Shape 40"/>
+          <p:cNvSpPr/>
+          <p:nvPr/>
+        </p:nvSpPr>
+        <p:spPr>
+          <a:xfrm>
+            <a:off x="1951330" y="4169664"/>
+            <a:ext cx="676656" cy="384048"/>
           </a:xfrm>
           <a:prstGeom prst="rect">
             <a:avLst>
-              <a:gd name="adj" fmla="val 7692"/>
+              <a:gd name="adj" fmla="val 9524"/>
             </a:avLst>
           </a:prstGeom>
           <a:solidFill>
@@ -29126,14 +29540,14 @@
       </p:sp>
       <p:sp>
         <p:nvSpPr>
-          <p:cNvPr id="40" name="Text 38"/>
-          <p:cNvSpPr/>
-          <p:nvPr/>
-        </p:nvSpPr>
-        <p:spPr>
-          <a:xfrm>
-            <a:off x="2023872" y="4169664"/>
-            <a:ext cx="685800" cy="475488"/>
+          <p:cNvPr id="43" name="Text 41"/>
+          <p:cNvSpPr/>
+          <p:nvPr/>
+        </p:nvSpPr>
+        <p:spPr>
+          <a:xfrm>
+            <a:off x="1951330" y="4169664"/>
+            <a:ext cx="676656" cy="384048"/>
           </a:xfrm>
           <a:prstGeom prst="rect">
             <a:avLst/>
@@ -29157,7 +29571,7 @@
                 <a:ea typeface="Trebuchet MS" pitchFamily="34" charset="-122"/>
                 <a:cs typeface="Trebuchet MS" pitchFamily="34" charset="-120"/>
               </a:rPr>
-              <a:t>d</a:t>
+              <a:t>i</a:t>
             </a:r>
             <a:endParaRPr lang="en-US" sz="900" dirty="0"/>
           </a:p>
@@ -29165,18 +29579,18 @@
       </p:sp>
       <p:sp>
         <p:nvSpPr>
-          <p:cNvPr id="41" name="Shape 39"/>
-          <p:cNvSpPr/>
-          <p:nvPr/>
-        </p:nvSpPr>
-        <p:spPr>
-          <a:xfrm>
-            <a:off x="2831592" y="4169664"/>
-            <a:ext cx="685800" cy="475488"/>
+          <p:cNvPr id="44" name="Shape 42"/>
+          <p:cNvSpPr/>
+          <p:nvPr/>
+        </p:nvSpPr>
+        <p:spPr>
+          <a:xfrm>
+            <a:off x="2677363" y="4169664"/>
+            <a:ext cx="676656" cy="384048"/>
           </a:xfrm>
           <a:prstGeom prst="rect">
             <a:avLst>
-              <a:gd name="adj" fmla="val 7692"/>
+              <a:gd name="adj" fmla="val 9524"/>
             </a:avLst>
           </a:prstGeom>
           <a:solidFill>
@@ -29192,14 +29606,14 @@
       </p:sp>
       <p:sp>
         <p:nvSpPr>
-          <p:cNvPr id="42" name="Text 40"/>
-          <p:cNvSpPr/>
-          <p:nvPr/>
-        </p:nvSpPr>
-        <p:spPr>
-          <a:xfrm>
-            <a:off x="2831592" y="4169664"/>
-            <a:ext cx="685800" cy="475488"/>
+          <p:cNvPr id="45" name="Text 43"/>
+          <p:cNvSpPr/>
+          <p:nvPr/>
+        </p:nvSpPr>
+        <p:spPr>
+          <a:xfrm>
+            <a:off x="2677363" y="4169664"/>
+            <a:ext cx="676656" cy="384048"/>
           </a:xfrm>
           <a:prstGeom prst="rect">
             <a:avLst/>
@@ -29223,7 +29637,7 @@
                 <a:ea typeface="Trebuchet MS" pitchFamily="34" charset="-122"/>
                 <a:cs typeface="Trebuchet MS" pitchFamily="34" charset="-120"/>
               </a:rPr>
-              <a:t>i</a:t>
+              <a:t>n</a:t>
             </a:r>
             <a:endParaRPr lang="en-US" sz="900" dirty="0"/>
           </a:p>
@@ -29231,18 +29645,18 @@
       </p:sp>
       <p:sp>
         <p:nvSpPr>
-          <p:cNvPr id="43" name="Shape 41"/>
-          <p:cNvSpPr/>
-          <p:nvPr/>
-        </p:nvSpPr>
-        <p:spPr>
-          <a:xfrm>
-            <a:off x="3639312" y="4169664"/>
-            <a:ext cx="685800" cy="475488"/>
+          <p:cNvPr id="46" name="Shape 44"/>
+          <p:cNvSpPr/>
+          <p:nvPr/>
+        </p:nvSpPr>
+        <p:spPr>
+          <a:xfrm>
+            <a:off x="3403397" y="4169664"/>
+            <a:ext cx="676656" cy="384048"/>
           </a:xfrm>
           <a:prstGeom prst="rect">
             <a:avLst>
-              <a:gd name="adj" fmla="val 7692"/>
+              <a:gd name="adj" fmla="val 9524"/>
             </a:avLst>
           </a:prstGeom>
           <a:solidFill>
@@ -29258,14 +29672,14 @@
       </p:sp>
       <p:sp>
         <p:nvSpPr>
-          <p:cNvPr id="44" name="Text 42"/>
-          <p:cNvSpPr/>
-          <p:nvPr/>
-        </p:nvSpPr>
-        <p:spPr>
-          <a:xfrm>
-            <a:off x="3639312" y="4169664"/>
-            <a:ext cx="685800" cy="475488"/>
+          <p:cNvPr id="47" name="Text 45"/>
+          <p:cNvSpPr/>
+          <p:nvPr/>
+        </p:nvSpPr>
+        <p:spPr>
+          <a:xfrm>
+            <a:off x="3403397" y="4169664"/>
+            <a:ext cx="676656" cy="384048"/>
           </a:xfrm>
           <a:prstGeom prst="rect">
             <a:avLst/>
@@ -29289,7 +29703,7 @@
                 <a:ea typeface="Trebuchet MS" pitchFamily="34" charset="-122"/>
                 <a:cs typeface="Trebuchet MS" pitchFamily="34" charset="-120"/>
               </a:rPr>
-              <a:t>s</a:t>
+              <a:t>c</a:t>
             </a:r>
             <a:endParaRPr lang="en-US" sz="900" dirty="0"/>
           </a:p>
@@ -29297,18 +29711,57 @@
       </p:sp>
       <p:sp>
         <p:nvSpPr>
-          <p:cNvPr id="45" name="Shape 43"/>
-          <p:cNvSpPr/>
-          <p:nvPr/>
-        </p:nvSpPr>
-        <p:spPr>
-          <a:xfrm>
-            <a:off x="4447032" y="4169664"/>
-            <a:ext cx="685800" cy="475488"/>
+          <p:cNvPr id="48" name="Text 46"/>
+          <p:cNvSpPr/>
+          <p:nvPr/>
+        </p:nvSpPr>
+        <p:spPr>
+          <a:xfrm>
+            <a:off x="3403397" y="4572000"/>
+            <a:ext cx="676656" cy="219456"/>
+          </a:xfrm>
+          <a:prstGeom prst="rect">
+            <a:avLst/>
+          </a:prstGeom>
+          <a:noFill/>
+          <a:ln/>
+        </p:spPr>
+        <p:txBody>
+          <a:bodyPr wrap="square" lIns="0" tIns="0" rIns="0" bIns="0" rtlCol="0" anchor="t"/>
+          <a:lstStyle/>
+          <a:p>
+            <a:pPr algn="ctr" indent="0" marL="0">
+              <a:buNone/>
+            </a:pPr>
+            <a:r>
+              <a:rPr lang="en-US" sz="750" i="1" dirty="0">
+                <a:solidFill>
+                  <a:srgbClr val="94A3B8"/>
+                </a:solidFill>
+                <a:latin typeface="Calibri" pitchFamily="34" charset="0"/>
+                <a:ea typeface="Calibri" pitchFamily="34" charset="-122"/>
+                <a:cs typeface="Calibri" pitchFamily="34" charset="-120"/>
+              </a:rPr>
+              <a:t>/k/</a:t>
+            </a:r>
+            <a:endParaRPr lang="en-US" sz="750" dirty="0"/>
+          </a:p>
+        </p:txBody>
+      </p:sp>
+      <p:sp>
+        <p:nvSpPr>
+          <p:cNvPr id="49" name="Shape 47"/>
+          <p:cNvSpPr/>
+          <p:nvPr/>
+        </p:nvSpPr>
+        <p:spPr>
+          <a:xfrm>
+            <a:off x="4129430" y="4169664"/>
+            <a:ext cx="676656" cy="384048"/>
           </a:xfrm>
           <a:prstGeom prst="rect">
             <a:avLst>
-              <a:gd name="adj" fmla="val 7692"/>
+              <a:gd name="adj" fmla="val 9524"/>
             </a:avLst>
           </a:prstGeom>
           <a:solidFill>
@@ -29324,14 +29777,14 @@
       </p:sp>
       <p:sp>
         <p:nvSpPr>
-          <p:cNvPr id="46" name="Text 44"/>
-          <p:cNvSpPr/>
-          <p:nvPr/>
-        </p:nvSpPr>
-        <p:spPr>
-          <a:xfrm>
-            <a:off x="4447032" y="4169664"/>
-            <a:ext cx="685800" cy="475488"/>
+          <p:cNvPr id="50" name="Text 48"/>
+          <p:cNvSpPr/>
+          <p:nvPr/>
+        </p:nvSpPr>
+        <p:spPr>
+          <a:xfrm>
+            <a:off x="4129430" y="4169664"/>
+            <a:ext cx="676656" cy="384048"/>
           </a:xfrm>
           <a:prstGeom prst="rect">
             <a:avLst/>
@@ -29355,7 +29808,7 @@
                 <a:ea typeface="Trebuchet MS" pitchFamily="34" charset="-122"/>
                 <a:cs typeface="Trebuchet MS" pitchFamily="34" charset="-120"/>
               </a:rPr>
-              <a:t>cr</a:t>
+              <a:t>r</a:t>
             </a:r>
             <a:endParaRPr lang="en-US" sz="900" dirty="0"/>
           </a:p>
@@ -29363,18 +29816,18 @@
       </p:sp>
       <p:sp>
         <p:nvSpPr>
-          <p:cNvPr id="47" name="Shape 45"/>
-          <p:cNvSpPr/>
-          <p:nvPr/>
-        </p:nvSpPr>
-        <p:spPr>
-          <a:xfrm>
-            <a:off x="5254752" y="4169664"/>
-            <a:ext cx="685800" cy="475488"/>
+          <p:cNvPr id="51" name="Shape 49"/>
+          <p:cNvSpPr/>
+          <p:nvPr/>
+        </p:nvSpPr>
+        <p:spPr>
+          <a:xfrm>
+            <a:off x="4855464" y="4169664"/>
+            <a:ext cx="676656" cy="384048"/>
           </a:xfrm>
           <a:prstGeom prst="rect">
             <a:avLst>
-              <a:gd name="adj" fmla="val 7692"/>
+              <a:gd name="adj" fmla="val 9524"/>
             </a:avLst>
           </a:prstGeom>
           <a:solidFill>
@@ -29390,14 +29843,14 @@
       </p:sp>
       <p:sp>
         <p:nvSpPr>
-          <p:cNvPr id="48" name="Text 46"/>
-          <p:cNvSpPr/>
-          <p:nvPr/>
-        </p:nvSpPr>
-        <p:spPr>
-          <a:xfrm>
-            <a:off x="5254752" y="4169664"/>
-            <a:ext cx="685800" cy="475488"/>
+          <p:cNvPr id="52" name="Text 50"/>
+          <p:cNvSpPr/>
+          <p:nvPr/>
+        </p:nvSpPr>
+        <p:spPr>
+          <a:xfrm>
+            <a:off x="4855464" y="4169664"/>
+            <a:ext cx="676656" cy="384048"/>
           </a:xfrm>
           <a:prstGeom prst="rect">
             <a:avLst/>
@@ -29429,18 +29882,18 @@
       </p:sp>
       <p:sp>
         <p:nvSpPr>
-          <p:cNvPr id="49" name="Shape 47"/>
-          <p:cNvSpPr/>
-          <p:nvPr/>
-        </p:nvSpPr>
-        <p:spPr>
-          <a:xfrm>
-            <a:off x="6062472" y="4169664"/>
-            <a:ext cx="685800" cy="475488"/>
+          <p:cNvPr id="53" name="Shape 51"/>
+          <p:cNvSpPr/>
+          <p:nvPr/>
+        </p:nvSpPr>
+        <p:spPr>
+          <a:xfrm>
+            <a:off x="5581498" y="4169664"/>
+            <a:ext cx="676656" cy="384048"/>
           </a:xfrm>
           <a:prstGeom prst="rect">
             <a:avLst>
-              <a:gd name="adj" fmla="val 7692"/>
+              <a:gd name="adj" fmla="val 9524"/>
             </a:avLst>
           </a:prstGeom>
           <a:solidFill>
@@ -29456,14 +29909,14 @@
       </p:sp>
       <p:sp>
         <p:nvSpPr>
-          <p:cNvPr id="50" name="Text 48"/>
-          <p:cNvSpPr/>
-          <p:nvPr/>
-        </p:nvSpPr>
-        <p:spPr>
-          <a:xfrm>
-            <a:off x="6062472" y="4169664"/>
-            <a:ext cx="685800" cy="475488"/>
+          <p:cNvPr id="54" name="Text 52"/>
+          <p:cNvSpPr/>
+          <p:nvPr/>
+        </p:nvSpPr>
+        <p:spPr>
+          <a:xfrm>
+            <a:off x="5581498" y="4169664"/>
+            <a:ext cx="676656" cy="384048"/>
           </a:xfrm>
           <a:prstGeom prst="rect">
             <a:avLst/>
@@ -29495,18 +29948,18 @@
       </p:sp>
       <p:sp>
         <p:nvSpPr>
-          <p:cNvPr id="51" name="Shape 49"/>
-          <p:cNvSpPr/>
-          <p:nvPr/>
-        </p:nvSpPr>
-        <p:spPr>
-          <a:xfrm>
-            <a:off x="6870192" y="4169664"/>
-            <a:ext cx="685800" cy="475488"/>
+          <p:cNvPr id="55" name="Shape 53"/>
+          <p:cNvSpPr/>
+          <p:nvPr/>
+        </p:nvSpPr>
+        <p:spPr>
+          <a:xfrm>
+            <a:off x="6307531" y="4169664"/>
+            <a:ext cx="676656" cy="384048"/>
           </a:xfrm>
           <a:prstGeom prst="rect">
             <a:avLst>
-              <a:gd name="adj" fmla="val 7692"/>
+              <a:gd name="adj" fmla="val 9524"/>
             </a:avLst>
           </a:prstGeom>
           <a:solidFill>
@@ -29522,14 +29975,14 @@
       </p:sp>
       <p:sp>
         <p:nvSpPr>
-          <p:cNvPr id="52" name="Text 50"/>
-          <p:cNvSpPr/>
-          <p:nvPr/>
-        </p:nvSpPr>
-        <p:spPr>
-          <a:xfrm>
-            <a:off x="6870192" y="4169664"/>
-            <a:ext cx="685800" cy="475488"/>
+          <p:cNvPr id="56" name="Text 54"/>
+          <p:cNvSpPr/>
+          <p:nvPr/>
+        </p:nvSpPr>
+        <p:spPr>
+          <a:xfrm>
+            <a:off x="6307531" y="4169664"/>
+            <a:ext cx="676656" cy="384048"/>
           </a:xfrm>
           <a:prstGeom prst="rect">
             <a:avLst/>
@@ -29561,18 +30014,18 @@
       </p:sp>
       <p:sp>
         <p:nvSpPr>
-          <p:cNvPr id="53" name="Shape 51"/>
-          <p:cNvSpPr/>
-          <p:nvPr/>
-        </p:nvSpPr>
-        <p:spPr>
-          <a:xfrm>
-            <a:off x="7677912" y="4169664"/>
-            <a:ext cx="685800" cy="475488"/>
+          <p:cNvPr id="57" name="Shape 55"/>
+          <p:cNvSpPr/>
+          <p:nvPr/>
+        </p:nvSpPr>
+        <p:spPr>
+          <a:xfrm>
+            <a:off x="7033565" y="4169664"/>
+            <a:ext cx="676656" cy="384048"/>
           </a:xfrm>
           <a:prstGeom prst="rect">
             <a:avLst>
-              <a:gd name="adj" fmla="val 7692"/>
+              <a:gd name="adj" fmla="val 9524"/>
             </a:avLst>
           </a:prstGeom>
           <a:solidFill>
@@ -29588,14 +30041,14 @@
       </p:sp>
       <p:sp>
         <p:nvSpPr>
-          <p:cNvPr id="54" name="Text 52"/>
-          <p:cNvSpPr/>
-          <p:nvPr/>
-        </p:nvSpPr>
-        <p:spPr>
-          <a:xfrm>
-            <a:off x="7677912" y="4169664"/>
-            <a:ext cx="685800" cy="475488"/>
+          <p:cNvPr id="58" name="Text 56"/>
+          <p:cNvSpPr/>
+          <p:nvPr/>
+        </p:nvSpPr>
+        <p:spPr>
+          <a:xfrm>
+            <a:off x="7033565" y="4169664"/>
+            <a:ext cx="676656" cy="384048"/>
           </a:xfrm>
           <a:prstGeom prst="rect">
             <a:avLst/>
@@ -29619,7 +30072,73 @@
                 <a:ea typeface="Trebuchet MS" pitchFamily="34" charset="-122"/>
                 <a:cs typeface="Trebuchet MS" pitchFamily="34" charset="-120"/>
               </a:rPr>
-              <a:t>t</a:t>
+              <a:t>b</a:t>
+            </a:r>
+            <a:endParaRPr lang="en-US" sz="900" dirty="0"/>
+          </a:p>
+        </p:txBody>
+      </p:sp>
+      <p:sp>
+        <p:nvSpPr>
+          <p:cNvPr id="59" name="Shape 57"/>
+          <p:cNvSpPr/>
+          <p:nvPr/>
+        </p:nvSpPr>
+        <p:spPr>
+          <a:xfrm>
+            <a:off x="7759598" y="4169664"/>
+            <a:ext cx="676656" cy="384048"/>
+          </a:xfrm>
+          <a:prstGeom prst="rect">
+            <a:avLst>
+              <a:gd name="adj" fmla="val 9524"/>
+            </a:avLst>
+          </a:prstGeom>
+          <a:solidFill>
+            <a:srgbClr val="FFFFFF"/>
+          </a:solidFill>
+          <a:ln w="12700">
+            <a:solidFill>
+              <a:srgbClr val="DB2777"/>
+            </a:solidFill>
+            <a:prstDash val="solid"/>
+          </a:ln>
+        </p:spPr>
+      </p:sp>
+      <p:sp>
+        <p:nvSpPr>
+          <p:cNvPr id="60" name="Text 58"/>
+          <p:cNvSpPr/>
+          <p:nvPr/>
+        </p:nvSpPr>
+        <p:spPr>
+          <a:xfrm>
+            <a:off x="7759598" y="4169664"/>
+            <a:ext cx="676656" cy="384048"/>
+          </a:xfrm>
+          <a:prstGeom prst="rect">
+            <a:avLst/>
+          </a:prstGeom>
+          <a:noFill/>
+          <a:ln/>
+        </p:spPr>
+        <p:txBody>
+          <a:bodyPr wrap="square" lIns="0" tIns="0" rIns="0" bIns="0" rtlCol="0" anchor="ctr"/>
+          <a:lstStyle/>
+          <a:p>
+            <a:pPr algn="ctr" indent="0" marL="0">
+              <a:buNone/>
+            </a:pPr>
+            <a:r>
+              <a:rPr lang="en-US" sz="900" b="1" dirty="0">
+                <a:solidFill>
+                  <a:srgbClr val="9D174D"/>
+                </a:solidFill>
+                <a:latin typeface="Trebuchet MS" pitchFamily="34" charset="0"/>
+                <a:ea typeface="Trebuchet MS" pitchFamily="34" charset="-122"/>
+                <a:cs typeface="Trebuchet MS" pitchFamily="34" charset="-120"/>
+              </a:rPr>
+              <a:t>le</a:t>
             </a:r>
             <a:endParaRPr lang="en-US" sz="900" dirty="0"/>
           </a:p>
@@ -30050,7 +30569,7 @@
                 <a:ea typeface="Trebuchet MS" pitchFamily="34" charset="-122"/>
                 <a:cs typeface="Trebuchet MS" pitchFamily="34" charset="-120"/>
               </a:rPr>
-              <a:t>credentials</a:t>
+              <a:t>credit</a:t>
             </a:r>
             <a:endParaRPr lang="en-US" sz="2800" dirty="0"/>
           </a:p>
@@ -30877,7 +31396,7 @@
                 <a:ea typeface="Trebuchet MS" pitchFamily="34" charset="-122"/>
                 <a:cs typeface="Trebuchet MS" pitchFamily="34" charset="-120"/>
               </a:rPr>
-              <a:t>credentials</a:t>
+              <a:t>credit</a:t>
             </a:r>
             <a:endParaRPr lang="en-US" sz="2800" dirty="0"/>
           </a:p>
@@ -30957,7 +31476,7 @@
         </p:nvSpPr>
         <p:spPr>
           <a:xfrm>
-            <a:off x="2221992" y="2258568"/>
+            <a:off x="2938272" y="2258568"/>
             <a:ext cx="1828800" cy="292608"/>
           </a:xfrm>
           <a:prstGeom prst="rect">
@@ -30991,7 +31510,7 @@
         </p:nvSpPr>
         <p:spPr>
           <a:xfrm>
-            <a:off x="2221992" y="2258568"/>
+            <a:off x="2938272" y="2258568"/>
             <a:ext cx="1828800" cy="292608"/>
           </a:xfrm>
           <a:prstGeom prst="rect">
@@ -31030,7 +31549,7 @@
         </p:nvSpPr>
         <p:spPr>
           <a:xfrm>
-            <a:off x="2221992" y="2569464"/>
+            <a:off x="2938272" y="2569464"/>
             <a:ext cx="1828800" cy="201168"/>
           </a:xfrm>
           <a:prstGeom prst="rect">
@@ -31069,7 +31588,7 @@
         </p:nvSpPr>
         <p:spPr>
           <a:xfrm>
-            <a:off x="4370832" y="2258568"/>
+            <a:off x="5803392" y="2258568"/>
             <a:ext cx="1828800" cy="292608"/>
           </a:xfrm>
           <a:prstGeom prst="rect">
@@ -31103,7 +31622,7 @@
         </p:nvSpPr>
         <p:spPr>
           <a:xfrm>
-            <a:off x="4370832" y="2258568"/>
+            <a:off x="5803392" y="2258568"/>
             <a:ext cx="1828800" cy="292608"/>
           </a:xfrm>
           <a:prstGeom prst="rect">
@@ -31128,7 +31647,7 @@
                 <a:ea typeface="Trebuchet MS" pitchFamily="34" charset="-122"/>
                 <a:cs typeface="Trebuchet MS" pitchFamily="34" charset="-120"/>
               </a:rPr>
-              <a:t>ential</a:t>
+              <a:t>it</a:t>
             </a:r>
             <a:endParaRPr lang="en-US" sz="1300" dirty="0"/>
           </a:p>
@@ -31142,7 +31661,7 @@
         </p:nvSpPr>
         <p:spPr>
           <a:xfrm>
-            <a:off x="4370832" y="2569464"/>
+            <a:off x="5803392" y="2569464"/>
             <a:ext cx="1828800" cy="201168"/>
           </a:xfrm>
           <a:prstGeom prst="rect">
@@ -31167,7 +31686,7 @@
                 <a:ea typeface="Calibri" pitchFamily="34" charset="-122"/>
                 <a:cs typeface="Calibri" pitchFamily="34" charset="-120"/>
               </a:rPr>
-              <a:t>relating to</a:t>
+              <a:t>result or act of</a:t>
             </a:r>
             <a:endParaRPr lang="en-US" sz="850" dirty="0"/>
           </a:p>
@@ -31181,30 +31700,23 @@
         </p:nvSpPr>
         <p:spPr>
           <a:xfrm>
-            <a:off x="6519672" y="2258568"/>
-            <a:ext cx="1828800" cy="292608"/>
+            <a:off x="365760" y="3273552"/>
+            <a:ext cx="1371600" cy="658368"/>
           </a:xfrm>
           <a:prstGeom prst="rect">
             <a:avLst>
-              <a:gd name="adj" fmla="val 25000"/>
+              <a:gd name="adj" fmla="val 8333"/>
             </a:avLst>
           </a:prstGeom>
           <a:solidFill>
-            <a:srgbClr val="FCE7F3"/>
-          </a:solidFill>
-          <a:ln w="19050">
-            <a:solidFill>
-              <a:srgbClr val="DB2777"/>
-            </a:solidFill>
-            <a:prstDash val="solid"/>
-          </a:ln>
-          <a:effectLst>
-            <a:outerShdw sx="100000" sy="100000" kx="0" ky="0" algn="bl" rotWithShape="0" blurRad="101600" dist="38100" dir="8100000">
-              <a:srgbClr val="000000">
-                <a:alpha val="12000"/>
-              </a:srgbClr>
-            </a:outerShdw>
-          </a:effectLst>
+            <a:srgbClr val="E2E8F0"/>
+          </a:solidFill>
+          <a:ln w="12700">
+            <a:solidFill>
+              <a:srgbClr val="E2E8F0"/>
+            </a:solidFill>
+            <a:prstDash val="solid"/>
+          </a:ln>
         </p:spPr>
       </p:sp>
       <p:sp>
@@ -31215,90 +31727,117 @@
         </p:nvSpPr>
         <p:spPr>
           <a:xfrm>
-            <a:off x="6519672" y="2258568"/>
-            <a:ext cx="1828800" cy="292608"/>
-          </a:xfrm>
-          <a:prstGeom prst="rect">
-            <a:avLst/>
-          </a:prstGeom>
-          <a:noFill/>
-          <a:ln/>
-        </p:spPr>
-        <p:txBody>
-          <a:bodyPr wrap="square" lIns="0" tIns="0" rIns="0" bIns="0" rtlCol="0" anchor="ctr"/>
-          <a:lstStyle/>
-          <a:p>
-            <a:pPr algn="ctr" indent="0" marL="0">
-              <a:buNone/>
-            </a:pPr>
-            <a:r>
-              <a:rPr lang="en-US" sz="1300" b="1" dirty="0">
-                <a:solidFill>
-                  <a:srgbClr val="9D174D"/>
+            <a:off x="365760" y="3273552"/>
+            <a:ext cx="1371600" cy="658368"/>
+          </a:xfrm>
+          <a:prstGeom prst="rect">
+            <a:avLst/>
+          </a:prstGeom>
+          <a:noFill/>
+          <a:ln/>
+        </p:spPr>
+        <p:txBody>
+          <a:bodyPr wrap="square" lIns="0" tIns="0" rIns="0" bIns="0" rtlCol="0" anchor="ctr"/>
+          <a:lstStyle/>
+          <a:p>
+            <a:pPr algn="ctr" indent="0" marL="0">
+              <a:buNone/>
+            </a:pPr>
+            <a:r>
+              <a:rPr lang="en-US" sz="1100" b="1" dirty="0">
+                <a:solidFill>
+                  <a:srgbClr val="475569"/>
                 </a:solidFill>
                 <a:latin typeface="Trebuchet MS" pitchFamily="34" charset="0"/>
                 <a:ea typeface="Trebuchet MS" pitchFamily="34" charset="-122"/>
                 <a:cs typeface="Trebuchet MS" pitchFamily="34" charset="-120"/>
               </a:rPr>
-              <a:t>s</a:t>
-            </a:r>
-            <a:endParaRPr lang="en-US" sz="1300" dirty="0"/>
-          </a:p>
-        </p:txBody>
-      </p:sp>
-      <p:sp>
-        <p:nvSpPr>
-          <p:cNvPr id="24" name="Text 22"/>
-          <p:cNvSpPr/>
-          <p:nvPr/>
-        </p:nvSpPr>
-        <p:spPr>
-          <a:xfrm>
-            <a:off x="6519672" y="2569464"/>
-            <a:ext cx="1828800" cy="201168"/>
-          </a:xfrm>
-          <a:prstGeom prst="rect">
-            <a:avLst/>
-          </a:prstGeom>
-          <a:noFill/>
-          <a:ln/>
-        </p:spPr>
-        <p:txBody>
-          <a:bodyPr wrap="square" lIns="0" tIns="0" rIns="0" bIns="0" rtlCol="0" anchor="t"/>
-          <a:lstStyle/>
-          <a:p>
-            <a:pPr algn="ctr" indent="0" marL="0">
-              <a:buNone/>
-            </a:pPr>
-            <a:r>
-              <a:rPr lang="en-US" sz="850" dirty="0">
-                <a:solidFill>
-                  <a:srgbClr val="475569"/>
+              <a:t>Syllables</a:t>
+            </a:r>
+            <a:endParaRPr lang="en-US" sz="1100" dirty="0"/>
+          </a:p>
+        </p:txBody>
+      </p:sp>
+      <p:sp>
+        <p:nvSpPr>
+          <p:cNvPr id="24" name="Shape 22"/>
+          <p:cNvSpPr/>
+          <p:nvPr/>
+        </p:nvSpPr>
+        <p:spPr>
+          <a:xfrm>
+            <a:off x="1874520" y="3273552"/>
+            <a:ext cx="6903720" cy="658368"/>
+          </a:xfrm>
+          <a:prstGeom prst="rect">
+            <a:avLst>
+              <a:gd name="adj" fmla="val 8333"/>
+            </a:avLst>
+          </a:prstGeom>
+          <a:solidFill>
+            <a:srgbClr val="F8FAFC"/>
+          </a:solidFill>
+          <a:ln w="12700">
+            <a:solidFill>
+              <a:srgbClr val="E2E8F0"/>
+            </a:solidFill>
+            <a:prstDash val="dash"/>
+          </a:ln>
+        </p:spPr>
+      </p:sp>
+      <p:sp>
+        <p:nvSpPr>
+          <p:cNvPr id="25" name="Text 23"/>
+          <p:cNvSpPr/>
+          <p:nvPr/>
+        </p:nvSpPr>
+        <p:spPr>
+          <a:xfrm>
+            <a:off x="1874520" y="3273552"/>
+            <a:ext cx="6903720" cy="658368"/>
+          </a:xfrm>
+          <a:prstGeom prst="rect">
+            <a:avLst/>
+          </a:prstGeom>
+          <a:noFill/>
+          <a:ln/>
+        </p:spPr>
+        <p:txBody>
+          <a:bodyPr wrap="square" rtlCol="0" anchor="ctr"/>
+          <a:lstStyle/>
+          <a:p>
+            <a:pPr algn="ctr" indent="0" marL="0">
+              <a:buNone/>
+            </a:pPr>
+            <a:r>
+              <a:rPr lang="en-US" sz="1100" i="1" dirty="0">
+                <a:solidFill>
+                  <a:srgbClr val="CBD5E1"/>
                 </a:solidFill>
                 <a:latin typeface="Calibri" pitchFamily="34" charset="0"/>
                 <a:ea typeface="Calibri" pitchFamily="34" charset="-122"/>
                 <a:cs typeface="Calibri" pitchFamily="34" charset="-120"/>
               </a:rPr>
-              <a:t>more than one</a:t>
-            </a:r>
-            <a:endParaRPr lang="en-US" sz="850" dirty="0"/>
-          </a:p>
-        </p:txBody>
-      </p:sp>
-      <p:sp>
-        <p:nvSpPr>
-          <p:cNvPr id="25" name="Shape 23"/>
-          <p:cNvSpPr/>
-          <p:nvPr/>
-        </p:nvSpPr>
-        <p:spPr>
-          <a:xfrm>
-            <a:off x="365760" y="3273552"/>
-            <a:ext cx="1371600" cy="658368"/>
+              <a:t>Write here...</a:t>
+            </a:r>
+            <a:endParaRPr lang="en-US" sz="1100" dirty="0"/>
+          </a:p>
+        </p:txBody>
+      </p:sp>
+      <p:sp>
+        <p:nvSpPr>
+          <p:cNvPr id="26" name="Shape 24"/>
+          <p:cNvSpPr/>
+          <p:nvPr/>
+        </p:nvSpPr>
+        <p:spPr>
+          <a:xfrm>
+            <a:off x="365760" y="4096512"/>
+            <a:ext cx="1371600" cy="804672"/>
           </a:xfrm>
           <a:prstGeom prst="rect">
             <a:avLst>
-              <a:gd name="adj" fmla="val 8333"/>
+              <a:gd name="adj" fmla="val 6818"/>
             </a:avLst>
           </a:prstGeom>
           <a:solidFill>
@@ -31314,14 +31853,14 @@
       </p:sp>
       <p:sp>
         <p:nvSpPr>
-          <p:cNvPr id="26" name="Text 24"/>
-          <p:cNvSpPr/>
-          <p:nvPr/>
-        </p:nvSpPr>
-        <p:spPr>
-          <a:xfrm>
-            <a:off x="365760" y="3273552"/>
-            <a:ext cx="1371600" cy="658368"/>
+          <p:cNvPr id="27" name="Text 25"/>
+          <p:cNvSpPr/>
+          <p:nvPr/>
+        </p:nvSpPr>
+        <p:spPr>
+          <a:xfrm>
+            <a:off x="365760" y="4096512"/>
+            <a:ext cx="1371600" cy="804672"/>
           </a:xfrm>
           <a:prstGeom prst="rect">
             <a:avLst/>
@@ -31345,7 +31884,7 @@
                 <a:ea typeface="Trebuchet MS" pitchFamily="34" charset="-122"/>
                 <a:cs typeface="Trebuchet MS" pitchFamily="34" charset="-120"/>
               </a:rPr>
-              <a:t>Syllables</a:t>
+              <a:t>Phonemes</a:t>
             </a:r>
             <a:endParaRPr lang="en-US" sz="1100" dirty="0"/>
           </a:p>
@@ -31353,80 +31892,14 @@
       </p:sp>
       <p:sp>
         <p:nvSpPr>
-          <p:cNvPr id="27" name="Shape 25"/>
-          <p:cNvSpPr/>
-          <p:nvPr/>
-        </p:nvSpPr>
-        <p:spPr>
-          <a:xfrm>
-            <a:off x="1874520" y="3273552"/>
-            <a:ext cx="6903720" cy="658368"/>
-          </a:xfrm>
-          <a:prstGeom prst="rect">
-            <a:avLst>
-              <a:gd name="adj" fmla="val 8333"/>
-            </a:avLst>
-          </a:prstGeom>
-          <a:solidFill>
-            <a:srgbClr val="F8FAFC"/>
-          </a:solidFill>
-          <a:ln w="12700">
-            <a:solidFill>
-              <a:srgbClr val="E2E8F0"/>
-            </a:solidFill>
-            <a:prstDash val="dash"/>
-          </a:ln>
-        </p:spPr>
-      </p:sp>
-      <p:sp>
-        <p:nvSpPr>
-          <p:cNvPr id="28" name="Text 26"/>
-          <p:cNvSpPr/>
-          <p:nvPr/>
-        </p:nvSpPr>
-        <p:spPr>
-          <a:xfrm>
-            <a:off x="1874520" y="3273552"/>
-            <a:ext cx="6903720" cy="658368"/>
-          </a:xfrm>
-          <a:prstGeom prst="rect">
-            <a:avLst/>
-          </a:prstGeom>
-          <a:noFill/>
-          <a:ln/>
-        </p:spPr>
-        <p:txBody>
-          <a:bodyPr wrap="square" rtlCol="0" anchor="ctr"/>
-          <a:lstStyle/>
-          <a:p>
-            <a:pPr algn="ctr" indent="0" marL="0">
-              <a:buNone/>
-            </a:pPr>
-            <a:r>
-              <a:rPr lang="en-US" sz="1100" i="1" dirty="0">
-                <a:solidFill>
-                  <a:srgbClr val="CBD5E1"/>
-                </a:solidFill>
-                <a:latin typeface="Calibri" pitchFamily="34" charset="0"/>
-                <a:ea typeface="Calibri" pitchFamily="34" charset="-122"/>
-                <a:cs typeface="Calibri" pitchFamily="34" charset="-120"/>
-              </a:rPr>
-              <a:t>Write here...</a:t>
-            </a:r>
-            <a:endParaRPr lang="en-US" sz="1100" dirty="0"/>
-          </a:p>
-        </p:txBody>
-      </p:sp>
-      <p:sp>
-        <p:nvSpPr>
-          <p:cNvPr id="29" name="Shape 27"/>
-          <p:cNvSpPr/>
-          <p:nvPr/>
-        </p:nvSpPr>
-        <p:spPr>
-          <a:xfrm>
-            <a:off x="365760" y="4096512"/>
-            <a:ext cx="1371600" cy="804672"/>
+          <p:cNvPr id="28" name="Shape 26"/>
+          <p:cNvSpPr/>
+          <p:nvPr/>
+        </p:nvSpPr>
+        <p:spPr>
+          <a:xfrm>
+            <a:off x="1874520" y="4096512"/>
+            <a:ext cx="6903720" cy="804672"/>
           </a:xfrm>
           <a:prstGeom prst="rect">
             <a:avLst>
@@ -31434,85 +31907,19 @@
             </a:avLst>
           </a:prstGeom>
           <a:solidFill>
-            <a:srgbClr val="E2E8F0"/>
+            <a:srgbClr val="F8FAFC"/>
           </a:solidFill>
           <a:ln w="12700">
             <a:solidFill>
               <a:srgbClr val="E2E8F0"/>
             </a:solidFill>
-            <a:prstDash val="solid"/>
-          </a:ln>
-        </p:spPr>
-      </p:sp>
-      <p:sp>
-        <p:nvSpPr>
-          <p:cNvPr id="30" name="Text 28"/>
-          <p:cNvSpPr/>
-          <p:nvPr/>
-        </p:nvSpPr>
-        <p:spPr>
-          <a:xfrm>
-            <a:off x="365760" y="4096512"/>
-            <a:ext cx="1371600" cy="804672"/>
-          </a:xfrm>
-          <a:prstGeom prst="rect">
-            <a:avLst/>
-          </a:prstGeom>
-          <a:noFill/>
-          <a:ln/>
-        </p:spPr>
-        <p:txBody>
-          <a:bodyPr wrap="square" lIns="0" tIns="0" rIns="0" bIns="0" rtlCol="0" anchor="ctr"/>
-          <a:lstStyle/>
-          <a:p>
-            <a:pPr algn="ctr" indent="0" marL="0">
-              <a:buNone/>
-            </a:pPr>
-            <a:r>
-              <a:rPr lang="en-US" sz="1100" b="1" dirty="0">
-                <a:solidFill>
-                  <a:srgbClr val="475569"/>
-                </a:solidFill>
-                <a:latin typeface="Trebuchet MS" pitchFamily="34" charset="0"/>
-                <a:ea typeface="Trebuchet MS" pitchFamily="34" charset="-122"/>
-                <a:cs typeface="Trebuchet MS" pitchFamily="34" charset="-120"/>
-              </a:rPr>
-              <a:t>Phonemes</a:t>
-            </a:r>
-            <a:endParaRPr lang="en-US" sz="1100" dirty="0"/>
-          </a:p>
-        </p:txBody>
-      </p:sp>
-      <p:sp>
-        <p:nvSpPr>
-          <p:cNvPr id="31" name="Shape 29"/>
-          <p:cNvSpPr/>
-          <p:nvPr/>
-        </p:nvSpPr>
-        <p:spPr>
-          <a:xfrm>
-            <a:off x="1874520" y="4096512"/>
-            <a:ext cx="6903720" cy="804672"/>
-          </a:xfrm>
-          <a:prstGeom prst="rect">
-            <a:avLst>
-              <a:gd name="adj" fmla="val 6818"/>
-            </a:avLst>
-          </a:prstGeom>
-          <a:solidFill>
-            <a:srgbClr val="F8FAFC"/>
-          </a:solidFill>
-          <a:ln w="12700">
-            <a:solidFill>
-              <a:srgbClr val="E2E8F0"/>
-            </a:solidFill>
             <a:prstDash val="dash"/>
           </a:ln>
         </p:spPr>
       </p:sp>
       <p:sp>
         <p:nvSpPr>
-          <p:cNvPr id="32" name="Text 30"/>
+          <p:cNvPr id="29" name="Text 27"/>
           <p:cNvSpPr/>
           <p:nvPr/>
         </p:nvSpPr>
@@ -31974,7 +32381,7 @@
                 <a:ea typeface="Trebuchet MS" pitchFamily="34" charset="-122"/>
                 <a:cs typeface="Trebuchet MS" pitchFamily="34" charset="-120"/>
               </a:rPr>
-              <a:t>credentials</a:t>
+              <a:t>credit</a:t>
             </a:r>
             <a:endParaRPr lang="en-US" sz="2800" dirty="0"/>
           </a:p>
@@ -32054,7 +32461,7 @@
         </p:nvSpPr>
         <p:spPr>
           <a:xfrm>
-            <a:off x="2221992" y="2258568"/>
+            <a:off x="2938272" y="2258568"/>
             <a:ext cx="1828800" cy="292608"/>
           </a:xfrm>
           <a:prstGeom prst="rect">
@@ -32088,7 +32495,7 @@
         </p:nvSpPr>
         <p:spPr>
           <a:xfrm>
-            <a:off x="2221992" y="2258568"/>
+            <a:off x="2938272" y="2258568"/>
             <a:ext cx="1828800" cy="292608"/>
           </a:xfrm>
           <a:prstGeom prst="rect">
@@ -32127,7 +32534,7 @@
         </p:nvSpPr>
         <p:spPr>
           <a:xfrm>
-            <a:off x="2221992" y="2569464"/>
+            <a:off x="2938272" y="2569464"/>
             <a:ext cx="1828800" cy="201168"/>
           </a:xfrm>
           <a:prstGeom prst="rect">
@@ -32166,7 +32573,7 @@
         </p:nvSpPr>
         <p:spPr>
           <a:xfrm>
-            <a:off x="4370832" y="2258568"/>
+            <a:off x="5803392" y="2258568"/>
             <a:ext cx="1828800" cy="292608"/>
           </a:xfrm>
           <a:prstGeom prst="rect">
@@ -32200,7 +32607,7 @@
         </p:nvSpPr>
         <p:spPr>
           <a:xfrm>
-            <a:off x="4370832" y="2258568"/>
+            <a:off x="5803392" y="2258568"/>
             <a:ext cx="1828800" cy="292608"/>
           </a:xfrm>
           <a:prstGeom prst="rect">
@@ -32225,7 +32632,7 @@
                 <a:ea typeface="Trebuchet MS" pitchFamily="34" charset="-122"/>
                 <a:cs typeface="Trebuchet MS" pitchFamily="34" charset="-120"/>
               </a:rPr>
-              <a:t>ential</a:t>
+              <a:t>it</a:t>
             </a:r>
             <a:endParaRPr lang="en-US" sz="1300" dirty="0"/>
           </a:p>
@@ -32239,7 +32646,7 @@
         </p:nvSpPr>
         <p:spPr>
           <a:xfrm>
-            <a:off x="4370832" y="2569464"/>
+            <a:off x="5803392" y="2569464"/>
             <a:ext cx="1828800" cy="201168"/>
           </a:xfrm>
           <a:prstGeom prst="rect">
@@ -32264,7 +32671,7 @@
                 <a:ea typeface="Calibri" pitchFamily="34" charset="-122"/>
                 <a:cs typeface="Calibri" pitchFamily="34" charset="-120"/>
               </a:rPr>
-              <a:t>relating to</a:t>
+              <a:t>result or act of</a:t>
             </a:r>
             <a:endParaRPr lang="en-US" sz="850" dirty="0"/>
           </a:p>
@@ -32278,30 +32685,23 @@
         </p:nvSpPr>
         <p:spPr>
           <a:xfrm>
-            <a:off x="6519672" y="2258568"/>
-            <a:ext cx="1828800" cy="292608"/>
+            <a:off x="365760" y="3273552"/>
+            <a:ext cx="1371600" cy="658368"/>
           </a:xfrm>
           <a:prstGeom prst="rect">
             <a:avLst>
-              <a:gd name="adj" fmla="val 25000"/>
+              <a:gd name="adj" fmla="val 8333"/>
             </a:avLst>
           </a:prstGeom>
           <a:solidFill>
-            <a:srgbClr val="FCE7F3"/>
-          </a:solidFill>
-          <a:ln w="19050">
-            <a:solidFill>
-              <a:srgbClr val="DB2777"/>
-            </a:solidFill>
-            <a:prstDash val="solid"/>
-          </a:ln>
-          <a:effectLst>
-            <a:outerShdw sx="100000" sy="100000" kx="0" ky="0" algn="bl" rotWithShape="0" blurRad="101600" dist="38100" dir="8100000">
-              <a:srgbClr val="000000">
-                <a:alpha val="12000"/>
-              </a:srgbClr>
-            </a:outerShdw>
-          </a:effectLst>
+            <a:srgbClr val="E2E8F0"/>
+          </a:solidFill>
+          <a:ln w="12700">
+            <a:solidFill>
+              <a:srgbClr val="E2E8F0"/>
+            </a:solidFill>
+            <a:prstDash val="solid"/>
+          </a:ln>
         </p:spPr>
       </p:sp>
       <p:sp>
@@ -32312,86 +32712,47 @@
         </p:nvSpPr>
         <p:spPr>
           <a:xfrm>
-            <a:off x="6519672" y="2258568"/>
-            <a:ext cx="1828800" cy="292608"/>
-          </a:xfrm>
-          <a:prstGeom prst="rect">
-            <a:avLst/>
-          </a:prstGeom>
-          <a:noFill/>
-          <a:ln/>
-        </p:spPr>
-        <p:txBody>
-          <a:bodyPr wrap="square" lIns="0" tIns="0" rIns="0" bIns="0" rtlCol="0" anchor="ctr"/>
-          <a:lstStyle/>
-          <a:p>
-            <a:pPr algn="ctr" indent="0" marL="0">
-              <a:buNone/>
-            </a:pPr>
-            <a:r>
-              <a:rPr lang="en-US" sz="1300" b="1" dirty="0">
-                <a:solidFill>
-                  <a:srgbClr val="9D174D"/>
+            <a:off x="365760" y="3273552"/>
+            <a:ext cx="1371600" cy="658368"/>
+          </a:xfrm>
+          <a:prstGeom prst="rect">
+            <a:avLst/>
+          </a:prstGeom>
+          <a:noFill/>
+          <a:ln/>
+        </p:spPr>
+        <p:txBody>
+          <a:bodyPr wrap="square" lIns="0" tIns="0" rIns="0" bIns="0" rtlCol="0" anchor="ctr"/>
+          <a:lstStyle/>
+          <a:p>
+            <a:pPr algn="ctr" indent="0" marL="0">
+              <a:buNone/>
+            </a:pPr>
+            <a:r>
+              <a:rPr lang="en-US" sz="1100" b="1" dirty="0">
+                <a:solidFill>
+                  <a:srgbClr val="475569"/>
                 </a:solidFill>
                 <a:latin typeface="Trebuchet MS" pitchFamily="34" charset="0"/>
                 <a:ea typeface="Trebuchet MS" pitchFamily="34" charset="-122"/>
                 <a:cs typeface="Trebuchet MS" pitchFamily="34" charset="-120"/>
               </a:rPr>
-              <a:t>s</a:t>
-            </a:r>
-            <a:endParaRPr lang="en-US" sz="1300" dirty="0"/>
-          </a:p>
-        </p:txBody>
-      </p:sp>
-      <p:sp>
-        <p:nvSpPr>
-          <p:cNvPr id="24" name="Text 22"/>
-          <p:cNvSpPr/>
-          <p:nvPr/>
-        </p:nvSpPr>
-        <p:spPr>
-          <a:xfrm>
-            <a:off x="6519672" y="2569464"/>
-            <a:ext cx="1828800" cy="201168"/>
-          </a:xfrm>
-          <a:prstGeom prst="rect">
-            <a:avLst/>
-          </a:prstGeom>
-          <a:noFill/>
-          <a:ln/>
-        </p:spPr>
-        <p:txBody>
-          <a:bodyPr wrap="square" lIns="0" tIns="0" rIns="0" bIns="0" rtlCol="0" anchor="t"/>
-          <a:lstStyle/>
-          <a:p>
-            <a:pPr algn="ctr" indent="0" marL="0">
-              <a:buNone/>
-            </a:pPr>
-            <a:r>
-              <a:rPr lang="en-US" sz="850" dirty="0">
-                <a:solidFill>
-                  <a:srgbClr val="475569"/>
-                </a:solidFill>
-                <a:latin typeface="Calibri" pitchFamily="34" charset="0"/>
-                <a:ea typeface="Calibri" pitchFamily="34" charset="-122"/>
-                <a:cs typeface="Calibri" pitchFamily="34" charset="-120"/>
-              </a:rPr>
-              <a:t>more than one</a:t>
-            </a:r>
-            <a:endParaRPr lang="en-US" sz="850" dirty="0"/>
-          </a:p>
-        </p:txBody>
-      </p:sp>
-      <p:sp>
-        <p:nvSpPr>
-          <p:cNvPr id="25" name="Shape 23"/>
-          <p:cNvSpPr/>
-          <p:nvPr/>
-        </p:nvSpPr>
-        <p:spPr>
-          <a:xfrm>
-            <a:off x="365760" y="3273552"/>
-            <a:ext cx="1371600" cy="658368"/>
+              <a:t>Syllables</a:t>
+            </a:r>
+            <a:endParaRPr lang="en-US" sz="1100" dirty="0"/>
+          </a:p>
+        </p:txBody>
+      </p:sp>
+      <p:sp>
+        <p:nvSpPr>
+          <p:cNvPr id="24" name="Shape 22"/>
+          <p:cNvSpPr/>
+          <p:nvPr/>
+        </p:nvSpPr>
+        <p:spPr>
+          <a:xfrm>
+            <a:off x="1874520" y="3273552"/>
+            <a:ext cx="6903720" cy="658368"/>
           </a:xfrm>
           <a:prstGeom prst="rect">
             <a:avLst>
@@ -32399,11 +32760,38 @@
             </a:avLst>
           </a:prstGeom>
           <a:solidFill>
-            <a:srgbClr val="E2E8F0"/>
-          </a:solidFill>
-          <a:ln w="12700">
-            <a:solidFill>
-              <a:srgbClr val="E2E8F0"/>
+            <a:srgbClr val="CCFBF1"/>
+          </a:solidFill>
+          <a:ln w="12700">
+            <a:solidFill>
+              <a:srgbClr val="0D9488"/>
+            </a:solidFill>
+            <a:prstDash val="solid"/>
+          </a:ln>
+        </p:spPr>
+      </p:sp>
+      <p:sp>
+        <p:nvSpPr>
+          <p:cNvPr id="25" name="Shape 23"/>
+          <p:cNvSpPr/>
+          <p:nvPr/>
+        </p:nvSpPr>
+        <p:spPr>
+          <a:xfrm>
+            <a:off x="2999232" y="3364992"/>
+            <a:ext cx="1645920" cy="475488"/>
+          </a:xfrm>
+          <a:prstGeom prst="rect">
+            <a:avLst>
+              <a:gd name="adj" fmla="val 9615"/>
+            </a:avLst>
+          </a:prstGeom>
+          <a:solidFill>
+            <a:srgbClr val="FFFFFF"/>
+          </a:solidFill>
+          <a:ln w="12700">
+            <a:solidFill>
+              <a:srgbClr val="0D9488"/>
             </a:solidFill>
             <a:prstDash val="solid"/>
           </a:ln>
@@ -32417,63 +32805,75 @@
         </p:nvSpPr>
         <p:spPr>
           <a:xfrm>
-            <a:off x="365760" y="3273552"/>
-            <a:ext cx="1371600" cy="658368"/>
-          </a:xfrm>
-          <a:prstGeom prst="rect">
-            <a:avLst/>
-          </a:prstGeom>
-          <a:noFill/>
-          <a:ln/>
-        </p:spPr>
-        <p:txBody>
-          <a:bodyPr wrap="square" lIns="0" tIns="0" rIns="0" bIns="0" rtlCol="0" anchor="ctr"/>
-          <a:lstStyle/>
-          <a:p>
-            <a:pPr algn="ctr" indent="0" marL="0">
-              <a:buNone/>
-            </a:pPr>
-            <a:r>
-              <a:rPr lang="en-US" sz="1100" b="1" dirty="0">
-                <a:solidFill>
-                  <a:srgbClr val="475569"/>
+            <a:off x="2999232" y="3364992"/>
+            <a:ext cx="1645920" cy="475488"/>
+          </a:xfrm>
+          <a:prstGeom prst="rect">
+            <a:avLst/>
+          </a:prstGeom>
+          <a:noFill/>
+          <a:ln/>
+        </p:spPr>
+        <p:txBody>
+          <a:bodyPr wrap="square" lIns="0" tIns="0" rIns="0" bIns="0" rtlCol="0" anchor="ctr"/>
+          <a:lstStyle/>
+          <a:p>
+            <a:pPr algn="ctr" indent="0" marL="0">
+              <a:buNone/>
+            </a:pPr>
+            <a:r>
+              <a:rPr lang="en-US" sz="1400" b="1" dirty="0">
+                <a:solidFill>
+                  <a:srgbClr val="0D9488"/>
                 </a:solidFill>
                 <a:latin typeface="Trebuchet MS" pitchFamily="34" charset="0"/>
                 <a:ea typeface="Trebuchet MS" pitchFamily="34" charset="-122"/>
                 <a:cs typeface="Trebuchet MS" pitchFamily="34" charset="-120"/>
               </a:rPr>
-              <a:t>Syllables</a:t>
-            </a:r>
-            <a:endParaRPr lang="en-US" sz="1100" dirty="0"/>
-          </a:p>
-        </p:txBody>
-      </p:sp>
-      <p:sp>
-        <p:nvSpPr>
-          <p:cNvPr id="27" name="Shape 25"/>
-          <p:cNvSpPr/>
-          <p:nvPr/>
-        </p:nvSpPr>
-        <p:spPr>
-          <a:xfrm>
-            <a:off x="1874520" y="3273552"/>
-            <a:ext cx="6903720" cy="658368"/>
-          </a:xfrm>
-          <a:prstGeom prst="rect">
-            <a:avLst>
-              <a:gd name="adj" fmla="val 8333"/>
-            </a:avLst>
-          </a:prstGeom>
-          <a:solidFill>
-            <a:srgbClr val="CCFBF1"/>
-          </a:solidFill>
-          <a:ln w="12700">
-            <a:solidFill>
-              <a:srgbClr val="0D9488"/>
-            </a:solidFill>
-            <a:prstDash val="solid"/>
-          </a:ln>
-        </p:spPr>
+              <a:t>cred</a:t>
+            </a:r>
+            <a:endParaRPr lang="en-US" sz="1400" dirty="0"/>
+          </a:p>
+        </p:txBody>
+      </p:sp>
+      <p:sp>
+        <p:nvSpPr>
+          <p:cNvPr id="27" name="Text 25"/>
+          <p:cNvSpPr/>
+          <p:nvPr/>
+        </p:nvSpPr>
+        <p:spPr>
+          <a:xfrm>
+            <a:off x="4645152" y="3364992"/>
+            <a:ext cx="1097280" cy="475488"/>
+          </a:xfrm>
+          <a:prstGeom prst="rect">
+            <a:avLst/>
+          </a:prstGeom>
+          <a:noFill/>
+          <a:ln/>
+        </p:spPr>
+        <p:txBody>
+          <a:bodyPr wrap="square" lIns="0" tIns="0" rIns="0" bIns="0" rtlCol="0" anchor="ctr"/>
+          <a:lstStyle/>
+          <a:p>
+            <a:pPr algn="ctr" indent="0" marL="0">
+              <a:buNone/>
+            </a:pPr>
+            <a:r>
+              <a:rPr lang="en-US" sz="1600" b="1" dirty="0">
+                <a:solidFill>
+                  <a:srgbClr val="0D9488"/>
+                </a:solidFill>
+                <a:latin typeface="Trebuchet MS" pitchFamily="34" charset="0"/>
+                <a:ea typeface="Trebuchet MS" pitchFamily="34" charset="-122"/>
+                <a:cs typeface="Trebuchet MS" pitchFamily="34" charset="-120"/>
+              </a:rPr>
+              <a:t>·</a:t>
+            </a:r>
+            <a:endParaRPr lang="en-US" sz="1600" dirty="0"/>
+          </a:p>
+        </p:txBody>
       </p:sp>
       <p:sp>
         <p:nvSpPr>
@@ -32483,7 +32883,7 @@
         </p:nvSpPr>
         <p:spPr>
           <a:xfrm>
-            <a:off x="2313432" y="3364992"/>
+            <a:off x="5742432" y="3364992"/>
             <a:ext cx="1645920" cy="475488"/>
           </a:xfrm>
           <a:prstGeom prst="rect">
@@ -32510,7 +32910,7 @@
         </p:nvSpPr>
         <p:spPr>
           <a:xfrm>
-            <a:off x="2313432" y="3364992"/>
+            <a:off x="5742432" y="3364992"/>
             <a:ext cx="1645920" cy="475488"/>
           </a:xfrm>
           <a:prstGeom prst="rect">
@@ -32535,7 +32935,7 @@
                 <a:ea typeface="Trebuchet MS" pitchFamily="34" charset="-122"/>
                 <a:cs typeface="Trebuchet MS" pitchFamily="34" charset="-120"/>
               </a:rPr>
-              <a:t>cre</a:t>
+              <a:t>it</a:t>
             </a:r>
             <a:endParaRPr lang="en-US" sz="1400" dirty="0"/>
           </a:p>
@@ -32543,224 +32943,80 @@
       </p:sp>
       <p:sp>
         <p:nvSpPr>
-          <p:cNvPr id="30" name="Text 28"/>
-          <p:cNvSpPr/>
-          <p:nvPr/>
-        </p:nvSpPr>
-        <p:spPr>
-          <a:xfrm>
-            <a:off x="3959352" y="3364992"/>
-            <a:ext cx="411480" cy="475488"/>
-          </a:xfrm>
-          <a:prstGeom prst="rect">
-            <a:avLst/>
-          </a:prstGeom>
-          <a:noFill/>
-          <a:ln/>
-        </p:spPr>
-        <p:txBody>
-          <a:bodyPr wrap="square" lIns="0" tIns="0" rIns="0" bIns="0" rtlCol="0" anchor="ctr"/>
-          <a:lstStyle/>
-          <a:p>
-            <a:pPr algn="ctr" indent="0" marL="0">
-              <a:buNone/>
-            </a:pPr>
-            <a:r>
-              <a:rPr lang="en-US" sz="1600" b="1" dirty="0">
-                <a:solidFill>
-                  <a:srgbClr val="0D9488"/>
+          <p:cNvPr id="30" name="Shape 28"/>
+          <p:cNvSpPr/>
+          <p:nvPr/>
+        </p:nvSpPr>
+        <p:spPr>
+          <a:xfrm>
+            <a:off x="365760" y="4096512"/>
+            <a:ext cx="1371600" cy="804672"/>
+          </a:xfrm>
+          <a:prstGeom prst="rect">
+            <a:avLst>
+              <a:gd name="adj" fmla="val 6818"/>
+            </a:avLst>
+          </a:prstGeom>
+          <a:solidFill>
+            <a:srgbClr val="E2E8F0"/>
+          </a:solidFill>
+          <a:ln w="12700">
+            <a:solidFill>
+              <a:srgbClr val="E2E8F0"/>
+            </a:solidFill>
+            <a:prstDash val="solid"/>
+          </a:ln>
+        </p:spPr>
+      </p:sp>
+      <p:sp>
+        <p:nvSpPr>
+          <p:cNvPr id="31" name="Text 29"/>
+          <p:cNvSpPr/>
+          <p:nvPr/>
+        </p:nvSpPr>
+        <p:spPr>
+          <a:xfrm>
+            <a:off x="365760" y="4096512"/>
+            <a:ext cx="1371600" cy="804672"/>
+          </a:xfrm>
+          <a:prstGeom prst="rect">
+            <a:avLst/>
+          </a:prstGeom>
+          <a:noFill/>
+          <a:ln/>
+        </p:spPr>
+        <p:txBody>
+          <a:bodyPr wrap="square" lIns="0" tIns="0" rIns="0" bIns="0" rtlCol="0" anchor="ctr"/>
+          <a:lstStyle/>
+          <a:p>
+            <a:pPr algn="ctr" indent="0" marL="0">
+              <a:buNone/>
+            </a:pPr>
+            <a:r>
+              <a:rPr lang="en-US" sz="1100" b="1" dirty="0">
+                <a:solidFill>
+                  <a:srgbClr val="475569"/>
                 </a:solidFill>
                 <a:latin typeface="Trebuchet MS" pitchFamily="34" charset="0"/>
                 <a:ea typeface="Trebuchet MS" pitchFamily="34" charset="-122"/>
                 <a:cs typeface="Trebuchet MS" pitchFamily="34" charset="-120"/>
               </a:rPr>
-              <a:t>·</a:t>
-            </a:r>
-            <a:endParaRPr lang="en-US" sz="1600" dirty="0"/>
-          </a:p>
-        </p:txBody>
-      </p:sp>
-      <p:sp>
-        <p:nvSpPr>
-          <p:cNvPr id="31" name="Shape 29"/>
-          <p:cNvSpPr/>
-          <p:nvPr/>
-        </p:nvSpPr>
-        <p:spPr>
-          <a:xfrm>
-            <a:off x="4370832" y="3364992"/>
-            <a:ext cx="1645920" cy="475488"/>
-          </a:xfrm>
-          <a:prstGeom prst="rect">
-            <a:avLst>
-              <a:gd name="adj" fmla="val 9615"/>
-            </a:avLst>
-          </a:prstGeom>
-          <a:solidFill>
-            <a:srgbClr val="FFFFFF"/>
-          </a:solidFill>
-          <a:ln w="12700">
-            <a:solidFill>
-              <a:srgbClr val="0D9488"/>
-            </a:solidFill>
-            <a:prstDash val="solid"/>
-          </a:ln>
-        </p:spPr>
-      </p:sp>
-      <p:sp>
-        <p:nvSpPr>
-          <p:cNvPr id="32" name="Text 30"/>
-          <p:cNvSpPr/>
-          <p:nvPr/>
-        </p:nvSpPr>
-        <p:spPr>
-          <a:xfrm>
-            <a:off x="4370832" y="3364992"/>
-            <a:ext cx="1645920" cy="475488"/>
-          </a:xfrm>
-          <a:prstGeom prst="rect">
-            <a:avLst/>
-          </a:prstGeom>
-          <a:noFill/>
-          <a:ln/>
-        </p:spPr>
-        <p:txBody>
-          <a:bodyPr wrap="square" lIns="0" tIns="0" rIns="0" bIns="0" rtlCol="0" anchor="ctr"/>
-          <a:lstStyle/>
-          <a:p>
-            <a:pPr algn="ctr" indent="0" marL="0">
-              <a:buNone/>
-            </a:pPr>
-            <a:r>
-              <a:rPr lang="en-US" sz="1400" b="1" dirty="0">
-                <a:solidFill>
-                  <a:srgbClr val="0D9488"/>
-                </a:solidFill>
-                <a:latin typeface="Trebuchet MS" pitchFamily="34" charset="0"/>
-                <a:ea typeface="Trebuchet MS" pitchFamily="34" charset="-122"/>
-                <a:cs typeface="Trebuchet MS" pitchFamily="34" charset="-120"/>
-              </a:rPr>
-              <a:t>den</a:t>
-            </a:r>
-            <a:endParaRPr lang="en-US" sz="1400" dirty="0"/>
-          </a:p>
-        </p:txBody>
-      </p:sp>
-      <p:sp>
-        <p:nvSpPr>
-          <p:cNvPr id="33" name="Text 31"/>
-          <p:cNvSpPr/>
-          <p:nvPr/>
-        </p:nvSpPr>
-        <p:spPr>
-          <a:xfrm>
-            <a:off x="6016752" y="3364992"/>
-            <a:ext cx="411480" cy="475488"/>
-          </a:xfrm>
-          <a:prstGeom prst="rect">
-            <a:avLst/>
-          </a:prstGeom>
-          <a:noFill/>
-          <a:ln/>
-        </p:spPr>
-        <p:txBody>
-          <a:bodyPr wrap="square" lIns="0" tIns="0" rIns="0" bIns="0" rtlCol="0" anchor="ctr"/>
-          <a:lstStyle/>
-          <a:p>
-            <a:pPr algn="ctr" indent="0" marL="0">
-              <a:buNone/>
-            </a:pPr>
-            <a:r>
-              <a:rPr lang="en-US" sz="1600" b="1" dirty="0">
-                <a:solidFill>
-                  <a:srgbClr val="0D9488"/>
-                </a:solidFill>
-                <a:latin typeface="Trebuchet MS" pitchFamily="34" charset="0"/>
-                <a:ea typeface="Trebuchet MS" pitchFamily="34" charset="-122"/>
-                <a:cs typeface="Trebuchet MS" pitchFamily="34" charset="-120"/>
-              </a:rPr>
-              <a:t>·</a:t>
-            </a:r>
-            <a:endParaRPr lang="en-US" sz="1600" dirty="0"/>
-          </a:p>
-        </p:txBody>
-      </p:sp>
-      <p:sp>
-        <p:nvSpPr>
-          <p:cNvPr id="34" name="Shape 32"/>
-          <p:cNvSpPr/>
-          <p:nvPr/>
-        </p:nvSpPr>
-        <p:spPr>
-          <a:xfrm>
-            <a:off x="6428232" y="3364992"/>
-            <a:ext cx="1645920" cy="475488"/>
-          </a:xfrm>
-          <a:prstGeom prst="rect">
-            <a:avLst>
-              <a:gd name="adj" fmla="val 9615"/>
-            </a:avLst>
-          </a:prstGeom>
-          <a:solidFill>
-            <a:srgbClr val="FFFFFF"/>
-          </a:solidFill>
-          <a:ln w="12700">
-            <a:solidFill>
-              <a:srgbClr val="0D9488"/>
-            </a:solidFill>
-            <a:prstDash val="solid"/>
-          </a:ln>
-        </p:spPr>
-      </p:sp>
-      <p:sp>
-        <p:nvSpPr>
-          <p:cNvPr id="35" name="Text 33"/>
-          <p:cNvSpPr/>
-          <p:nvPr/>
-        </p:nvSpPr>
-        <p:spPr>
-          <a:xfrm>
-            <a:off x="6428232" y="3364992"/>
-            <a:ext cx="1645920" cy="475488"/>
-          </a:xfrm>
-          <a:prstGeom prst="rect">
-            <a:avLst/>
-          </a:prstGeom>
-          <a:noFill/>
-          <a:ln/>
-        </p:spPr>
-        <p:txBody>
-          <a:bodyPr wrap="square" lIns="0" tIns="0" rIns="0" bIns="0" rtlCol="0" anchor="ctr"/>
-          <a:lstStyle/>
-          <a:p>
-            <a:pPr algn="ctr" indent="0" marL="0">
-              <a:buNone/>
-            </a:pPr>
-            <a:r>
-              <a:rPr lang="en-US" sz="1400" b="1" dirty="0">
-                <a:solidFill>
-                  <a:srgbClr val="0D9488"/>
-                </a:solidFill>
-                <a:latin typeface="Trebuchet MS" pitchFamily="34" charset="0"/>
-                <a:ea typeface="Trebuchet MS" pitchFamily="34" charset="-122"/>
-                <a:cs typeface="Trebuchet MS" pitchFamily="34" charset="-120"/>
-              </a:rPr>
-              <a:t>tials</a:t>
-            </a:r>
-            <a:endParaRPr lang="en-US" sz="1400" dirty="0"/>
-          </a:p>
-        </p:txBody>
-      </p:sp>
-      <p:sp>
-        <p:nvSpPr>
-          <p:cNvPr id="36" name="Shape 34"/>
-          <p:cNvSpPr/>
-          <p:nvPr/>
-        </p:nvSpPr>
-        <p:spPr>
-          <a:xfrm>
-            <a:off x="365760" y="4096512"/>
-            <a:ext cx="1371600" cy="804672"/>
+              <a:t>Phonemes</a:t>
+            </a:r>
+            <a:endParaRPr lang="en-US" sz="1100" dirty="0"/>
+          </a:p>
+        </p:txBody>
+      </p:sp>
+      <p:sp>
+        <p:nvSpPr>
+          <p:cNvPr id="32" name="Shape 30"/>
+          <p:cNvSpPr/>
+          <p:nvPr/>
+        </p:nvSpPr>
+        <p:spPr>
+          <a:xfrm>
+            <a:off x="1874520" y="4096512"/>
+            <a:ext cx="6903720" cy="804672"/>
           </a:xfrm>
           <a:prstGeom prst="rect">
             <a:avLst>
@@ -32768,85 +33024,19 @@
             </a:avLst>
           </a:prstGeom>
           <a:solidFill>
-            <a:srgbClr val="E2E8F0"/>
+            <a:srgbClr val="F8FAFC"/>
           </a:solidFill>
           <a:ln w="12700">
             <a:solidFill>
               <a:srgbClr val="E2E8F0"/>
             </a:solidFill>
-            <a:prstDash val="solid"/>
-          </a:ln>
-        </p:spPr>
-      </p:sp>
-      <p:sp>
-        <p:nvSpPr>
-          <p:cNvPr id="37" name="Text 35"/>
-          <p:cNvSpPr/>
-          <p:nvPr/>
-        </p:nvSpPr>
-        <p:spPr>
-          <a:xfrm>
-            <a:off x="365760" y="4096512"/>
-            <a:ext cx="1371600" cy="804672"/>
-          </a:xfrm>
-          <a:prstGeom prst="rect">
-            <a:avLst/>
-          </a:prstGeom>
-          <a:noFill/>
-          <a:ln/>
-        </p:spPr>
-        <p:txBody>
-          <a:bodyPr wrap="square" lIns="0" tIns="0" rIns="0" bIns="0" rtlCol="0" anchor="ctr"/>
-          <a:lstStyle/>
-          <a:p>
-            <a:pPr algn="ctr" indent="0" marL="0">
-              <a:buNone/>
-            </a:pPr>
-            <a:r>
-              <a:rPr lang="en-US" sz="1100" b="1" dirty="0">
-                <a:solidFill>
-                  <a:srgbClr val="475569"/>
-                </a:solidFill>
-                <a:latin typeface="Trebuchet MS" pitchFamily="34" charset="0"/>
-                <a:ea typeface="Trebuchet MS" pitchFamily="34" charset="-122"/>
-                <a:cs typeface="Trebuchet MS" pitchFamily="34" charset="-120"/>
-              </a:rPr>
-              <a:t>Phonemes</a:t>
-            </a:r>
-            <a:endParaRPr lang="en-US" sz="1100" dirty="0"/>
-          </a:p>
-        </p:txBody>
-      </p:sp>
-      <p:sp>
-        <p:nvSpPr>
-          <p:cNvPr id="38" name="Shape 36"/>
-          <p:cNvSpPr/>
-          <p:nvPr/>
-        </p:nvSpPr>
-        <p:spPr>
-          <a:xfrm>
-            <a:off x="1874520" y="4096512"/>
-            <a:ext cx="6903720" cy="804672"/>
-          </a:xfrm>
-          <a:prstGeom prst="rect">
-            <a:avLst>
-              <a:gd name="adj" fmla="val 6818"/>
-            </a:avLst>
-          </a:prstGeom>
-          <a:solidFill>
-            <a:srgbClr val="F8FAFC"/>
-          </a:solidFill>
-          <a:ln w="12700">
-            <a:solidFill>
-              <a:srgbClr val="E2E8F0"/>
-            </a:solidFill>
             <a:prstDash val="dash"/>
           </a:ln>
         </p:spPr>
       </p:sp>
       <p:sp>
         <p:nvSpPr>
-          <p:cNvPr id="39" name="Text 37"/>
+          <p:cNvPr id="33" name="Text 31"/>
           <p:cNvSpPr/>
           <p:nvPr/>
         </p:nvSpPr>
@@ -33308,7 +33498,7 @@
                 <a:ea typeface="Trebuchet MS" pitchFamily="34" charset="-122"/>
                 <a:cs typeface="Trebuchet MS" pitchFamily="34" charset="-120"/>
               </a:rPr>
-              <a:t>credentials</a:t>
+              <a:t>credit</a:t>
             </a:r>
             <a:endParaRPr lang="en-US" sz="2800" dirty="0"/>
           </a:p>
@@ -33388,7 +33578,7 @@
         </p:nvSpPr>
         <p:spPr>
           <a:xfrm>
-            <a:off x="2221992" y="2258568"/>
+            <a:off x="2938272" y="2258568"/>
             <a:ext cx="1828800" cy="292608"/>
           </a:xfrm>
           <a:prstGeom prst="rect">
@@ -33422,7 +33612,7 @@
         </p:nvSpPr>
         <p:spPr>
           <a:xfrm>
-            <a:off x="2221992" y="2258568"/>
+            <a:off x="2938272" y="2258568"/>
             <a:ext cx="1828800" cy="292608"/>
           </a:xfrm>
           <a:prstGeom prst="rect">
@@ -33461,7 +33651,7 @@
         </p:nvSpPr>
         <p:spPr>
           <a:xfrm>
-            <a:off x="2221992" y="2569464"/>
+            <a:off x="2938272" y="2569464"/>
             <a:ext cx="1828800" cy="201168"/>
           </a:xfrm>
           <a:prstGeom prst="rect">
@@ -33500,7 +33690,7 @@
         </p:nvSpPr>
         <p:spPr>
           <a:xfrm>
-            <a:off x="4370832" y="2258568"/>
+            <a:off x="5803392" y="2258568"/>
             <a:ext cx="1828800" cy="292608"/>
           </a:xfrm>
           <a:prstGeom prst="rect">
@@ -33534,7 +33724,7 @@
         </p:nvSpPr>
         <p:spPr>
           <a:xfrm>
-            <a:off x="4370832" y="2258568"/>
+            <a:off x="5803392" y="2258568"/>
             <a:ext cx="1828800" cy="292608"/>
           </a:xfrm>
           <a:prstGeom prst="rect">
@@ -33559,7 +33749,7 @@
                 <a:ea typeface="Trebuchet MS" pitchFamily="34" charset="-122"/>
                 <a:cs typeface="Trebuchet MS" pitchFamily="34" charset="-120"/>
               </a:rPr>
-              <a:t>ential</a:t>
+              <a:t>it</a:t>
             </a:r>
             <a:endParaRPr lang="en-US" sz="1300" dirty="0"/>
           </a:p>
@@ -33573,7 +33763,7 @@
         </p:nvSpPr>
         <p:spPr>
           <a:xfrm>
-            <a:off x="4370832" y="2569464"/>
+            <a:off x="5803392" y="2569464"/>
             <a:ext cx="1828800" cy="201168"/>
           </a:xfrm>
           <a:prstGeom prst="rect">
@@ -33598,7 +33788,7 @@
                 <a:ea typeface="Calibri" pitchFamily="34" charset="-122"/>
                 <a:cs typeface="Calibri" pitchFamily="34" charset="-120"/>
               </a:rPr>
-              <a:t>relating to</a:t>
+              <a:t>result or act of</a:t>
             </a:r>
             <a:endParaRPr lang="en-US" sz="850" dirty="0"/>
           </a:p>
@@ -33612,30 +33802,23 @@
         </p:nvSpPr>
         <p:spPr>
           <a:xfrm>
-            <a:off x="6519672" y="2258568"/>
-            <a:ext cx="1828800" cy="292608"/>
+            <a:off x="365760" y="3273552"/>
+            <a:ext cx="1371600" cy="658368"/>
           </a:xfrm>
           <a:prstGeom prst="rect">
             <a:avLst>
-              <a:gd name="adj" fmla="val 25000"/>
+              <a:gd name="adj" fmla="val 8333"/>
             </a:avLst>
           </a:prstGeom>
           <a:solidFill>
-            <a:srgbClr val="FCE7F3"/>
-          </a:solidFill>
-          <a:ln w="19050">
-            <a:solidFill>
-              <a:srgbClr val="DB2777"/>
-            </a:solidFill>
-            <a:prstDash val="solid"/>
-          </a:ln>
-          <a:effectLst>
-            <a:outerShdw sx="100000" sy="100000" kx="0" ky="0" algn="bl" rotWithShape="0" blurRad="101600" dist="38100" dir="8100000">
-              <a:srgbClr val="000000">
-                <a:alpha val="12000"/>
-              </a:srgbClr>
-            </a:outerShdw>
-          </a:effectLst>
+            <a:srgbClr val="E2E8F0"/>
+          </a:solidFill>
+          <a:ln w="12700">
+            <a:solidFill>
+              <a:srgbClr val="E2E8F0"/>
+            </a:solidFill>
+            <a:prstDash val="solid"/>
+          </a:ln>
         </p:spPr>
       </p:sp>
       <p:sp>
@@ -33646,47 +33829,404 @@
         </p:nvSpPr>
         <p:spPr>
           <a:xfrm>
-            <a:off x="6519672" y="2258568"/>
-            <a:ext cx="1828800" cy="292608"/>
-          </a:xfrm>
-          <a:prstGeom prst="rect">
-            <a:avLst/>
-          </a:prstGeom>
-          <a:noFill/>
-          <a:ln/>
-        </p:spPr>
-        <p:txBody>
-          <a:bodyPr wrap="square" lIns="0" tIns="0" rIns="0" bIns="0" rtlCol="0" anchor="ctr"/>
-          <a:lstStyle/>
-          <a:p>
-            <a:pPr algn="ctr" indent="0" marL="0">
-              <a:buNone/>
-            </a:pPr>
-            <a:r>
-              <a:rPr lang="en-US" sz="1300" b="1" dirty="0">
-                <a:solidFill>
-                  <a:srgbClr val="9D174D"/>
+            <a:off x="365760" y="3273552"/>
+            <a:ext cx="1371600" cy="658368"/>
+          </a:xfrm>
+          <a:prstGeom prst="rect">
+            <a:avLst/>
+          </a:prstGeom>
+          <a:noFill/>
+          <a:ln/>
+        </p:spPr>
+        <p:txBody>
+          <a:bodyPr wrap="square" lIns="0" tIns="0" rIns="0" bIns="0" rtlCol="0" anchor="ctr"/>
+          <a:lstStyle/>
+          <a:p>
+            <a:pPr algn="ctr" indent="0" marL="0">
+              <a:buNone/>
+            </a:pPr>
+            <a:r>
+              <a:rPr lang="en-US" sz="1100" b="1" dirty="0">
+                <a:solidFill>
+                  <a:srgbClr val="475569"/>
                 </a:solidFill>
                 <a:latin typeface="Trebuchet MS" pitchFamily="34" charset="0"/>
                 <a:ea typeface="Trebuchet MS" pitchFamily="34" charset="-122"/>
                 <a:cs typeface="Trebuchet MS" pitchFamily="34" charset="-120"/>
               </a:rPr>
-              <a:t>s</a:t>
-            </a:r>
-            <a:endParaRPr lang="en-US" sz="1300" dirty="0"/>
-          </a:p>
-        </p:txBody>
-      </p:sp>
-      <p:sp>
-        <p:nvSpPr>
-          <p:cNvPr id="24" name="Text 22"/>
-          <p:cNvSpPr/>
-          <p:nvPr/>
-        </p:nvSpPr>
-        <p:spPr>
-          <a:xfrm>
-            <a:off x="6519672" y="2569464"/>
-            <a:ext cx="1828800" cy="201168"/>
+              <a:t>Syllables</a:t>
+            </a:r>
+            <a:endParaRPr lang="en-US" sz="1100" dirty="0"/>
+          </a:p>
+        </p:txBody>
+      </p:sp>
+      <p:sp>
+        <p:nvSpPr>
+          <p:cNvPr id="24" name="Shape 22"/>
+          <p:cNvSpPr/>
+          <p:nvPr/>
+        </p:nvSpPr>
+        <p:spPr>
+          <a:xfrm>
+            <a:off x="1874520" y="3273552"/>
+            <a:ext cx="6903720" cy="658368"/>
+          </a:xfrm>
+          <a:prstGeom prst="rect">
+            <a:avLst>
+              <a:gd name="adj" fmla="val 8333"/>
+            </a:avLst>
+          </a:prstGeom>
+          <a:solidFill>
+            <a:srgbClr val="CCFBF1"/>
+          </a:solidFill>
+          <a:ln w="12700">
+            <a:solidFill>
+              <a:srgbClr val="0D9488"/>
+            </a:solidFill>
+            <a:prstDash val="solid"/>
+          </a:ln>
+        </p:spPr>
+      </p:sp>
+      <p:sp>
+        <p:nvSpPr>
+          <p:cNvPr id="25" name="Shape 23"/>
+          <p:cNvSpPr/>
+          <p:nvPr/>
+        </p:nvSpPr>
+        <p:spPr>
+          <a:xfrm>
+            <a:off x="2999232" y="3364992"/>
+            <a:ext cx="1645920" cy="475488"/>
+          </a:xfrm>
+          <a:prstGeom prst="rect">
+            <a:avLst>
+              <a:gd name="adj" fmla="val 9615"/>
+            </a:avLst>
+          </a:prstGeom>
+          <a:solidFill>
+            <a:srgbClr val="FFFFFF"/>
+          </a:solidFill>
+          <a:ln w="12700">
+            <a:solidFill>
+              <a:srgbClr val="0D9488"/>
+            </a:solidFill>
+            <a:prstDash val="solid"/>
+          </a:ln>
+        </p:spPr>
+      </p:sp>
+      <p:sp>
+        <p:nvSpPr>
+          <p:cNvPr id="26" name="Text 24"/>
+          <p:cNvSpPr/>
+          <p:nvPr/>
+        </p:nvSpPr>
+        <p:spPr>
+          <a:xfrm>
+            <a:off x="2999232" y="3364992"/>
+            <a:ext cx="1645920" cy="475488"/>
+          </a:xfrm>
+          <a:prstGeom prst="rect">
+            <a:avLst/>
+          </a:prstGeom>
+          <a:noFill/>
+          <a:ln/>
+        </p:spPr>
+        <p:txBody>
+          <a:bodyPr wrap="square" lIns="0" tIns="0" rIns="0" bIns="0" rtlCol="0" anchor="ctr"/>
+          <a:lstStyle/>
+          <a:p>
+            <a:pPr algn="ctr" indent="0" marL="0">
+              <a:buNone/>
+            </a:pPr>
+            <a:r>
+              <a:rPr lang="en-US" sz="1400" b="1" dirty="0">
+                <a:solidFill>
+                  <a:srgbClr val="0D9488"/>
+                </a:solidFill>
+                <a:latin typeface="Trebuchet MS" pitchFamily="34" charset="0"/>
+                <a:ea typeface="Trebuchet MS" pitchFamily="34" charset="-122"/>
+                <a:cs typeface="Trebuchet MS" pitchFamily="34" charset="-120"/>
+              </a:rPr>
+              <a:t>cred</a:t>
+            </a:r>
+            <a:endParaRPr lang="en-US" sz="1400" dirty="0"/>
+          </a:p>
+        </p:txBody>
+      </p:sp>
+      <p:sp>
+        <p:nvSpPr>
+          <p:cNvPr id="27" name="Text 25"/>
+          <p:cNvSpPr/>
+          <p:nvPr/>
+        </p:nvSpPr>
+        <p:spPr>
+          <a:xfrm>
+            <a:off x="4645152" y="3364992"/>
+            <a:ext cx="1097280" cy="475488"/>
+          </a:xfrm>
+          <a:prstGeom prst="rect">
+            <a:avLst/>
+          </a:prstGeom>
+          <a:noFill/>
+          <a:ln/>
+        </p:spPr>
+        <p:txBody>
+          <a:bodyPr wrap="square" lIns="0" tIns="0" rIns="0" bIns="0" rtlCol="0" anchor="ctr"/>
+          <a:lstStyle/>
+          <a:p>
+            <a:pPr algn="ctr" indent="0" marL="0">
+              <a:buNone/>
+            </a:pPr>
+            <a:r>
+              <a:rPr lang="en-US" sz="1600" b="1" dirty="0">
+                <a:solidFill>
+                  <a:srgbClr val="0D9488"/>
+                </a:solidFill>
+                <a:latin typeface="Trebuchet MS" pitchFamily="34" charset="0"/>
+                <a:ea typeface="Trebuchet MS" pitchFamily="34" charset="-122"/>
+                <a:cs typeface="Trebuchet MS" pitchFamily="34" charset="-120"/>
+              </a:rPr>
+              <a:t>·</a:t>
+            </a:r>
+            <a:endParaRPr lang="en-US" sz="1600" dirty="0"/>
+          </a:p>
+        </p:txBody>
+      </p:sp>
+      <p:sp>
+        <p:nvSpPr>
+          <p:cNvPr id="28" name="Shape 26"/>
+          <p:cNvSpPr/>
+          <p:nvPr/>
+        </p:nvSpPr>
+        <p:spPr>
+          <a:xfrm>
+            <a:off x="5742432" y="3364992"/>
+            <a:ext cx="1645920" cy="475488"/>
+          </a:xfrm>
+          <a:prstGeom prst="rect">
+            <a:avLst>
+              <a:gd name="adj" fmla="val 9615"/>
+            </a:avLst>
+          </a:prstGeom>
+          <a:solidFill>
+            <a:srgbClr val="FFFFFF"/>
+          </a:solidFill>
+          <a:ln w="12700">
+            <a:solidFill>
+              <a:srgbClr val="0D9488"/>
+            </a:solidFill>
+            <a:prstDash val="solid"/>
+          </a:ln>
+        </p:spPr>
+      </p:sp>
+      <p:sp>
+        <p:nvSpPr>
+          <p:cNvPr id="29" name="Text 27"/>
+          <p:cNvSpPr/>
+          <p:nvPr/>
+        </p:nvSpPr>
+        <p:spPr>
+          <a:xfrm>
+            <a:off x="5742432" y="3364992"/>
+            <a:ext cx="1645920" cy="475488"/>
+          </a:xfrm>
+          <a:prstGeom prst="rect">
+            <a:avLst/>
+          </a:prstGeom>
+          <a:noFill/>
+          <a:ln/>
+        </p:spPr>
+        <p:txBody>
+          <a:bodyPr wrap="square" lIns="0" tIns="0" rIns="0" bIns="0" rtlCol="0" anchor="ctr"/>
+          <a:lstStyle/>
+          <a:p>
+            <a:pPr algn="ctr" indent="0" marL="0">
+              <a:buNone/>
+            </a:pPr>
+            <a:r>
+              <a:rPr lang="en-US" sz="1400" b="1" dirty="0">
+                <a:solidFill>
+                  <a:srgbClr val="0D9488"/>
+                </a:solidFill>
+                <a:latin typeface="Trebuchet MS" pitchFamily="34" charset="0"/>
+                <a:ea typeface="Trebuchet MS" pitchFamily="34" charset="-122"/>
+                <a:cs typeface="Trebuchet MS" pitchFamily="34" charset="-120"/>
+              </a:rPr>
+              <a:t>it</a:t>
+            </a:r>
+            <a:endParaRPr lang="en-US" sz="1400" dirty="0"/>
+          </a:p>
+        </p:txBody>
+      </p:sp>
+      <p:sp>
+        <p:nvSpPr>
+          <p:cNvPr id="30" name="Shape 28"/>
+          <p:cNvSpPr/>
+          <p:nvPr/>
+        </p:nvSpPr>
+        <p:spPr>
+          <a:xfrm>
+            <a:off x="365760" y="4096512"/>
+            <a:ext cx="1371600" cy="804672"/>
+          </a:xfrm>
+          <a:prstGeom prst="rect">
+            <a:avLst>
+              <a:gd name="adj" fmla="val 6818"/>
+            </a:avLst>
+          </a:prstGeom>
+          <a:solidFill>
+            <a:srgbClr val="E2E8F0"/>
+          </a:solidFill>
+          <a:ln w="12700">
+            <a:solidFill>
+              <a:srgbClr val="E2E8F0"/>
+            </a:solidFill>
+            <a:prstDash val="solid"/>
+          </a:ln>
+        </p:spPr>
+      </p:sp>
+      <p:sp>
+        <p:nvSpPr>
+          <p:cNvPr id="31" name="Text 29"/>
+          <p:cNvSpPr/>
+          <p:nvPr/>
+        </p:nvSpPr>
+        <p:spPr>
+          <a:xfrm>
+            <a:off x="365760" y="4096512"/>
+            <a:ext cx="1371600" cy="804672"/>
+          </a:xfrm>
+          <a:prstGeom prst="rect">
+            <a:avLst/>
+          </a:prstGeom>
+          <a:noFill/>
+          <a:ln/>
+        </p:spPr>
+        <p:txBody>
+          <a:bodyPr wrap="square" lIns="0" tIns="0" rIns="0" bIns="0" rtlCol="0" anchor="ctr"/>
+          <a:lstStyle/>
+          <a:p>
+            <a:pPr algn="ctr" indent="0" marL="0">
+              <a:buNone/>
+            </a:pPr>
+            <a:r>
+              <a:rPr lang="en-US" sz="1100" b="1" dirty="0">
+                <a:solidFill>
+                  <a:srgbClr val="475569"/>
+                </a:solidFill>
+                <a:latin typeface="Trebuchet MS" pitchFamily="34" charset="0"/>
+                <a:ea typeface="Trebuchet MS" pitchFamily="34" charset="-122"/>
+                <a:cs typeface="Trebuchet MS" pitchFamily="34" charset="-120"/>
+              </a:rPr>
+              <a:t>Phonemes</a:t>
+            </a:r>
+            <a:endParaRPr lang="en-US" sz="1100" dirty="0"/>
+          </a:p>
+        </p:txBody>
+      </p:sp>
+      <p:sp>
+        <p:nvSpPr>
+          <p:cNvPr id="32" name="Shape 30"/>
+          <p:cNvSpPr/>
+          <p:nvPr/>
+        </p:nvSpPr>
+        <p:spPr>
+          <a:xfrm>
+            <a:off x="1874520" y="4096512"/>
+            <a:ext cx="6903720" cy="804672"/>
+          </a:xfrm>
+          <a:prstGeom prst="rect">
+            <a:avLst>
+              <a:gd name="adj" fmla="val 6818"/>
+            </a:avLst>
+          </a:prstGeom>
+          <a:solidFill>
+            <a:srgbClr val="FCE7F3"/>
+          </a:solidFill>
+          <a:ln w="12700">
+            <a:solidFill>
+              <a:srgbClr val="DB2777"/>
+            </a:solidFill>
+            <a:prstDash val="solid"/>
+          </a:ln>
+        </p:spPr>
+      </p:sp>
+      <p:sp>
+        <p:nvSpPr>
+          <p:cNvPr id="33" name="Shape 31"/>
+          <p:cNvSpPr/>
+          <p:nvPr/>
+        </p:nvSpPr>
+        <p:spPr>
+          <a:xfrm>
+            <a:off x="2254649" y="4169664"/>
+            <a:ext cx="685800" cy="384048"/>
+          </a:xfrm>
+          <a:prstGeom prst="rect">
+            <a:avLst>
+              <a:gd name="adj" fmla="val 9524"/>
+            </a:avLst>
+          </a:prstGeom>
+          <a:solidFill>
+            <a:srgbClr val="FFFFFF"/>
+          </a:solidFill>
+          <a:ln w="12700">
+            <a:solidFill>
+              <a:srgbClr val="DB2777"/>
+            </a:solidFill>
+            <a:prstDash val="solid"/>
+          </a:ln>
+        </p:spPr>
+      </p:sp>
+      <p:sp>
+        <p:nvSpPr>
+          <p:cNvPr id="34" name="Text 32"/>
+          <p:cNvSpPr/>
+          <p:nvPr/>
+        </p:nvSpPr>
+        <p:spPr>
+          <a:xfrm>
+            <a:off x="2254649" y="4169664"/>
+            <a:ext cx="685800" cy="384048"/>
+          </a:xfrm>
+          <a:prstGeom prst="rect">
+            <a:avLst/>
+          </a:prstGeom>
+          <a:noFill/>
+          <a:ln/>
+        </p:spPr>
+        <p:txBody>
+          <a:bodyPr wrap="square" lIns="0" tIns="0" rIns="0" bIns="0" rtlCol="0" anchor="ctr"/>
+          <a:lstStyle/>
+          <a:p>
+            <a:pPr algn="ctr" indent="0" marL="0">
+              <a:buNone/>
+            </a:pPr>
+            <a:r>
+              <a:rPr lang="en-US" sz="900" b="1" dirty="0">
+                <a:solidFill>
+                  <a:srgbClr val="9D174D"/>
+                </a:solidFill>
+                <a:latin typeface="Trebuchet MS" pitchFamily="34" charset="0"/>
+                <a:ea typeface="Trebuchet MS" pitchFamily="34" charset="-122"/>
+                <a:cs typeface="Trebuchet MS" pitchFamily="34" charset="-120"/>
+              </a:rPr>
+              <a:t>c</a:t>
+            </a:r>
+            <a:endParaRPr lang="en-US" sz="900" dirty="0"/>
+          </a:p>
+        </p:txBody>
+      </p:sp>
+      <p:sp>
+        <p:nvSpPr>
+          <p:cNvPr id="35" name="Text 33"/>
+          <p:cNvSpPr/>
+          <p:nvPr/>
+        </p:nvSpPr>
+        <p:spPr>
+          <a:xfrm>
+            <a:off x="2254649" y="4572000"/>
+            <a:ext cx="685800" cy="219456"/>
           </a:xfrm>
           <a:prstGeom prst="rect">
             <a:avLst/>
@@ -33702,232 +34242,232 @@
               <a:buNone/>
             </a:pPr>
             <a:r>
-              <a:rPr lang="en-US" sz="850" dirty="0">
-                <a:solidFill>
-                  <a:srgbClr val="475569"/>
+              <a:rPr lang="en-US" sz="750" i="1" dirty="0">
+                <a:solidFill>
+                  <a:srgbClr val="94A3B8"/>
                 </a:solidFill>
                 <a:latin typeface="Calibri" pitchFamily="34" charset="0"/>
                 <a:ea typeface="Calibri" pitchFamily="34" charset="-122"/>
                 <a:cs typeface="Calibri" pitchFamily="34" charset="-120"/>
               </a:rPr>
-              <a:t>more than one</a:t>
-            </a:r>
-            <a:endParaRPr lang="en-US" sz="850" dirty="0"/>
-          </a:p>
-        </p:txBody>
-      </p:sp>
-      <p:sp>
-        <p:nvSpPr>
-          <p:cNvPr id="25" name="Shape 23"/>
-          <p:cNvSpPr/>
-          <p:nvPr/>
-        </p:nvSpPr>
-        <p:spPr>
-          <a:xfrm>
-            <a:off x="365760" y="3273552"/>
-            <a:ext cx="1371600" cy="658368"/>
+              <a:t>/k/</a:t>
+            </a:r>
+            <a:endParaRPr lang="en-US" sz="750" dirty="0"/>
+          </a:p>
+        </p:txBody>
+      </p:sp>
+      <p:sp>
+        <p:nvSpPr>
+          <p:cNvPr id="36" name="Shape 34"/>
+          <p:cNvSpPr/>
+          <p:nvPr/>
+        </p:nvSpPr>
+        <p:spPr>
+          <a:xfrm>
+            <a:off x="3293146" y="4169664"/>
+            <a:ext cx="685800" cy="384048"/>
           </a:xfrm>
           <a:prstGeom prst="rect">
             <a:avLst>
-              <a:gd name="adj" fmla="val 8333"/>
+              <a:gd name="adj" fmla="val 9524"/>
             </a:avLst>
           </a:prstGeom>
           <a:solidFill>
-            <a:srgbClr val="E2E8F0"/>
-          </a:solidFill>
-          <a:ln w="12700">
-            <a:solidFill>
-              <a:srgbClr val="E2E8F0"/>
-            </a:solidFill>
-            <a:prstDash val="solid"/>
-          </a:ln>
-        </p:spPr>
-      </p:sp>
-      <p:sp>
-        <p:nvSpPr>
-          <p:cNvPr id="26" name="Text 24"/>
-          <p:cNvSpPr/>
-          <p:nvPr/>
-        </p:nvSpPr>
-        <p:spPr>
-          <a:xfrm>
-            <a:off x="365760" y="3273552"/>
-            <a:ext cx="1371600" cy="658368"/>
-          </a:xfrm>
-          <a:prstGeom prst="rect">
-            <a:avLst/>
-          </a:prstGeom>
-          <a:noFill/>
-          <a:ln/>
-        </p:spPr>
-        <p:txBody>
-          <a:bodyPr wrap="square" lIns="0" tIns="0" rIns="0" bIns="0" rtlCol="0" anchor="ctr"/>
-          <a:lstStyle/>
-          <a:p>
-            <a:pPr algn="ctr" indent="0" marL="0">
-              <a:buNone/>
-            </a:pPr>
-            <a:r>
-              <a:rPr lang="en-US" sz="1100" b="1" dirty="0">
-                <a:solidFill>
-                  <a:srgbClr val="475569"/>
+            <a:srgbClr val="FFFFFF"/>
+          </a:solidFill>
+          <a:ln w="12700">
+            <a:solidFill>
+              <a:srgbClr val="DB2777"/>
+            </a:solidFill>
+            <a:prstDash val="solid"/>
+          </a:ln>
+        </p:spPr>
+      </p:sp>
+      <p:sp>
+        <p:nvSpPr>
+          <p:cNvPr id="37" name="Text 35"/>
+          <p:cNvSpPr/>
+          <p:nvPr/>
+        </p:nvSpPr>
+        <p:spPr>
+          <a:xfrm>
+            <a:off x="3293146" y="4169664"/>
+            <a:ext cx="685800" cy="384048"/>
+          </a:xfrm>
+          <a:prstGeom prst="rect">
+            <a:avLst/>
+          </a:prstGeom>
+          <a:noFill/>
+          <a:ln/>
+        </p:spPr>
+        <p:txBody>
+          <a:bodyPr wrap="square" lIns="0" tIns="0" rIns="0" bIns="0" rtlCol="0" anchor="ctr"/>
+          <a:lstStyle/>
+          <a:p>
+            <a:pPr algn="ctr" indent="0" marL="0">
+              <a:buNone/>
+            </a:pPr>
+            <a:r>
+              <a:rPr lang="en-US" sz="900" b="1" dirty="0">
+                <a:solidFill>
+                  <a:srgbClr val="9D174D"/>
                 </a:solidFill>
                 <a:latin typeface="Trebuchet MS" pitchFamily="34" charset="0"/>
                 <a:ea typeface="Trebuchet MS" pitchFamily="34" charset="-122"/>
                 <a:cs typeface="Trebuchet MS" pitchFamily="34" charset="-120"/>
               </a:rPr>
-              <a:t>Syllables</a:t>
-            </a:r>
-            <a:endParaRPr lang="en-US" sz="1100" dirty="0"/>
-          </a:p>
-        </p:txBody>
-      </p:sp>
-      <p:sp>
-        <p:nvSpPr>
-          <p:cNvPr id="27" name="Shape 25"/>
-          <p:cNvSpPr/>
-          <p:nvPr/>
-        </p:nvSpPr>
-        <p:spPr>
-          <a:xfrm>
-            <a:off x="1874520" y="3273552"/>
-            <a:ext cx="6903720" cy="658368"/>
+              <a:t>r</a:t>
+            </a:r>
+            <a:endParaRPr lang="en-US" sz="900" dirty="0"/>
+          </a:p>
+        </p:txBody>
+      </p:sp>
+      <p:sp>
+        <p:nvSpPr>
+          <p:cNvPr id="38" name="Shape 36"/>
+          <p:cNvSpPr/>
+          <p:nvPr/>
+        </p:nvSpPr>
+        <p:spPr>
+          <a:xfrm>
+            <a:off x="4331643" y="4169664"/>
+            <a:ext cx="685800" cy="384048"/>
           </a:xfrm>
           <a:prstGeom prst="rect">
             <a:avLst>
-              <a:gd name="adj" fmla="val 8333"/>
+              <a:gd name="adj" fmla="val 9524"/>
             </a:avLst>
           </a:prstGeom>
           <a:solidFill>
-            <a:srgbClr val="CCFBF1"/>
-          </a:solidFill>
-          <a:ln w="12700">
-            <a:solidFill>
-              <a:srgbClr val="0D9488"/>
-            </a:solidFill>
-            <a:prstDash val="solid"/>
-          </a:ln>
-        </p:spPr>
-      </p:sp>
-      <p:sp>
-        <p:nvSpPr>
-          <p:cNvPr id="28" name="Shape 26"/>
-          <p:cNvSpPr/>
-          <p:nvPr/>
-        </p:nvSpPr>
-        <p:spPr>
-          <a:xfrm>
-            <a:off x="2313432" y="3364992"/>
-            <a:ext cx="1645920" cy="475488"/>
-          </a:xfrm>
-          <a:prstGeom prst="rect">
-            <a:avLst>
-              <a:gd name="adj" fmla="val 9615"/>
-            </a:avLst>
-          </a:prstGeom>
-          <a:solidFill>
             <a:srgbClr val="FFFFFF"/>
           </a:solidFill>
           <a:ln w="12700">
             <a:solidFill>
-              <a:srgbClr val="0D9488"/>
-            </a:solidFill>
-            <a:prstDash val="solid"/>
-          </a:ln>
-        </p:spPr>
-      </p:sp>
-      <p:sp>
-        <p:nvSpPr>
-          <p:cNvPr id="29" name="Text 27"/>
-          <p:cNvSpPr/>
-          <p:nvPr/>
-        </p:nvSpPr>
-        <p:spPr>
-          <a:xfrm>
-            <a:off x="2313432" y="3364992"/>
-            <a:ext cx="1645920" cy="475488"/>
-          </a:xfrm>
-          <a:prstGeom prst="rect">
-            <a:avLst/>
-          </a:prstGeom>
-          <a:noFill/>
-          <a:ln/>
-        </p:spPr>
-        <p:txBody>
-          <a:bodyPr wrap="square" lIns="0" tIns="0" rIns="0" bIns="0" rtlCol="0" anchor="ctr"/>
-          <a:lstStyle/>
-          <a:p>
-            <a:pPr algn="ctr" indent="0" marL="0">
-              <a:buNone/>
-            </a:pPr>
-            <a:r>
-              <a:rPr lang="en-US" sz="1400" b="1" dirty="0">
-                <a:solidFill>
-                  <a:srgbClr val="0D9488"/>
+              <a:srgbClr val="DB2777"/>
+            </a:solidFill>
+            <a:prstDash val="solid"/>
+          </a:ln>
+        </p:spPr>
+      </p:sp>
+      <p:sp>
+        <p:nvSpPr>
+          <p:cNvPr id="39" name="Text 37"/>
+          <p:cNvSpPr/>
+          <p:nvPr/>
+        </p:nvSpPr>
+        <p:spPr>
+          <a:xfrm>
+            <a:off x="4331643" y="4169664"/>
+            <a:ext cx="685800" cy="384048"/>
+          </a:xfrm>
+          <a:prstGeom prst="rect">
+            <a:avLst/>
+          </a:prstGeom>
+          <a:noFill/>
+          <a:ln/>
+        </p:spPr>
+        <p:txBody>
+          <a:bodyPr wrap="square" lIns="0" tIns="0" rIns="0" bIns="0" rtlCol="0" anchor="ctr"/>
+          <a:lstStyle/>
+          <a:p>
+            <a:pPr algn="ctr" indent="0" marL="0">
+              <a:buNone/>
+            </a:pPr>
+            <a:r>
+              <a:rPr lang="en-US" sz="900" b="1" dirty="0">
+                <a:solidFill>
+                  <a:srgbClr val="9D174D"/>
                 </a:solidFill>
                 <a:latin typeface="Trebuchet MS" pitchFamily="34" charset="0"/>
                 <a:ea typeface="Trebuchet MS" pitchFamily="34" charset="-122"/>
                 <a:cs typeface="Trebuchet MS" pitchFamily="34" charset="-120"/>
               </a:rPr>
-              <a:t>cre</a:t>
-            </a:r>
-            <a:endParaRPr lang="en-US" sz="1400" dirty="0"/>
-          </a:p>
-        </p:txBody>
-      </p:sp>
-      <p:sp>
-        <p:nvSpPr>
-          <p:cNvPr id="30" name="Text 28"/>
-          <p:cNvSpPr/>
-          <p:nvPr/>
-        </p:nvSpPr>
-        <p:spPr>
-          <a:xfrm>
-            <a:off x="3959352" y="3364992"/>
-            <a:ext cx="411480" cy="475488"/>
-          </a:xfrm>
-          <a:prstGeom prst="rect">
-            <a:avLst/>
-          </a:prstGeom>
-          <a:noFill/>
-          <a:ln/>
-        </p:spPr>
-        <p:txBody>
-          <a:bodyPr wrap="square" lIns="0" tIns="0" rIns="0" bIns="0" rtlCol="0" anchor="ctr"/>
-          <a:lstStyle/>
-          <a:p>
-            <a:pPr algn="ctr" indent="0" marL="0">
-              <a:buNone/>
-            </a:pPr>
-            <a:r>
-              <a:rPr lang="en-US" sz="1600" b="1" dirty="0">
-                <a:solidFill>
-                  <a:srgbClr val="0D9488"/>
+              <a:t>e</a:t>
+            </a:r>
+            <a:endParaRPr lang="en-US" sz="900" dirty="0"/>
+          </a:p>
+        </p:txBody>
+      </p:sp>
+      <p:sp>
+        <p:nvSpPr>
+          <p:cNvPr id="40" name="Shape 38"/>
+          <p:cNvSpPr/>
+          <p:nvPr/>
+        </p:nvSpPr>
+        <p:spPr>
+          <a:xfrm>
+            <a:off x="5370141" y="4169664"/>
+            <a:ext cx="685800" cy="384048"/>
+          </a:xfrm>
+          <a:prstGeom prst="rect">
+            <a:avLst>
+              <a:gd name="adj" fmla="val 9524"/>
+            </a:avLst>
+          </a:prstGeom>
+          <a:solidFill>
+            <a:srgbClr val="FFFFFF"/>
+          </a:solidFill>
+          <a:ln w="12700">
+            <a:solidFill>
+              <a:srgbClr val="DB2777"/>
+            </a:solidFill>
+            <a:prstDash val="solid"/>
+          </a:ln>
+        </p:spPr>
+      </p:sp>
+      <p:sp>
+        <p:nvSpPr>
+          <p:cNvPr id="41" name="Text 39"/>
+          <p:cNvSpPr/>
+          <p:nvPr/>
+        </p:nvSpPr>
+        <p:spPr>
+          <a:xfrm>
+            <a:off x="5370141" y="4169664"/>
+            <a:ext cx="685800" cy="384048"/>
+          </a:xfrm>
+          <a:prstGeom prst="rect">
+            <a:avLst/>
+          </a:prstGeom>
+          <a:noFill/>
+          <a:ln/>
+        </p:spPr>
+        <p:txBody>
+          <a:bodyPr wrap="square" lIns="0" tIns="0" rIns="0" bIns="0" rtlCol="0" anchor="ctr"/>
+          <a:lstStyle/>
+          <a:p>
+            <a:pPr algn="ctr" indent="0" marL="0">
+              <a:buNone/>
+            </a:pPr>
+            <a:r>
+              <a:rPr lang="en-US" sz="900" b="1" dirty="0">
+                <a:solidFill>
+                  <a:srgbClr val="9D174D"/>
                 </a:solidFill>
                 <a:latin typeface="Trebuchet MS" pitchFamily="34" charset="0"/>
                 <a:ea typeface="Trebuchet MS" pitchFamily="34" charset="-122"/>
                 <a:cs typeface="Trebuchet MS" pitchFamily="34" charset="-120"/>
               </a:rPr>
-              <a:t>·</a:t>
-            </a:r>
-            <a:endParaRPr lang="en-US" sz="1600" dirty="0"/>
-          </a:p>
-        </p:txBody>
-      </p:sp>
-      <p:sp>
-        <p:nvSpPr>
-          <p:cNvPr id="31" name="Shape 29"/>
-          <p:cNvSpPr/>
-          <p:nvPr/>
-        </p:nvSpPr>
-        <p:spPr>
-          <a:xfrm>
-            <a:off x="4370832" y="3364992"/>
-            <a:ext cx="1645920" cy="475488"/>
+              <a:t>d</a:t>
+            </a:r>
+            <a:endParaRPr lang="en-US" sz="900" dirty="0"/>
+          </a:p>
+        </p:txBody>
+      </p:sp>
+      <p:sp>
+        <p:nvSpPr>
+          <p:cNvPr id="42" name="Shape 40"/>
+          <p:cNvSpPr/>
+          <p:nvPr/>
+        </p:nvSpPr>
+        <p:spPr>
+          <a:xfrm>
+            <a:off x="6408638" y="4169664"/>
+            <a:ext cx="685800" cy="384048"/>
           </a:xfrm>
           <a:prstGeom prst="rect">
             <a:avLst>
-              <a:gd name="adj" fmla="val 9615"/>
+              <a:gd name="adj" fmla="val 9524"/>
             </a:avLst>
           </a:prstGeom>
           <a:solidFill>
@@ -33935,877 +34475,112 @@
           </a:solidFill>
           <a:ln w="12700">
             <a:solidFill>
-              <a:srgbClr val="0D9488"/>
-            </a:solidFill>
-            <a:prstDash val="solid"/>
-          </a:ln>
-        </p:spPr>
-      </p:sp>
-      <p:sp>
-        <p:nvSpPr>
-          <p:cNvPr id="32" name="Text 30"/>
-          <p:cNvSpPr/>
-          <p:nvPr/>
-        </p:nvSpPr>
-        <p:spPr>
-          <a:xfrm>
-            <a:off x="4370832" y="3364992"/>
-            <a:ext cx="1645920" cy="475488"/>
-          </a:xfrm>
-          <a:prstGeom prst="rect">
-            <a:avLst/>
-          </a:prstGeom>
-          <a:noFill/>
-          <a:ln/>
-        </p:spPr>
-        <p:txBody>
-          <a:bodyPr wrap="square" lIns="0" tIns="0" rIns="0" bIns="0" rtlCol="0" anchor="ctr"/>
-          <a:lstStyle/>
-          <a:p>
-            <a:pPr algn="ctr" indent="0" marL="0">
-              <a:buNone/>
-            </a:pPr>
-            <a:r>
-              <a:rPr lang="en-US" sz="1400" b="1" dirty="0">
-                <a:solidFill>
-                  <a:srgbClr val="0D9488"/>
+              <a:srgbClr val="DB2777"/>
+            </a:solidFill>
+            <a:prstDash val="solid"/>
+          </a:ln>
+        </p:spPr>
+      </p:sp>
+      <p:sp>
+        <p:nvSpPr>
+          <p:cNvPr id="43" name="Text 41"/>
+          <p:cNvSpPr/>
+          <p:nvPr/>
+        </p:nvSpPr>
+        <p:spPr>
+          <a:xfrm>
+            <a:off x="6408638" y="4169664"/>
+            <a:ext cx="685800" cy="384048"/>
+          </a:xfrm>
+          <a:prstGeom prst="rect">
+            <a:avLst/>
+          </a:prstGeom>
+          <a:noFill/>
+          <a:ln/>
+        </p:spPr>
+        <p:txBody>
+          <a:bodyPr wrap="square" lIns="0" tIns="0" rIns="0" bIns="0" rtlCol="0" anchor="ctr"/>
+          <a:lstStyle/>
+          <a:p>
+            <a:pPr algn="ctr" indent="0" marL="0">
+              <a:buNone/>
+            </a:pPr>
+            <a:r>
+              <a:rPr lang="en-US" sz="900" b="1" dirty="0">
+                <a:solidFill>
+                  <a:srgbClr val="9D174D"/>
                 </a:solidFill>
                 <a:latin typeface="Trebuchet MS" pitchFamily="34" charset="0"/>
                 <a:ea typeface="Trebuchet MS" pitchFamily="34" charset="-122"/>
                 <a:cs typeface="Trebuchet MS" pitchFamily="34" charset="-120"/>
               </a:rPr>
-              <a:t>den</a:t>
-            </a:r>
-            <a:endParaRPr lang="en-US" sz="1400" dirty="0"/>
-          </a:p>
-        </p:txBody>
-      </p:sp>
-      <p:sp>
-        <p:nvSpPr>
-          <p:cNvPr id="33" name="Text 31"/>
-          <p:cNvSpPr/>
-          <p:nvPr/>
-        </p:nvSpPr>
-        <p:spPr>
-          <a:xfrm>
-            <a:off x="6016752" y="3364992"/>
-            <a:ext cx="411480" cy="475488"/>
-          </a:xfrm>
-          <a:prstGeom prst="rect">
-            <a:avLst/>
-          </a:prstGeom>
-          <a:noFill/>
-          <a:ln/>
-        </p:spPr>
-        <p:txBody>
-          <a:bodyPr wrap="square" lIns="0" tIns="0" rIns="0" bIns="0" rtlCol="0" anchor="ctr"/>
-          <a:lstStyle/>
-          <a:p>
-            <a:pPr algn="ctr" indent="0" marL="0">
-              <a:buNone/>
-            </a:pPr>
-            <a:r>
-              <a:rPr lang="en-US" sz="1600" b="1" dirty="0">
-                <a:solidFill>
-                  <a:srgbClr val="0D9488"/>
+              <a:t>i</a:t>
+            </a:r>
+            <a:endParaRPr lang="en-US" sz="900" dirty="0"/>
+          </a:p>
+        </p:txBody>
+      </p:sp>
+      <p:sp>
+        <p:nvSpPr>
+          <p:cNvPr id="44" name="Shape 42"/>
+          <p:cNvSpPr/>
+          <p:nvPr/>
+        </p:nvSpPr>
+        <p:spPr>
+          <a:xfrm>
+            <a:off x="7447135" y="4169664"/>
+            <a:ext cx="685800" cy="384048"/>
+          </a:xfrm>
+          <a:prstGeom prst="rect">
+            <a:avLst>
+              <a:gd name="adj" fmla="val 9524"/>
+            </a:avLst>
+          </a:prstGeom>
+          <a:solidFill>
+            <a:srgbClr val="FFFFFF"/>
+          </a:solidFill>
+          <a:ln w="12700">
+            <a:solidFill>
+              <a:srgbClr val="DB2777"/>
+            </a:solidFill>
+            <a:prstDash val="solid"/>
+          </a:ln>
+        </p:spPr>
+      </p:sp>
+      <p:sp>
+        <p:nvSpPr>
+          <p:cNvPr id="45" name="Text 43"/>
+          <p:cNvSpPr/>
+          <p:nvPr/>
+        </p:nvSpPr>
+        <p:spPr>
+          <a:xfrm>
+            <a:off x="7447135" y="4169664"/>
+            <a:ext cx="685800" cy="384048"/>
+          </a:xfrm>
+          <a:prstGeom prst="rect">
+            <a:avLst/>
+          </a:prstGeom>
+          <a:noFill/>
+          <a:ln/>
+        </p:spPr>
+        <p:txBody>
+          <a:bodyPr wrap="square" lIns="0" tIns="0" rIns="0" bIns="0" rtlCol="0" anchor="ctr"/>
+          <a:lstStyle/>
+          <a:p>
+            <a:pPr algn="ctr" indent="0" marL="0">
+              <a:buNone/>
+            </a:pPr>
+            <a:r>
+              <a:rPr lang="en-US" sz="900" b="1" dirty="0">
+                <a:solidFill>
+                  <a:srgbClr val="9D174D"/>
                 </a:solidFill>
                 <a:latin typeface="Trebuchet MS" pitchFamily="34" charset="0"/>
                 <a:ea typeface="Trebuchet MS" pitchFamily="34" charset="-122"/>
                 <a:cs typeface="Trebuchet MS" pitchFamily="34" charset="-120"/>
               </a:rPr>
-              <a:t>·</a:t>
-            </a:r>
-            <a:endParaRPr lang="en-US" sz="1600" dirty="0"/>
-          </a:p>
-        </p:txBody>
-      </p:sp>
-      <p:sp>
-        <p:nvSpPr>
-          <p:cNvPr id="34" name="Shape 32"/>
-          <p:cNvSpPr/>
-          <p:nvPr/>
-        </p:nvSpPr>
-        <p:spPr>
-          <a:xfrm>
-            <a:off x="6428232" y="3364992"/>
-            <a:ext cx="1645920" cy="475488"/>
-          </a:xfrm>
-          <a:prstGeom prst="rect">
-            <a:avLst>
-              <a:gd name="adj" fmla="val 9615"/>
-            </a:avLst>
-          </a:prstGeom>
-          <a:solidFill>
-            <a:srgbClr val="FFFFFF"/>
-          </a:solidFill>
-          <a:ln w="12700">
-            <a:solidFill>
-              <a:srgbClr val="0D9488"/>
-            </a:solidFill>
-            <a:prstDash val="solid"/>
-          </a:ln>
-        </p:spPr>
-      </p:sp>
-      <p:sp>
-        <p:nvSpPr>
-          <p:cNvPr id="35" name="Text 33"/>
-          <p:cNvSpPr/>
-          <p:nvPr/>
-        </p:nvSpPr>
-        <p:spPr>
-          <a:xfrm>
-            <a:off x="6428232" y="3364992"/>
-            <a:ext cx="1645920" cy="475488"/>
-          </a:xfrm>
-          <a:prstGeom prst="rect">
-            <a:avLst/>
-          </a:prstGeom>
-          <a:noFill/>
-          <a:ln/>
-        </p:spPr>
-        <p:txBody>
-          <a:bodyPr wrap="square" lIns="0" tIns="0" rIns="0" bIns="0" rtlCol="0" anchor="ctr"/>
-          <a:lstStyle/>
-          <a:p>
-            <a:pPr algn="ctr" indent="0" marL="0">
-              <a:buNone/>
-            </a:pPr>
-            <a:r>
-              <a:rPr lang="en-US" sz="1400" b="1" dirty="0">
-                <a:solidFill>
-                  <a:srgbClr val="0D9488"/>
-                </a:solidFill>
-                <a:latin typeface="Trebuchet MS" pitchFamily="34" charset="0"/>
-                <a:ea typeface="Trebuchet MS" pitchFamily="34" charset="-122"/>
-                <a:cs typeface="Trebuchet MS" pitchFamily="34" charset="-120"/>
-              </a:rPr>
-              <a:t>tials</a:t>
-            </a:r>
-            <a:endParaRPr lang="en-US" sz="1400" dirty="0"/>
-          </a:p>
-        </p:txBody>
-      </p:sp>
-      <p:sp>
-        <p:nvSpPr>
-          <p:cNvPr id="36" name="Shape 34"/>
-          <p:cNvSpPr/>
-          <p:nvPr/>
-        </p:nvSpPr>
-        <p:spPr>
-          <a:xfrm>
-            <a:off x="365760" y="4096512"/>
-            <a:ext cx="1371600" cy="804672"/>
-          </a:xfrm>
-          <a:prstGeom prst="rect">
-            <a:avLst>
-              <a:gd name="adj" fmla="val 6818"/>
-            </a:avLst>
-          </a:prstGeom>
-          <a:solidFill>
-            <a:srgbClr val="E2E8F0"/>
-          </a:solidFill>
-          <a:ln w="12700">
-            <a:solidFill>
-              <a:srgbClr val="E2E8F0"/>
-            </a:solidFill>
-            <a:prstDash val="solid"/>
-          </a:ln>
-        </p:spPr>
-      </p:sp>
-      <p:sp>
-        <p:nvSpPr>
-          <p:cNvPr id="37" name="Text 35"/>
-          <p:cNvSpPr/>
-          <p:nvPr/>
-        </p:nvSpPr>
-        <p:spPr>
-          <a:xfrm>
-            <a:off x="365760" y="4096512"/>
-            <a:ext cx="1371600" cy="804672"/>
-          </a:xfrm>
-          <a:prstGeom prst="rect">
-            <a:avLst/>
-          </a:prstGeom>
-          <a:noFill/>
-          <a:ln/>
-        </p:spPr>
-        <p:txBody>
-          <a:bodyPr wrap="square" lIns="0" tIns="0" rIns="0" bIns="0" rtlCol="0" anchor="ctr"/>
-          <a:lstStyle/>
-          <a:p>
-            <a:pPr algn="ctr" indent="0" marL="0">
-              <a:buNone/>
-            </a:pPr>
-            <a:r>
-              <a:rPr lang="en-US" sz="1100" b="1" dirty="0">
-                <a:solidFill>
-                  <a:srgbClr val="475569"/>
-                </a:solidFill>
-                <a:latin typeface="Trebuchet MS" pitchFamily="34" charset="0"/>
-                <a:ea typeface="Trebuchet MS" pitchFamily="34" charset="-122"/>
-                <a:cs typeface="Trebuchet MS" pitchFamily="34" charset="-120"/>
-              </a:rPr>
-              <a:t>Phonemes</a:t>
-            </a:r>
-            <a:endParaRPr lang="en-US" sz="1100" dirty="0"/>
-          </a:p>
-        </p:txBody>
-      </p:sp>
-      <p:sp>
-        <p:nvSpPr>
-          <p:cNvPr id="38" name="Shape 36"/>
-          <p:cNvSpPr/>
-          <p:nvPr/>
-        </p:nvSpPr>
-        <p:spPr>
-          <a:xfrm>
-            <a:off x="1874520" y="4096512"/>
-            <a:ext cx="6903720" cy="804672"/>
-          </a:xfrm>
-          <a:prstGeom prst="rect">
-            <a:avLst>
-              <a:gd name="adj" fmla="val 6818"/>
-            </a:avLst>
-          </a:prstGeom>
-          <a:solidFill>
-            <a:srgbClr val="FCE7F3"/>
-          </a:solidFill>
-          <a:ln w="12700">
-            <a:solidFill>
-              <a:srgbClr val="DB2777"/>
-            </a:solidFill>
-            <a:prstDash val="solid"/>
-          </a:ln>
-        </p:spPr>
-      </p:sp>
-      <p:sp>
-        <p:nvSpPr>
-          <p:cNvPr id="39" name="Shape 37"/>
-          <p:cNvSpPr/>
-          <p:nvPr/>
-        </p:nvSpPr>
-        <p:spPr>
-          <a:xfrm>
-            <a:off x="1951330" y="4169664"/>
-            <a:ext cx="676656" cy="384048"/>
-          </a:xfrm>
-          <a:prstGeom prst="rect">
-            <a:avLst>
-              <a:gd name="adj" fmla="val 9524"/>
-            </a:avLst>
-          </a:prstGeom>
-          <a:solidFill>
-            <a:srgbClr val="FFFFFF"/>
-          </a:solidFill>
-          <a:ln w="12700">
-            <a:solidFill>
-              <a:srgbClr val="DB2777"/>
-            </a:solidFill>
-            <a:prstDash val="solid"/>
-          </a:ln>
-        </p:spPr>
-      </p:sp>
-      <p:sp>
-        <p:nvSpPr>
-          <p:cNvPr id="40" name="Text 38"/>
-          <p:cNvSpPr/>
-          <p:nvPr/>
-        </p:nvSpPr>
-        <p:spPr>
-          <a:xfrm>
-            <a:off x="1951330" y="4169664"/>
-            <a:ext cx="676656" cy="384048"/>
-          </a:xfrm>
-          <a:prstGeom prst="rect">
-            <a:avLst/>
-          </a:prstGeom>
-          <a:noFill/>
-          <a:ln/>
-        </p:spPr>
-        <p:txBody>
-          <a:bodyPr wrap="square" lIns="0" tIns="0" rIns="0" bIns="0" rtlCol="0" anchor="ctr"/>
-          <a:lstStyle/>
-          <a:p>
-            <a:pPr algn="ctr" indent="0" marL="0">
-              <a:buNone/>
-            </a:pPr>
-            <a:r>
-              <a:rPr lang="en-US" sz="900" b="1" dirty="0">
-                <a:solidFill>
-                  <a:srgbClr val="9D174D"/>
-                </a:solidFill>
-                <a:latin typeface="Trebuchet MS" pitchFamily="34" charset="0"/>
-                <a:ea typeface="Trebuchet MS" pitchFamily="34" charset="-122"/>
-                <a:cs typeface="Trebuchet MS" pitchFamily="34" charset="-120"/>
-              </a:rPr>
-              <a:t>cr</a:t>
-            </a:r>
-            <a:endParaRPr lang="en-US" sz="900" dirty="0"/>
-          </a:p>
-        </p:txBody>
-      </p:sp>
-      <p:sp>
-        <p:nvSpPr>
-          <p:cNvPr id="41" name="Shape 39"/>
-          <p:cNvSpPr/>
-          <p:nvPr/>
-        </p:nvSpPr>
-        <p:spPr>
-          <a:xfrm>
-            <a:off x="2677363" y="4169664"/>
-            <a:ext cx="676656" cy="384048"/>
-          </a:xfrm>
-          <a:prstGeom prst="rect">
-            <a:avLst>
-              <a:gd name="adj" fmla="val 9524"/>
-            </a:avLst>
-          </a:prstGeom>
-          <a:solidFill>
-            <a:srgbClr val="FFFFFF"/>
-          </a:solidFill>
-          <a:ln w="12700">
-            <a:solidFill>
-              <a:srgbClr val="DB2777"/>
-            </a:solidFill>
-            <a:prstDash val="solid"/>
-          </a:ln>
-        </p:spPr>
-      </p:sp>
-      <p:sp>
-        <p:nvSpPr>
-          <p:cNvPr id="42" name="Text 40"/>
-          <p:cNvSpPr/>
-          <p:nvPr/>
-        </p:nvSpPr>
-        <p:spPr>
-          <a:xfrm>
-            <a:off x="2677363" y="4169664"/>
-            <a:ext cx="676656" cy="384048"/>
-          </a:xfrm>
-          <a:prstGeom prst="rect">
-            <a:avLst/>
-          </a:prstGeom>
-          <a:noFill/>
-          <a:ln/>
-        </p:spPr>
-        <p:txBody>
-          <a:bodyPr wrap="square" lIns="0" tIns="0" rIns="0" bIns="0" rtlCol="0" anchor="ctr"/>
-          <a:lstStyle/>
-          <a:p>
-            <a:pPr algn="ctr" indent="0" marL="0">
-              <a:buNone/>
-            </a:pPr>
-            <a:r>
-              <a:rPr lang="en-US" sz="900" b="1" dirty="0">
-                <a:solidFill>
-                  <a:srgbClr val="9D174D"/>
-                </a:solidFill>
-                <a:latin typeface="Trebuchet MS" pitchFamily="34" charset="0"/>
-                <a:ea typeface="Trebuchet MS" pitchFamily="34" charset="-122"/>
-                <a:cs typeface="Trebuchet MS" pitchFamily="34" charset="-120"/>
-              </a:rPr>
-              <a:t>e</a:t>
-            </a:r>
-            <a:endParaRPr lang="en-US" sz="900" dirty="0"/>
-          </a:p>
-        </p:txBody>
-      </p:sp>
-      <p:sp>
-        <p:nvSpPr>
-          <p:cNvPr id="43" name="Shape 41"/>
-          <p:cNvSpPr/>
-          <p:nvPr/>
-        </p:nvSpPr>
-        <p:spPr>
-          <a:xfrm>
-            <a:off x="3403397" y="4169664"/>
-            <a:ext cx="676656" cy="384048"/>
-          </a:xfrm>
-          <a:prstGeom prst="rect">
-            <a:avLst>
-              <a:gd name="adj" fmla="val 9524"/>
-            </a:avLst>
-          </a:prstGeom>
-          <a:solidFill>
-            <a:srgbClr val="FFFFFF"/>
-          </a:solidFill>
-          <a:ln w="12700">
-            <a:solidFill>
-              <a:srgbClr val="DB2777"/>
-            </a:solidFill>
-            <a:prstDash val="solid"/>
-          </a:ln>
-        </p:spPr>
-      </p:sp>
-      <p:sp>
-        <p:nvSpPr>
-          <p:cNvPr id="44" name="Text 42"/>
-          <p:cNvSpPr/>
-          <p:nvPr/>
-        </p:nvSpPr>
-        <p:spPr>
-          <a:xfrm>
-            <a:off x="3403397" y="4169664"/>
-            <a:ext cx="676656" cy="384048"/>
-          </a:xfrm>
-          <a:prstGeom prst="rect">
-            <a:avLst/>
-          </a:prstGeom>
-          <a:noFill/>
-          <a:ln/>
-        </p:spPr>
-        <p:txBody>
-          <a:bodyPr wrap="square" lIns="0" tIns="0" rIns="0" bIns="0" rtlCol="0" anchor="ctr"/>
-          <a:lstStyle/>
-          <a:p>
-            <a:pPr algn="ctr" indent="0" marL="0">
-              <a:buNone/>
-            </a:pPr>
-            <a:r>
-              <a:rPr lang="en-US" sz="900" b="1" dirty="0">
-                <a:solidFill>
-                  <a:srgbClr val="9D174D"/>
-                </a:solidFill>
-                <a:latin typeface="Trebuchet MS" pitchFamily="34" charset="0"/>
-                <a:ea typeface="Trebuchet MS" pitchFamily="34" charset="-122"/>
-                <a:cs typeface="Trebuchet MS" pitchFamily="34" charset="-120"/>
-              </a:rPr>
-              <a:t>d</a:t>
-            </a:r>
-            <a:endParaRPr lang="en-US" sz="900" dirty="0"/>
-          </a:p>
-        </p:txBody>
-      </p:sp>
-      <p:sp>
-        <p:nvSpPr>
-          <p:cNvPr id="45" name="Shape 43"/>
-          <p:cNvSpPr/>
-          <p:nvPr/>
-        </p:nvSpPr>
-        <p:spPr>
-          <a:xfrm>
-            <a:off x="4129430" y="4169664"/>
-            <a:ext cx="676656" cy="384048"/>
-          </a:xfrm>
-          <a:prstGeom prst="rect">
-            <a:avLst>
-              <a:gd name="adj" fmla="val 9524"/>
-            </a:avLst>
-          </a:prstGeom>
-          <a:solidFill>
-            <a:srgbClr val="FFFFFF"/>
-          </a:solidFill>
-          <a:ln w="12700">
-            <a:solidFill>
-              <a:srgbClr val="DB2777"/>
-            </a:solidFill>
-            <a:prstDash val="solid"/>
-          </a:ln>
-        </p:spPr>
-      </p:sp>
-      <p:sp>
-        <p:nvSpPr>
-          <p:cNvPr id="46" name="Text 44"/>
-          <p:cNvSpPr/>
-          <p:nvPr/>
-        </p:nvSpPr>
-        <p:spPr>
-          <a:xfrm>
-            <a:off x="4129430" y="4169664"/>
-            <a:ext cx="676656" cy="384048"/>
-          </a:xfrm>
-          <a:prstGeom prst="rect">
-            <a:avLst/>
-          </a:prstGeom>
-          <a:noFill/>
-          <a:ln/>
-        </p:spPr>
-        <p:txBody>
-          <a:bodyPr wrap="square" lIns="0" tIns="0" rIns="0" bIns="0" rtlCol="0" anchor="ctr"/>
-          <a:lstStyle/>
-          <a:p>
-            <a:pPr algn="ctr" indent="0" marL="0">
-              <a:buNone/>
-            </a:pPr>
-            <a:r>
-              <a:rPr lang="en-US" sz="900" b="1" dirty="0">
-                <a:solidFill>
-                  <a:srgbClr val="9D174D"/>
-                </a:solidFill>
-                <a:latin typeface="Trebuchet MS" pitchFamily="34" charset="0"/>
-                <a:ea typeface="Trebuchet MS" pitchFamily="34" charset="-122"/>
-                <a:cs typeface="Trebuchet MS" pitchFamily="34" charset="-120"/>
-              </a:rPr>
-              <a:t>e</a:t>
-            </a:r>
-            <a:endParaRPr lang="en-US" sz="900" dirty="0"/>
-          </a:p>
-        </p:txBody>
-      </p:sp>
-      <p:sp>
-        <p:nvSpPr>
-          <p:cNvPr id="47" name="Shape 45"/>
-          <p:cNvSpPr/>
-          <p:nvPr/>
-        </p:nvSpPr>
-        <p:spPr>
-          <a:xfrm>
-            <a:off x="4855464" y="4169664"/>
-            <a:ext cx="676656" cy="384048"/>
-          </a:xfrm>
-          <a:prstGeom prst="rect">
-            <a:avLst>
-              <a:gd name="adj" fmla="val 9524"/>
-            </a:avLst>
-          </a:prstGeom>
-          <a:solidFill>
-            <a:srgbClr val="FFFFFF"/>
-          </a:solidFill>
-          <a:ln w="12700">
-            <a:solidFill>
-              <a:srgbClr val="DB2777"/>
-            </a:solidFill>
-            <a:prstDash val="solid"/>
-          </a:ln>
-        </p:spPr>
-      </p:sp>
-      <p:sp>
-        <p:nvSpPr>
-          <p:cNvPr id="48" name="Text 46"/>
-          <p:cNvSpPr/>
-          <p:nvPr/>
-        </p:nvSpPr>
-        <p:spPr>
-          <a:xfrm>
-            <a:off x="4855464" y="4169664"/>
-            <a:ext cx="676656" cy="384048"/>
-          </a:xfrm>
-          <a:prstGeom prst="rect">
-            <a:avLst/>
-          </a:prstGeom>
-          <a:noFill/>
-          <a:ln/>
-        </p:spPr>
-        <p:txBody>
-          <a:bodyPr wrap="square" lIns="0" tIns="0" rIns="0" bIns="0" rtlCol="0" anchor="ctr"/>
-          <a:lstStyle/>
-          <a:p>
-            <a:pPr algn="ctr" indent="0" marL="0">
-              <a:buNone/>
-            </a:pPr>
-            <a:r>
-              <a:rPr lang="en-US" sz="900" b="1" dirty="0">
-                <a:solidFill>
-                  <a:srgbClr val="9D174D"/>
-                </a:solidFill>
-                <a:latin typeface="Trebuchet MS" pitchFamily="34" charset="0"/>
-                <a:ea typeface="Trebuchet MS" pitchFamily="34" charset="-122"/>
-                <a:cs typeface="Trebuchet MS" pitchFamily="34" charset="-120"/>
-              </a:rPr>
-              <a:t>n</a:t>
-            </a:r>
-            <a:endParaRPr lang="en-US" sz="900" dirty="0"/>
-          </a:p>
-        </p:txBody>
-      </p:sp>
-      <p:sp>
-        <p:nvSpPr>
-          <p:cNvPr id="49" name="Shape 47"/>
-          <p:cNvSpPr/>
-          <p:nvPr/>
-        </p:nvSpPr>
-        <p:spPr>
-          <a:xfrm>
-            <a:off x="5581498" y="4169664"/>
-            <a:ext cx="676656" cy="384048"/>
-          </a:xfrm>
-          <a:prstGeom prst="rect">
-            <a:avLst>
-              <a:gd name="adj" fmla="val 9524"/>
-            </a:avLst>
-          </a:prstGeom>
-          <a:solidFill>
-            <a:srgbClr val="FFFFFF"/>
-          </a:solidFill>
-          <a:ln w="12700">
-            <a:solidFill>
-              <a:srgbClr val="DB2777"/>
-            </a:solidFill>
-            <a:prstDash val="solid"/>
-          </a:ln>
-        </p:spPr>
-      </p:sp>
-      <p:sp>
-        <p:nvSpPr>
-          <p:cNvPr id="50" name="Text 48"/>
-          <p:cNvSpPr/>
-          <p:nvPr/>
-        </p:nvSpPr>
-        <p:spPr>
-          <a:xfrm>
-            <a:off x="5581498" y="4169664"/>
-            <a:ext cx="676656" cy="384048"/>
-          </a:xfrm>
-          <a:prstGeom prst="rect">
-            <a:avLst/>
-          </a:prstGeom>
-          <a:noFill/>
-          <a:ln/>
-        </p:spPr>
-        <p:txBody>
-          <a:bodyPr wrap="square" lIns="0" tIns="0" rIns="0" bIns="0" rtlCol="0" anchor="ctr"/>
-          <a:lstStyle/>
-          <a:p>
-            <a:pPr algn="ctr" indent="0" marL="0">
-              <a:buNone/>
-            </a:pPr>
-            <a:r>
-              <a:rPr lang="en-US" sz="900" b="1" dirty="0">
-                <a:solidFill>
-                  <a:srgbClr val="9D174D"/>
-                </a:solidFill>
-                <a:latin typeface="Trebuchet MS" pitchFamily="34" charset="0"/>
-                <a:ea typeface="Trebuchet MS" pitchFamily="34" charset="-122"/>
-                <a:cs typeface="Trebuchet MS" pitchFamily="34" charset="-120"/>
-              </a:rPr>
               <a:t>t</a:t>
-            </a:r>
-            <a:endParaRPr lang="en-US" sz="900" dirty="0"/>
-          </a:p>
-        </p:txBody>
-      </p:sp>
-      <p:sp>
-        <p:nvSpPr>
-          <p:cNvPr id="51" name="Text 49"/>
-          <p:cNvSpPr/>
-          <p:nvPr/>
-        </p:nvSpPr>
-        <p:spPr>
-          <a:xfrm>
-            <a:off x="5581498" y="4572000"/>
-            <a:ext cx="676656" cy="219456"/>
-          </a:xfrm>
-          <a:prstGeom prst="rect">
-            <a:avLst/>
-          </a:prstGeom>
-          <a:noFill/>
-          <a:ln/>
-        </p:spPr>
-        <p:txBody>
-          <a:bodyPr wrap="square" lIns="0" tIns="0" rIns="0" bIns="0" rtlCol="0" anchor="t"/>
-          <a:lstStyle/>
-          <a:p>
-            <a:pPr algn="ctr" indent="0" marL="0">
-              <a:buNone/>
-            </a:pPr>
-            <a:r>
-              <a:rPr lang="en-US" sz="750" i="1" dirty="0">
-                <a:solidFill>
-                  <a:srgbClr val="94A3B8"/>
-                </a:solidFill>
-                <a:latin typeface="Calibri" pitchFamily="34" charset="0"/>
-                <a:ea typeface="Calibri" pitchFamily="34" charset="-122"/>
-                <a:cs typeface="Calibri" pitchFamily="34" charset="-120"/>
-              </a:rPr>
-              <a:t>/sh/</a:t>
-            </a:r>
-            <a:endParaRPr lang="en-US" sz="750" dirty="0"/>
-          </a:p>
-        </p:txBody>
-      </p:sp>
-      <p:sp>
-        <p:nvSpPr>
-          <p:cNvPr id="52" name="Shape 50"/>
-          <p:cNvSpPr/>
-          <p:nvPr/>
-        </p:nvSpPr>
-        <p:spPr>
-          <a:xfrm>
-            <a:off x="6307531" y="4169664"/>
-            <a:ext cx="676656" cy="384048"/>
-          </a:xfrm>
-          <a:prstGeom prst="rect">
-            <a:avLst>
-              <a:gd name="adj" fmla="val 9524"/>
-            </a:avLst>
-          </a:prstGeom>
-          <a:solidFill>
-            <a:srgbClr val="FFFFFF"/>
-          </a:solidFill>
-          <a:ln w="12700">
-            <a:solidFill>
-              <a:srgbClr val="DB2777"/>
-            </a:solidFill>
-            <a:prstDash val="solid"/>
-          </a:ln>
-        </p:spPr>
-      </p:sp>
-      <p:sp>
-        <p:nvSpPr>
-          <p:cNvPr id="53" name="Text 51"/>
-          <p:cNvSpPr/>
-          <p:nvPr/>
-        </p:nvSpPr>
-        <p:spPr>
-          <a:xfrm>
-            <a:off x="6307531" y="4169664"/>
-            <a:ext cx="676656" cy="384048"/>
-          </a:xfrm>
-          <a:prstGeom prst="rect">
-            <a:avLst/>
-          </a:prstGeom>
-          <a:noFill/>
-          <a:ln/>
-        </p:spPr>
-        <p:txBody>
-          <a:bodyPr wrap="square" lIns="0" tIns="0" rIns="0" bIns="0" rtlCol="0" anchor="ctr"/>
-          <a:lstStyle/>
-          <a:p>
-            <a:pPr algn="ctr" indent="0" marL="0">
-              <a:buNone/>
-            </a:pPr>
-            <a:r>
-              <a:rPr lang="en-US" sz="900" b="1" dirty="0">
-                <a:solidFill>
-                  <a:srgbClr val="9D174D"/>
-                </a:solidFill>
-                <a:latin typeface="Trebuchet MS" pitchFamily="34" charset="0"/>
-                <a:ea typeface="Trebuchet MS" pitchFamily="34" charset="-122"/>
-                <a:cs typeface="Trebuchet MS" pitchFamily="34" charset="-120"/>
-              </a:rPr>
-              <a:t>ia</a:t>
-            </a:r>
-            <a:endParaRPr lang="en-US" sz="900" dirty="0"/>
-          </a:p>
-        </p:txBody>
-      </p:sp>
-      <p:sp>
-        <p:nvSpPr>
-          <p:cNvPr id="54" name="Shape 52"/>
-          <p:cNvSpPr/>
-          <p:nvPr/>
-        </p:nvSpPr>
-        <p:spPr>
-          <a:xfrm>
-            <a:off x="7033565" y="4169664"/>
-            <a:ext cx="676656" cy="384048"/>
-          </a:xfrm>
-          <a:prstGeom prst="rect">
-            <a:avLst>
-              <a:gd name="adj" fmla="val 9524"/>
-            </a:avLst>
-          </a:prstGeom>
-          <a:solidFill>
-            <a:srgbClr val="FFFFFF"/>
-          </a:solidFill>
-          <a:ln w="12700">
-            <a:solidFill>
-              <a:srgbClr val="DB2777"/>
-            </a:solidFill>
-            <a:prstDash val="solid"/>
-          </a:ln>
-        </p:spPr>
-      </p:sp>
-      <p:sp>
-        <p:nvSpPr>
-          <p:cNvPr id="55" name="Text 53"/>
-          <p:cNvSpPr/>
-          <p:nvPr/>
-        </p:nvSpPr>
-        <p:spPr>
-          <a:xfrm>
-            <a:off x="7033565" y="4169664"/>
-            <a:ext cx="676656" cy="384048"/>
-          </a:xfrm>
-          <a:prstGeom prst="rect">
-            <a:avLst/>
-          </a:prstGeom>
-          <a:noFill/>
-          <a:ln/>
-        </p:spPr>
-        <p:txBody>
-          <a:bodyPr wrap="square" lIns="0" tIns="0" rIns="0" bIns="0" rtlCol="0" anchor="ctr"/>
-          <a:lstStyle/>
-          <a:p>
-            <a:pPr algn="ctr" indent="0" marL="0">
-              <a:buNone/>
-            </a:pPr>
-            <a:r>
-              <a:rPr lang="en-US" sz="900" b="1" dirty="0">
-                <a:solidFill>
-                  <a:srgbClr val="9D174D"/>
-                </a:solidFill>
-                <a:latin typeface="Trebuchet MS" pitchFamily="34" charset="0"/>
-                <a:ea typeface="Trebuchet MS" pitchFamily="34" charset="-122"/>
-                <a:cs typeface="Trebuchet MS" pitchFamily="34" charset="-120"/>
-              </a:rPr>
-              <a:t>l</a:t>
-            </a:r>
-            <a:endParaRPr lang="en-US" sz="900" dirty="0"/>
-          </a:p>
-        </p:txBody>
-      </p:sp>
-      <p:sp>
-        <p:nvSpPr>
-          <p:cNvPr id="56" name="Shape 54"/>
-          <p:cNvSpPr/>
-          <p:nvPr/>
-        </p:nvSpPr>
-        <p:spPr>
-          <a:xfrm>
-            <a:off x="7759598" y="4169664"/>
-            <a:ext cx="676656" cy="384048"/>
-          </a:xfrm>
-          <a:prstGeom prst="rect">
-            <a:avLst>
-              <a:gd name="adj" fmla="val 9524"/>
-            </a:avLst>
-          </a:prstGeom>
-          <a:solidFill>
-            <a:srgbClr val="FFFFFF"/>
-          </a:solidFill>
-          <a:ln w="12700">
-            <a:solidFill>
-              <a:srgbClr val="DB2777"/>
-            </a:solidFill>
-            <a:prstDash val="solid"/>
-          </a:ln>
-        </p:spPr>
-      </p:sp>
-      <p:sp>
-        <p:nvSpPr>
-          <p:cNvPr id="57" name="Text 55"/>
-          <p:cNvSpPr/>
-          <p:nvPr/>
-        </p:nvSpPr>
-        <p:spPr>
-          <a:xfrm>
-            <a:off x="7759598" y="4169664"/>
-            <a:ext cx="676656" cy="384048"/>
-          </a:xfrm>
-          <a:prstGeom prst="rect">
-            <a:avLst/>
-          </a:prstGeom>
-          <a:noFill/>
-          <a:ln/>
-        </p:spPr>
-        <p:txBody>
-          <a:bodyPr wrap="square" lIns="0" tIns="0" rIns="0" bIns="0" rtlCol="0" anchor="ctr"/>
-          <a:lstStyle/>
-          <a:p>
-            <a:pPr algn="ctr" indent="0" marL="0">
-              <a:buNone/>
-            </a:pPr>
-            <a:r>
-              <a:rPr lang="en-US" sz="900" b="1" dirty="0">
-                <a:solidFill>
-                  <a:srgbClr val="9D174D"/>
-                </a:solidFill>
-                <a:latin typeface="Trebuchet MS" pitchFamily="34" charset="0"/>
-                <a:ea typeface="Trebuchet MS" pitchFamily="34" charset="-122"/>
-                <a:cs typeface="Trebuchet MS" pitchFamily="34" charset="-120"/>
-              </a:rPr>
-              <a:t>s</a:t>
             </a:r>
             <a:endParaRPr lang="en-US" sz="900" dirty="0"/>
           </a:p>
@@ -36759,7 +36534,7 @@
                 <a:ea typeface="Trebuchet MS" pitchFamily="34" charset="-122"/>
                 <a:cs typeface="Trebuchet MS" pitchFamily="34" charset="-120"/>
               </a:rPr>
-              <a:t>ac-</a:t>
+              <a:t>dis-</a:t>
             </a:r>
             <a:endParaRPr lang="en-US" sz="1300" dirty="0"/>
           </a:p>
@@ -36848,7 +36623,7 @@
                 <a:ea typeface="Trebuchet MS" pitchFamily="34" charset="-122"/>
                 <a:cs typeface="Trebuchet MS" pitchFamily="34" charset="-120"/>
               </a:rPr>
-              <a:t>-ulous</a:t>
+              <a:t>-ence</a:t>
             </a:r>
             <a:endParaRPr lang="en-US" sz="1300" dirty="0"/>
           </a:p>
@@ -36912,7 +36687,7 @@
                 <a:ea typeface="Trebuchet MS" pitchFamily="34" charset="-122"/>
                 <a:cs typeface="Trebuchet MS" pitchFamily="34" charset="-120"/>
               </a:rPr>
-              <a:t>dis-</a:t>
+              <a:t>ac-</a:t>
             </a:r>
             <a:endParaRPr lang="en-US" sz="1300" dirty="0"/>
           </a:p>
@@ -37001,7 +36776,7 @@
                 <a:ea typeface="Trebuchet MS" pitchFamily="34" charset="-122"/>
                 <a:cs typeface="Trebuchet MS" pitchFamily="34" charset="-120"/>
               </a:rPr>
-              <a:t>-ence</a:t>
+              <a:t>-it</a:t>
             </a:r>
             <a:endParaRPr lang="en-US" sz="1300" dirty="0"/>
           </a:p>
@@ -37154,7 +36929,7 @@
                 <a:ea typeface="Trebuchet MS" pitchFamily="34" charset="-122"/>
                 <a:cs typeface="Trebuchet MS" pitchFamily="34" charset="-120"/>
               </a:rPr>
-              <a:t>-it</a:t>
+              <a:t>-ulous</a:t>
             </a:r>
             <a:endParaRPr lang="en-US" sz="1300" dirty="0"/>
           </a:p>
@@ -37610,7 +37385,7 @@
                 <a:ea typeface="Trebuchet MS" pitchFamily="34" charset="-122"/>
                 <a:cs typeface="Trebuchet MS" pitchFamily="34" charset="-120"/>
               </a:rPr>
-              <a:t>credulous</a:t>
+              <a:t>credence</a:t>
             </a:r>
             <a:endParaRPr lang="en-US" sz="1200" dirty="0"/>
           </a:p>
@@ -37742,7 +37517,7 @@
                 <a:ea typeface="Trebuchet MS" pitchFamily="34" charset="-122"/>
                 <a:cs typeface="Trebuchet MS" pitchFamily="34" charset="-120"/>
               </a:rPr>
-              <a:t>discredit</a:t>
+              <a:t>credulous</a:t>
             </a:r>
             <a:endParaRPr lang="en-US" sz="1200" dirty="0"/>
           </a:p>
@@ -37808,7 +37583,7 @@
                 <a:ea typeface="Trebuchet MS" pitchFamily="34" charset="-122"/>
                 <a:cs typeface="Trebuchet MS" pitchFamily="34" charset="-120"/>
               </a:rPr>
-              <a:t>accredited</a:t>
+              <a:t>discredit</a:t>
             </a:r>
             <a:endParaRPr lang="en-US" sz="1200" dirty="0"/>
           </a:p>
@@ -37874,7 +37649,7 @@
                 <a:ea typeface="Trebuchet MS" pitchFamily="34" charset="-122"/>
                 <a:cs typeface="Trebuchet MS" pitchFamily="34" charset="-120"/>
               </a:rPr>
-              <a:t>incredulous</a:t>
+              <a:t>accredited</a:t>
             </a:r>
             <a:endParaRPr lang="en-US" sz="1200" dirty="0"/>
           </a:p>
@@ -39062,7 +38837,7 @@
                 <a:ea typeface="Calibri" pitchFamily="34" charset="-122"/>
                 <a:cs typeface="Calibri" pitchFamily="34" charset="-120"/>
               </a:rPr>
-              <a:t>1.  The root 'cred' comes from a Latin word meaning to believe or trust.</a:t>
+              <a:t>1.  The prefix 'dis' in 'discredit' reverses the meaning to suggest removing trust.</a:t>
             </a:r>
             <a:endParaRPr lang="en-US" sz="1300" dirty="0"/>
           </a:p>
@@ -39201,7 +38976,7 @@
                 <a:ea typeface="Calibri" pitchFamily="34" charset="-122"/>
                 <a:cs typeface="Calibri" pitchFamily="34" charset="-120"/>
               </a:rPr>
-              <a:t>2.  The word 'incredible' means something that is easy to believe.</a:t>
+              <a:t>2.  The root 'cred' originally came from Ancient Greek.</a:t>
             </a:r>
             <a:endParaRPr lang="en-US" sz="1300" dirty="0"/>
           </a:p>
@@ -39340,7 +39115,7 @@
                 <a:ea typeface="Calibri" pitchFamily="34" charset="-122"/>
                 <a:cs typeface="Calibri" pitchFamily="34" charset="-120"/>
               </a:rPr>
-              <a:t>3.  A credible witness is someone whose account can be trusted and believed.</a:t>
+              <a:t>3.  A credible witness is one whose account can be trusted.</a:t>
             </a:r>
             <a:endParaRPr lang="en-US" sz="1300" dirty="0"/>
           </a:p>
@@ -39479,7 +39254,7 @@
                 <a:ea typeface="Calibri" pitchFamily="34" charset="-122"/>
                 <a:cs typeface="Calibri" pitchFamily="34" charset="-120"/>
               </a:rPr>
-              <a:t>4.  The prefix 'in-' in 'incredible' makes the word mean 'not believable'.</a:t>
+              <a:t>4.  The root 'cred' comes from a Latin word meaning to believe or trust.</a:t>
             </a:r>
             <a:endParaRPr lang="en-US" sz="1300" dirty="0"/>
           </a:p>
@@ -39618,7 +39393,7 @@
                 <a:ea typeface="Calibri" pitchFamily="34" charset="-122"/>
                 <a:cs typeface="Calibri" pitchFamily="34" charset="-120"/>
               </a:rPr>
-              <a:t>5.  The root 'cred' comes from a Greek word.</a:t>
+              <a:t>5.  The word 'incredible' means something that is very easy to believe.</a:t>
             </a:r>
             <a:endParaRPr lang="en-US" sz="1300" dirty="0"/>
           </a:p>
@@ -40455,7 +40230,7 @@
                 <a:ea typeface="Trebuchet MS" pitchFamily="34" charset="-122"/>
                 <a:cs typeface="Trebuchet MS" pitchFamily="34" charset="-120"/>
               </a:rPr>
-              <a:t>credulous</a:t>
+              <a:t>credence</a:t>
             </a:r>
             <a:endParaRPr lang="en-US" sz="1300" dirty="0"/>
           </a:p>
@@ -40587,7 +40362,7 @@
                 <a:ea typeface="Trebuchet MS" pitchFamily="34" charset="-122"/>
                 <a:cs typeface="Trebuchet MS" pitchFamily="34" charset="-120"/>
               </a:rPr>
-              <a:t>discredit</a:t>
+              <a:t>credulous</a:t>
             </a:r>
             <a:endParaRPr lang="en-US" sz="1300" dirty="0"/>
           </a:p>
@@ -40653,7 +40428,7 @@
                 <a:ea typeface="Trebuchet MS" pitchFamily="34" charset="-122"/>
                 <a:cs typeface="Trebuchet MS" pitchFamily="34" charset="-120"/>
               </a:rPr>
-              <a:t>accredited</a:t>
+              <a:t>discredit</a:t>
             </a:r>
             <a:endParaRPr lang="en-US" sz="1300" dirty="0"/>
           </a:p>
@@ -41438,7 +41213,7 @@
                 <a:ea typeface="Trebuchet MS" pitchFamily="34" charset="-122"/>
                 <a:cs typeface="Trebuchet MS" pitchFamily="34" charset="-120"/>
               </a:rPr>
-              <a:t>ac-</a:t>
+              <a:t>dis-</a:t>
             </a:r>
             <a:endParaRPr lang="en-US" sz="1300" dirty="0"/>
           </a:p>
@@ -41527,7 +41302,7 @@
                 <a:ea typeface="Trebuchet MS" pitchFamily="34" charset="-122"/>
                 <a:cs typeface="Trebuchet MS" pitchFamily="34" charset="-120"/>
               </a:rPr>
-              <a:t>-ulous</a:t>
+              <a:t>-ence</a:t>
             </a:r>
             <a:endParaRPr lang="en-US" sz="1300" dirty="0"/>
           </a:p>
@@ -41591,7 +41366,7 @@
                 <a:ea typeface="Trebuchet MS" pitchFamily="34" charset="-122"/>
                 <a:cs typeface="Trebuchet MS" pitchFamily="34" charset="-120"/>
               </a:rPr>
-              <a:t>dis-</a:t>
+              <a:t>ac-</a:t>
             </a:r>
             <a:endParaRPr lang="en-US" sz="1300" dirty="0"/>
           </a:p>
@@ -41680,7 +41455,7 @@
                 <a:ea typeface="Trebuchet MS" pitchFamily="34" charset="-122"/>
                 <a:cs typeface="Trebuchet MS" pitchFamily="34" charset="-120"/>
               </a:rPr>
-              <a:t>-ence</a:t>
+              <a:t>-it</a:t>
             </a:r>
             <a:endParaRPr lang="en-US" sz="1300" dirty="0"/>
           </a:p>
@@ -41833,7 +41608,7 @@
                 <a:ea typeface="Trebuchet MS" pitchFamily="34" charset="-122"/>
                 <a:cs typeface="Trebuchet MS" pitchFamily="34" charset="-120"/>
               </a:rPr>
-              <a:t>-it</a:t>
+              <a:t>-ulous</a:t>
             </a:r>
             <a:endParaRPr lang="en-US" sz="1300" dirty="0"/>
           </a:p>
@@ -42897,7 +42672,7 @@
                 <a:ea typeface="Calibri" pitchFamily="34" charset="-122"/>
                 <a:cs typeface="Calibri" pitchFamily="34" charset="-120"/>
               </a:rPr>
-              <a:t>Officially recognised and trusted as meeting a certain standard.</a:t>
+              <a:t>To make people stop trusting or believing in someone or something.</a:t>
             </a:r>
             <a:endParaRPr lang="en-US" sz="1200" dirty="0"/>
           </a:p>
@@ -43036,7 +42811,7 @@
                 <a:ea typeface="Calibri" pitchFamily="34" charset="-122"/>
                 <a:cs typeface="Calibri" pitchFamily="34" charset="-120"/>
               </a:rPr>
-              <a:t>Describing someone who believes things too easily, without much proof.</a:t>
+              <a:t>The belief that something is true or can be trusted.</a:t>
             </a:r>
             <a:endParaRPr lang="en-US" sz="1200" dirty="0"/>
           </a:p>
@@ -43175,7 +42950,7 @@
                 <a:ea typeface="Calibri" pitchFamily="34" charset="-122"/>
                 <a:cs typeface="Calibri" pitchFamily="34" charset="-120"/>
               </a:rPr>
-              <a:t>To make people stop believing or trusting someone or something.</a:t>
+              <a:t>Describing someone who is too quick to believe things without checking if they are true.</a:t>
             </a:r>
             <a:endParaRPr lang="en-US" sz="1200" dirty="0"/>
           </a:p>
@@ -43248,7 +43023,7 @@
                 <a:ea typeface="Trebuchet MS" pitchFamily="34" charset="-122"/>
                 <a:cs typeface="Trebuchet MS" pitchFamily="34" charset="-120"/>
               </a:rPr>
-              <a:t>credulous</a:t>
+              <a:t>credence</a:t>
             </a:r>
             <a:endParaRPr lang="en-US" sz="1200" dirty="0"/>
           </a:p>
@@ -43314,7 +43089,7 @@
                 <a:ea typeface="Calibri" pitchFamily="34" charset="-122"/>
                 <a:cs typeface="Calibri" pitchFamily="34" charset="-120"/>
               </a:rPr>
-              <a:t>A person's qualifications or achievements that show they can be trusted to do a job.</a:t>
+              <a:t>Proof that someone has the skills, training, or qualities needed for a job or task.</a:t>
             </a:r>
             <a:endParaRPr lang="en-US" sz="1200" dirty="0"/>
           </a:p>
@@ -43453,7 +43228,7 @@
                 <a:ea typeface="Calibri" pitchFamily="34" charset="-122"/>
                 <a:cs typeface="Calibri" pitchFamily="34" charset="-120"/>
               </a:rPr>
-              <a:t>Something that can be believed or trusted because it seems real or possible.</a:t>
+              <a:t>Something that can be believed or trusted because it seems real and possible.</a:t>
             </a:r>
             <a:endParaRPr lang="en-US" sz="1200" dirty="0"/>
           </a:p>
@@ -43526,7 +43301,7 @@
                 <a:ea typeface="Trebuchet MS" pitchFamily="34" charset="-122"/>
                 <a:cs typeface="Trebuchet MS" pitchFamily="34" charset="-120"/>
               </a:rPr>
-              <a:t>discredit</a:t>
+              <a:t>credulous</a:t>
             </a:r>
             <a:endParaRPr lang="en-US" sz="1200" dirty="0"/>
           </a:p>
@@ -43592,7 +43367,7 @@
                 <a:ea typeface="Calibri" pitchFamily="34" charset="-122"/>
                 <a:cs typeface="Calibri" pitchFamily="34" charset="-120"/>
               </a:rPr>
-              <a:t>Praise or recognition given to someone for something they have done, or trust that someone will pay money back later.</a:t>
+              <a:t>Praise or recognition given to someone for something they have done well.</a:t>
             </a:r>
             <a:endParaRPr lang="en-US" sz="1200" dirty="0"/>
           </a:p>
@@ -43665,7 +43440,7 @@
                 <a:ea typeface="Trebuchet MS" pitchFamily="34" charset="-122"/>
                 <a:cs typeface="Trebuchet MS" pitchFamily="34" charset="-120"/>
               </a:rPr>
-              <a:t>accredited</a:t>
+              <a:t>discredit</a:t>
             </a:r>
             <a:endParaRPr lang="en-US" sz="1200" dirty="0"/>
           </a:p>
@@ -44226,7 +44001,7 @@
                 <a:ea typeface="Calibri" pitchFamily="34" charset="-122"/>
                 <a:cs typeface="Calibri" pitchFamily="34" charset="-120"/>
               </a:rPr>
-              <a:t>The scientist gave an incredible presentation about the discovery of a new species in the rainforest.</a:t>
+              <a:t>The scientist gave a credible explanation for why the volcano erupted, and everyone in the class believed her.</a:t>
             </a:r>
             <a:endParaRPr lang="en-US" sz="1500" dirty="0"/>
           </a:p>
@@ -44390,7 +44165,7 @@
                 <a:ea typeface="Calibri" pitchFamily="34" charset="-122"/>
                 <a:cs typeface="Calibri" pitchFamily="34" charset="-120"/>
               </a:rPr>
-              <a:t>The school received accredited status after inspectors checked that its programmes met the highest standards.</a:t>
+              <a:t>It seemed incredible that the tiny seed had grown into such a tall tree in just one season.</a:t>
             </a:r>
             <a:endParaRPr lang="en-US" sz="1500" dirty="0"/>
           </a:p>
@@ -44554,7 +44329,7 @@
                 <a:ea typeface="Calibri" pitchFamily="34" charset="-122"/>
                 <a:cs typeface="Calibri" pitchFamily="34" charset="-120"/>
               </a:rPr>
-              <a:t>She found it hard to discredit the report because so many people had witnessed the same event.</a:t>
+              <a:t>The teacher gave full credit to Maya for coming up with the idea for the class project.</a:t>
             </a:r>
             <a:endParaRPr lang="en-US" sz="1500" dirty="0"/>
           </a:p>
